--- a/docs/obi-e2e-onboarding.pptx
+++ b/docs/obi-e2e-onboarding.pptx
@@ -121,14 +121,14 @@
   <p:extLst>
     <p:ext uri="{521415D9-36F7-43E2-AB2F-B90AF26B5E84}">
       <p14:sectionLst xmlns:p14="http://schemas.microsoft.com/office/powerpoint/2010/main">
-        <p14:section name="What it is" id="{0bde6199-2397-a8d3-31d2-e6bb1d03f35e}">
+        <p14:section name="What it is" id="{238da6ed-f08b-ae7b-b642-4c9762d207d4}">
           <p14:sldIdLst>
             <p14:sldId id="256"/>
             <p14:sldId id="257"/>
             <p14:sldId id="258"/>
           </p14:sldIdLst>
         </p14:section>
-        <p14:section name="How it runs" id="{970a6bdd-3679-b002-cb2c-064f9caa5e86}">
+        <p14:section name="How it runs" id="{4588d1a3-d804-7ff2-94ff-b91aa3398837}">
           <p14:sldIdLst>
             <p14:sldId id="259"/>
             <p14:sldId id="260"/>
@@ -136,7 +136,7 @@
             <p14:sldId id="262"/>
           </p14:sldIdLst>
         </p14:section>
-        <p14:section name="Write tests" id="{78d280cd-ae40-a31a-cf37-08f03a0976a8}">
+        <p14:section name="Write tests" id="{7bfc92e9-e4b0-d28f-9f33-e5e76abb0f5a}">
           <p14:sldIdLst>
             <p14:sldId id="263"/>
             <p14:sldId id="264"/>
@@ -146,12 +146,12 @@
             <p14:sldId id="268"/>
           </p14:sldIdLst>
         </p14:section>
-        <p14:section name="Demo" id="{7ce5c120-ea7c-3101-3874-000a30e53407}">
+        <p14:section name="Demo" id="{25ba1a22-88af-301c-5320-1f7162f0804e}">
           <p14:sldIdLst>
             <p14:sldId id="269"/>
           </p14:sldIdLst>
         </p14:section>
-        <p14:section name="When it is red" id="{121e7c86-25e6-acd5-6554-fe985adac931}">
+        <p14:section name="When it is red" id="{5ebb4cbc-843d-ee90-6eb1-8fa2579664e6}">
           <p14:sldIdLst>
             <p14:sldId id="270"/>
           </p14:sldIdLst>
@@ -560,7 +560,7 @@
           <a:p>
             <a:r>
               <a:rPr lang="en-US" dirty="0"/>
-              <a:t>Today: what our end-to-end suite is, how it is organised, when it runs, how to set it up, and how to write a test with an AI agent. Two live demos at the end that you can follow on your own machine.</a:t>
+              <a:t>Today: what our end-to-end suite is, how it is organised, when it runs, how to set it up, and how to write a test with an AI agent. One live demo at the end that you can follow on your own machine.</a:t>
             </a:r>
             <a:endParaRPr lang="en-US" dirty="0"/>
           </a:p>
@@ -912,7 +912,7 @@
           <a:p>
             <a:r>
               <a:rPr lang="en-US" dirty="0"/>
-              <a:t>When /e2e-generate or /e2e-heal needs to find something on a page, the agent opens the real app with the Playwright CLI rather than guessing from your English. It runs headless in a named session (-s=obi), so one browser stays alive across commands and no command touches another agent’s browser. It loads the sign-in that make auth saved, goes to the page, and uses find to look for the words your scenario quotes; it can also read test ids with eval, and check console and requests to tell a locator problem from a backend error. make install installs the playwright-cli skill for Claude Code and for every other agent. You can run the same commands yourself to look at a page. A redirect to /app/log-in means the 60-minute sign-in expired: run make auth again. If the playwright-cli command is not installed globally, bunx --bun playwright cli &lt;command&gt; does the same; never plain bunx playwright.</a:t>
+              <a:t>When /e2e-generate or /e2e-heal needs to find something on a page, the agent opens the real app with the Playwright CLI rather than guessing from your English. It signs in with the session make auth saved, opens the page your scenario starts on, and looks for each word your scenario quotes. It writes the check with the element it actually found, and runs the test to prove it. One browser stays open for the whole job, headless, in its own named session, so nothing appears on your screen and it never touches another agent’s browser. It also reads the page’s test ids, console and network calls, which is how it tells a moved button from a backend error. make setup installs it as a skill for Claude Code and for every other agent. If the agent lands on the log-in page, the 60-minute sign-in expired: run make auth.</a:t>
             </a:r>
             <a:endParaRPr lang="en-US" dirty="0"/>
           </a:p>
@@ -1088,7 +1088,7 @@
           <a:p>
             <a:r>
               <a:rPr lang="en-US" dirty="0"/>
-              <a:t>When a test turns red, ask one question. If the product changed on purpose, the scenario is out of date: update scenario.md, then run /e2e-heal. In September the app regrouped circuit files as "Circuit directory": that was a yes, so six workflow scenarios were updated. If the product did not change on purpose, it is a bug: report it with the evidence and leave the test red. The e-feature launch error was a no; the test stayed red until the backend was fixed. "Expected: Running, Actual: Failed" is a bug, never a test update. A flaky test is a bug too: fix it or delete it, no retries.</a:t>
+              <a:t>When a test turns red, ask one question. If the product changed on purpose, the scenario is out of date: update scenario.md, then run /e2e-heal. In September the app regrouped circuit files as "Circuit directory": that was a yes, so six workflow scenarios were updated. If the product did not change on purpose, it is a bug: report it with the evidence and leave the test red. The report helps: each failing test shows its likely cause, such as a backend error or a task’s own error, above the test’s error. "Expected: Running, Actual: Failed" is a bug, never a test update. A flaky test is a bug too: fix it or delete it, no retries.</a:t>
             </a:r>
             <a:endParaRPr lang="en-US" dirty="0"/>
           </a:p>
@@ -1264,7 +1264,7 @@
           <a:p>
             <a:r>
               <a:rPr lang="en-US" dirty="0"/>
-              <a:t>84 scenario files hold 300 cases. Some cases run once per configuration in their seed, which is why there are 312 tests. On staging between 17 September and 8 October, 282 to 292 passed each night and about 20 were skipped. A regular run takes 31 to 42 minutes.</a:t>
+              <a:t>84 scenario files hold 300 cases. Some cases run once per configuration in their seed, which is why there are 312 tests. A regular run takes 31 to 42 minutes.</a:t>
             </a:r>
             <a:endParaRPr lang="en-US" dirty="0"/>
           </a:p>
@@ -1528,7 +1528,7 @@
           <a:p>
             <a:r>
               <a:rPr lang="en-US" dirty="0"/>
-              <a:t>Every morning at 06:00 Swiss time both suites run on staging, and when the web app releases both suites run on staging in a Teams thread named after the release. A merge to this repository’s main runs both suites on the preview, which is the web app’s main branch on the staging backend; a merge to the web app’s main runs the regular suite there once that build is live. A manual run picks its deployment, and ticking “slow” adds the slow suite to the same thread; today it is the only way to run on production. Each run gets its own Teams thread and its own report folder, and runs never cancel each other. At 06:00 UTC Lighthouse measures the public website’s speed on staging and production. If you merge a scenario in the afternoon, the first scheduled result is the next morning.</a:t>
+              <a:t>Every morning at 06:00 Swiss time both suites run on staging, and when the web app releases both suites run on staging in a Teams thread named after the release. A merge to this repository’s main runs both suites on the preview, which is the web app’s main branch on the staging backend; a merge to the web app’s main runs the regular suite there once that build is live. A manual run picks its deployment, and ticking “slow” adds the slow suite to the same thread; today it is the only way to run on production. At 08:00 Swiss time Lighthouse measures the public website’s speed on staging and production. Each run gets its own Teams thread and its own report folder, and runs never cancel each other.</a:t>
             </a:r>
             <a:endParaRPr lang="en-US" dirty="0"/>
           </a:p>
@@ -1616,7 +1616,7 @@
           <a:p>
             <a:r>
               <a:rPr lang="en-US" dirty="0"/>
-              <a:t>Before any test, the run checks ten backend services; if one is down, the run fails with its name instead of a wall of red tests. It signs in each user once, creates a project in the QA lab named after the run, and moves credits into it: 2,000 for the regular suite, 500 for slow. After the tests it returns the credits and deletes the project, even when the run is cancelled. If anything is ever left behind: make auth, then make reclaim. Results go to a Teams thread, a GitHub Pages dashboard with five days of reports and trends across 400 runs, and the full Playwright report with traces and screenshots.</a:t>
+              <a:t>Before any test, the run checks ten backend services; if one is down, the run fails with its name instead of a wall of red tests. It signs in each user once, creates a project in the QA lab named after the run, and moves credits into it: 2,000 for the regular suite, 500 for slow. After the tests it returns the credits and deletes the project, even when the run is cancelled. If anything is ever left behind: make auth, then make reclaim. Results go to a Teams thread, a GitHub Pages dashboard with five days of reports and trends across 400 runs, and the full Playwright report with traces and screenshots. Each failing test shows its likely cause, such as a backend error, above its own error.</a:t>
             </a:r>
             <a:endParaRPr lang="en-US" dirty="0"/>
           </a:p>
@@ -1704,7 +1704,7 @@
           <a:p>
             <a:r>
               <a:rPr lang="en-US" dirty="0"/>
-              <a:t>Do this once, then everything in the rest of the talk works on your machine. Install Bun 1.4 or newer, git, and one AI agent. Clone the repository, run make install (dependencies plus the playwright-cli skill the agent browses with) and make browsers (Chromium). Copy the example env file to .env.staging.local and fill in the QA user and LAB_ID; ask the team for the values. Then make auth signs you in, and make test scenarios/site runs the 30 public website tests: green means you are ready. Always run tests through make or bun run, never bunx playwright, because the tests need Bun, not Node.</a:t>
+              <a:t>Do this once, then everything in the rest of the talk works on your machine. You need git to clone the repository and an AI agent of your choice. make setup does the rest: it installs Bun 1.4 when it is missing, the packages, Chromium, and the playwright-cli skill the agent browses with, and it creates .env.staging.local from the example. It is safe to run again: it only installs what is missing. Fill in the QA user and LAB_ID in .env.staging.local; ask the team for the values, they are never committed. Run make setup again or make auth to check the sign-in, then make test scenarios/site runs the 30 public website tests: green means you are ready.</a:t>
             </a:r>
             <a:endParaRPr lang="en-US" dirty="0"/>
           </a:p>
@@ -1898,8 +1898,8 @@
         </p:nvSpPr>
         <p:spPr>
           <a:xfrm>
-            <a:off x="685800" y="1600200"/>
-            <a:ext cx="5852160" cy="2377440"/>
+            <a:off x="1005840" y="2148840"/>
+            <a:ext cx="10058400" cy="2103120"/>
           </a:xfrm>
           <a:prstGeom prst="rect">
             <a:avLst/>
@@ -1912,7 +1912,7 @@
           <a:lstStyle>
             <a:lvl1pPr algn="l" indent="0" marL="0">
               <a:buNone/>
-              <a:defRPr lang="en-US" sz="5400" b="1" dirty="0">
+              <a:defRPr lang="en-US" sz="6000" b="1" dirty="0">
                 <a:solidFill>
                   <a:schemeClr val="tx1"/>
                 </a:solidFill>
@@ -1923,7 +1923,7 @@
             <a:pPr algn="l" indent="0" marL="0">
               <a:buNone/>
             </a:pPr>
-            <a:endParaRPr lang="en-US" sz="5400" dirty="0"/>
+            <a:endParaRPr lang="en-US" sz="6000" dirty="0"/>
           </a:p>
         </p:txBody>
       </p:sp>
@@ -1937,8 +1937,8 @@
         </p:nvSpPr>
         <p:spPr>
           <a:xfrm>
-            <a:off x="685800" y="4206240"/>
-            <a:ext cx="5486400" cy="548640"/>
+            <a:off x="1005840" y="4434840"/>
+            <a:ext cx="9144000" cy="548640"/>
           </a:xfrm>
           <a:prstGeom prst="rect">
             <a:avLst/>
@@ -1951,7 +1951,7 @@
           <a:lstStyle>
             <a:lvl1pPr algn="l" indent="0" marL="0">
               <a:buNone/>
-              <a:defRPr lang="en-US" sz="2000" dirty="0">
+              <a:defRPr lang="en-US" sz="2200" dirty="0">
                 <a:solidFill>
                   <a:schemeClr val="tx2"/>
                 </a:solidFill>
@@ -1962,7 +1962,7 @@
             <a:pPr algn="l" indent="0" marL="0">
               <a:buNone/>
             </a:pPr>
-            <a:endParaRPr lang="en-US" sz="2000" dirty="0"/>
+            <a:endParaRPr lang="en-US" sz="2200" dirty="0"/>
           </a:p>
         </p:txBody>
       </p:sp>
@@ -2467,40 +2467,16 @@
           <a:chExt cx="0" cy="0"/>
         </a:xfrm>
       </p:grpSpPr>
-      <p:pic>
-        <p:nvPicPr>
-          <p:cNvPr id="2" name="neuron" descr="preencoded.png">    </p:cNvPr>
-          <p:cNvPicPr>
-            <a:picLocks noChangeAspect="1"/>
-          </p:cNvPicPr>
-          <p:nvPr/>
-        </p:nvPicPr>
-        <p:blipFill>
-          <a:blip r:embed="rId1"/>
-          <a:stretch>
-            <a:fillRect/>
-          </a:stretch>
-        </p:blipFill>
-        <p:spPr>
-          <a:xfrm>
-            <a:off x="5669280" y="-502920"/>
-            <a:ext cx="7498080" cy="7498080"/>
-          </a:xfrm>
-          <a:prstGeom prst="rect">
-            <a:avLst/>
-          </a:prstGeom>
-        </p:spPr>
-      </p:pic>
-      <p:sp>
-        <p:nvSpPr>
-          <p:cNvPr id="3" name="text-1"/>
-          <p:cNvSpPr txBox="1"/>
-          <p:nvPr/>
-        </p:nvSpPr>
-        <p:spPr>
-          <a:xfrm>
-            <a:off x="685800" y="960120"/>
-            <a:ext cx="5486400" cy="320040"/>
+      <p:sp>
+        <p:nvSpPr>
+          <p:cNvPr id="2" name="text-1"/>
+          <p:cNvSpPr txBox="1"/>
+          <p:nvPr/>
+        </p:nvSpPr>
+        <p:spPr>
+          <a:xfrm>
+            <a:off x="1005840" y="1600200"/>
+            <a:ext cx="7315200" cy="320040"/>
           </a:xfrm>
           <a:prstGeom prst="rect">
             <a:avLst/>
@@ -2529,7 +2505,7 @@
       </p:sp>
       <p:sp>
         <p:nvSpPr>
-          <p:cNvPr id="4" name="Text 0"/>
+          <p:cNvPr id="3" name="Text 0"/>
           <p:cNvSpPr/>
           <p:nvPr>
             <p:ph idx="100" type="title" hasCustomPrompt="1"/>
@@ -2537,8 +2513,8 @@
         </p:nvSpPr>
         <p:spPr>
           <a:xfrm>
-            <a:off x="685800" y="1600200"/>
-            <a:ext cx="5852160" cy="2377440"/>
+            <a:off x="1005840" y="2148840"/>
+            <a:ext cx="10058400" cy="2103120"/>
           </a:xfrm>
           <a:prstGeom prst="rect">
             <a:avLst/>
@@ -2554,34 +2530,34 @@
               <a:buNone/>
             </a:pPr>
             <a:r>
-              <a:rPr lang="en-US" sz="5400" b="1" dirty="0">
+              <a:rPr lang="en-US" sz="6000" b="1" dirty="0">
                 <a:solidFill>
                   <a:schemeClr val="tx1"/>
                 </a:solidFill>
               </a:rPr>
               <a:t>You write the test.</a:t>
             </a:r>
-            <a:endParaRPr lang="en-US" sz="5400" dirty="0"/>
+            <a:endParaRPr lang="en-US" sz="6000" dirty="0"/>
           </a:p>
           <a:p>
             <a:pPr algn="l" indent="0" marL="0">
               <a:buNone/>
             </a:pPr>
             <a:r>
-              <a:rPr lang="en-US" sz="5400" b="1" dirty="0">
+              <a:rPr lang="en-US" sz="6000" b="1" dirty="0">
                 <a:solidFill>
                   <a:schemeClr val="accent1"/>
                 </a:solidFill>
               </a:rPr>
               <a:t>In English.</a:t>
             </a:r>
-            <a:endParaRPr lang="en-US" sz="5400" dirty="0"/>
-          </a:p>
-        </p:txBody>
-      </p:sp>
-      <p:sp>
-        <p:nvSpPr>
-          <p:cNvPr id="5" name="Text 0"/>
+            <a:endParaRPr lang="en-US" sz="6000" dirty="0"/>
+          </a:p>
+        </p:txBody>
+      </p:sp>
+      <p:sp>
+        <p:nvSpPr>
+          <p:cNvPr id="4" name="Text 0"/>
           <p:cNvSpPr/>
           <p:nvPr>
             <p:ph idx="101" type="body" hasCustomPrompt="1"/>
@@ -2589,8 +2565,8 @@
         </p:nvSpPr>
         <p:spPr>
           <a:xfrm>
-            <a:off x="685800" y="4206240"/>
-            <a:ext cx="5486400" cy="548640"/>
+            <a:off x="1005840" y="4434840"/>
+            <a:ext cx="9144000" cy="548640"/>
           </a:xfrm>
           <a:prstGeom prst="rect">
             <a:avLst/>
@@ -2606,27 +2582,27 @@
               <a:buNone/>
             </a:pPr>
             <a:r>
-              <a:rPr lang="en-US" sz="2000" dirty="0">
+              <a:rPr lang="en-US" sz="2200" dirty="0">
                 <a:solidFill>
                   <a:schemeClr val="tx2"/>
                 </a:solidFill>
               </a:rPr>
               <a:t>How obi-e2e works, and how to write tests with AI</a:t>
             </a:r>
-            <a:endParaRPr lang="en-US" sz="2000" dirty="0"/>
-          </a:p>
-        </p:txBody>
-      </p:sp>
-      <p:sp>
-        <p:nvSpPr>
-          <p:cNvPr id="6" name="text-2"/>
-          <p:cNvSpPr txBox="1"/>
-          <p:nvPr/>
-        </p:nvSpPr>
-        <p:spPr>
-          <a:xfrm>
-            <a:off x="685800" y="6035040"/>
-            <a:ext cx="4572000" cy="320040"/>
+            <a:endParaRPr lang="en-US" sz="2200" dirty="0"/>
+          </a:p>
+        </p:txBody>
+      </p:sp>
+      <p:sp>
+        <p:nvSpPr>
+          <p:cNvPr id="5" name="text-2"/>
+          <p:cNvSpPr txBox="1"/>
+          <p:nvPr/>
+        </p:nvSpPr>
+        <p:spPr>
+          <a:xfrm>
+            <a:off x="1005840" y="5989320"/>
+            <a:ext cx="5486400" cy="320040"/>
           </a:xfrm>
           <a:prstGeom prst="rect">
             <a:avLst/>
@@ -2718,7 +2694,7 @@
       </p:sp>
       <p:sp>
         <p:nvSpPr>
-          <p:cNvPr id="3" name="text-244"/>
+          <p:cNvPr id="3" name="text-238"/>
           <p:cNvSpPr txBox="1"/>
           <p:nvPr/>
         </p:nvSpPr>
@@ -2768,7 +2744,7 @@
       </p:sp>
       <p:sp>
         <p:nvSpPr>
-          <p:cNvPr id="4" name="card-245"/>
+          <p:cNvPr id="4" name="card-239"/>
           <p:cNvSpPr/>
           <p:nvPr/>
         </p:nvSpPr>
@@ -2790,7 +2766,7 @@
       </p:sp>
       <p:sp>
         <p:nvSpPr>
-          <p:cNvPr id="5" name="node-246"/>
+          <p:cNvPr id="5" name="node-240"/>
           <p:cNvSpPr/>
           <p:nvPr/>
         </p:nvSpPr>
@@ -2810,7 +2786,7 @@
       </p:sp>
       <p:sp>
         <p:nvSpPr>
-          <p:cNvPr id="6" name="node-247"/>
+          <p:cNvPr id="6" name="node-241"/>
           <p:cNvSpPr/>
           <p:nvPr/>
         </p:nvSpPr>
@@ -2830,7 +2806,7 @@
       </p:sp>
       <p:sp>
         <p:nvSpPr>
-          <p:cNvPr id="7" name="node-248"/>
+          <p:cNvPr id="7" name="node-242"/>
           <p:cNvSpPr/>
           <p:nvPr/>
         </p:nvSpPr>
@@ -2850,7 +2826,7 @@
       </p:sp>
       <p:sp>
         <p:nvSpPr>
-          <p:cNvPr id="8" name="text-249"/>
+          <p:cNvPr id="8" name="text-243"/>
           <p:cNvSpPr txBox="1"/>
           <p:nvPr/>
         </p:nvSpPr>
@@ -3086,7 +3062,7 @@
       </p:sp>
       <p:sp>
         <p:nvSpPr>
-          <p:cNvPr id="9" name="card-250"/>
+          <p:cNvPr id="9" name="card-244"/>
           <p:cNvSpPr/>
           <p:nvPr/>
         </p:nvSpPr>
@@ -3108,7 +3084,7 @@
       </p:sp>
       <p:sp>
         <p:nvSpPr>
-          <p:cNvPr id="10" name="node-251"/>
+          <p:cNvPr id="10" name="node-245"/>
           <p:cNvSpPr/>
           <p:nvPr/>
         </p:nvSpPr>
@@ -3128,7 +3104,7 @@
       </p:sp>
       <p:pic>
         <p:nvPicPr>
-          <p:cNvPr id="11" name="icon-252" descr="preencoded.png">    </p:cNvPr>
+          <p:cNvPr id="11" name="icon-246" descr="preencoded.png">    </p:cNvPr>
           <p:cNvPicPr>
             <a:picLocks noChangeAspect="1"/>
           </p:cNvPicPr>
@@ -3152,7 +3128,7 @@
       </p:pic>
       <p:sp>
         <p:nvSpPr>
-          <p:cNvPr id="12" name="text-253"/>
+          <p:cNvPr id="12" name="text-247"/>
           <p:cNvSpPr txBox="1"/>
           <p:nvPr/>
         </p:nvSpPr>
@@ -3188,7 +3164,7 @@
       </p:sp>
       <p:sp>
         <p:nvSpPr>
-          <p:cNvPr id="13" name="text-254"/>
+          <p:cNvPr id="13" name="text-248"/>
           <p:cNvSpPr txBox="1"/>
           <p:nvPr/>
         </p:nvSpPr>
@@ -3300,7 +3276,7 @@
       </p:sp>
       <p:sp>
         <p:nvSpPr>
-          <p:cNvPr id="14" name="card-255"/>
+          <p:cNvPr id="14" name="card-249"/>
           <p:cNvSpPr/>
           <p:nvPr/>
         </p:nvSpPr>
@@ -3327,7 +3303,7 @@
       </p:sp>
       <p:sp>
         <p:nvSpPr>
-          <p:cNvPr id="15" name="node-256"/>
+          <p:cNvPr id="15" name="node-250"/>
           <p:cNvSpPr/>
           <p:nvPr/>
         </p:nvSpPr>
@@ -3347,7 +3323,7 @@
       </p:sp>
       <p:pic>
         <p:nvPicPr>
-          <p:cNvPr id="16" name="icon-257" descr="preencoded.png">    </p:cNvPr>
+          <p:cNvPr id="16" name="icon-251" descr="preencoded.png">    </p:cNvPr>
           <p:cNvPicPr>
             <a:picLocks noChangeAspect="1"/>
           </p:cNvPicPr>
@@ -3371,7 +3347,7 @@
       </p:pic>
       <p:sp>
         <p:nvSpPr>
-          <p:cNvPr id="17" name="text-258"/>
+          <p:cNvPr id="17" name="text-252"/>
           <p:cNvSpPr txBox="1"/>
           <p:nvPr/>
         </p:nvSpPr>
@@ -3407,7 +3383,7 @@
       </p:sp>
       <p:sp>
         <p:nvSpPr>
-          <p:cNvPr id="18" name="text-259"/>
+          <p:cNvPr id="18" name="text-253"/>
           <p:cNvSpPr txBox="1"/>
           <p:nvPr/>
         </p:nvSpPr>
@@ -3483,7 +3459,7 @@
       </p:sp>
       <p:sp>
         <p:nvSpPr>
-          <p:cNvPr id="19" name="text-260"/>
+          <p:cNvPr id="19" name="text-254"/>
           <p:cNvSpPr txBox="1"/>
           <p:nvPr/>
         </p:nvSpPr>
@@ -3666,7 +3642,7 @@
       </p:sp>
       <p:sp>
         <p:nvSpPr>
-          <p:cNvPr id="3" name="text-261"/>
+          <p:cNvPr id="3" name="text-255"/>
           <p:cNvSpPr txBox="1"/>
           <p:nvPr/>
         </p:nvSpPr>
@@ -3702,7 +3678,7 @@
       </p:sp>
       <p:sp>
         <p:nvSpPr>
-          <p:cNvPr id="4" name="text-262"/>
+          <p:cNvPr id="4" name="text-256"/>
           <p:cNvSpPr txBox="1"/>
           <p:nvPr/>
         </p:nvSpPr>
@@ -3738,7 +3714,7 @@
       </p:sp>
       <p:sp>
         <p:nvSpPr>
-          <p:cNvPr id="5" name="text-263"/>
+          <p:cNvPr id="5" name="text-257"/>
           <p:cNvSpPr txBox="1"/>
           <p:nvPr/>
         </p:nvSpPr>
@@ -3774,7 +3750,7 @@
       </p:sp>
       <p:sp>
         <p:nvSpPr>
-          <p:cNvPr id="6" name="text-264"/>
+          <p:cNvPr id="6" name="text-258"/>
           <p:cNvSpPr txBox="1"/>
           <p:nvPr/>
         </p:nvSpPr>
@@ -3810,7 +3786,7 @@
       </p:sp>
       <p:sp>
         <p:nvSpPr>
-          <p:cNvPr id="7" name="text-265"/>
+          <p:cNvPr id="7" name="text-259"/>
           <p:cNvSpPr txBox="1"/>
           <p:nvPr/>
         </p:nvSpPr>
@@ -3849,7 +3825,7 @@
       </p:sp>
       <p:sp>
         <p:nvSpPr>
-          <p:cNvPr id="8" name="text-266"/>
+          <p:cNvPr id="8" name="text-260"/>
           <p:cNvSpPr txBox="1"/>
           <p:nvPr/>
         </p:nvSpPr>
@@ -3885,7 +3861,7 @@
       </p:sp>
       <p:sp>
         <p:nvSpPr>
-          <p:cNvPr id="9" name="card-267"/>
+          <p:cNvPr id="9" name="card-261"/>
           <p:cNvSpPr/>
           <p:nvPr/>
         </p:nvSpPr>
@@ -3907,7 +3883,7 @@
       </p:sp>
       <p:sp>
         <p:nvSpPr>
-          <p:cNvPr id="10" name="text-268"/>
+          <p:cNvPr id="10" name="text-262"/>
           <p:cNvSpPr txBox="1"/>
           <p:nvPr/>
         </p:nvSpPr>
@@ -3946,7 +3922,7 @@
       </p:sp>
       <p:sp>
         <p:nvSpPr>
-          <p:cNvPr id="11" name="text-269"/>
+          <p:cNvPr id="11" name="text-263"/>
           <p:cNvSpPr txBox="1"/>
           <p:nvPr/>
         </p:nvSpPr>
@@ -3985,7 +3961,7 @@
       </p:sp>
       <p:sp>
         <p:nvSpPr>
-          <p:cNvPr id="12" name="text-270"/>
+          <p:cNvPr id="12" name="text-264"/>
           <p:cNvSpPr txBox="1"/>
           <p:nvPr/>
         </p:nvSpPr>
@@ -4021,7 +3997,7 @@
       </p:sp>
       <p:sp>
         <p:nvSpPr>
-          <p:cNvPr id="13" name="card-271"/>
+          <p:cNvPr id="13" name="card-265"/>
           <p:cNvSpPr/>
           <p:nvPr/>
         </p:nvSpPr>
@@ -4043,7 +4019,7 @@
       </p:sp>
       <p:sp>
         <p:nvSpPr>
-          <p:cNvPr id="14" name="text-272"/>
+          <p:cNvPr id="14" name="text-266"/>
           <p:cNvSpPr txBox="1"/>
           <p:nvPr/>
         </p:nvSpPr>
@@ -4082,7 +4058,7 @@
       </p:sp>
       <p:sp>
         <p:nvSpPr>
-          <p:cNvPr id="15" name="link-273"/>
+          <p:cNvPr id="15" name="link-267"/>
           <p:cNvSpPr/>
           <p:nvPr/>
         </p:nvSpPr>
@@ -4105,7 +4081,7 @@
       </p:sp>
       <p:sp>
         <p:nvSpPr>
-          <p:cNvPr id="16" name="text-274"/>
+          <p:cNvPr id="16" name="text-268"/>
           <p:cNvSpPr txBox="1"/>
           <p:nvPr/>
         </p:nvSpPr>
@@ -4141,7 +4117,7 @@
       </p:sp>
       <p:sp>
         <p:nvSpPr>
-          <p:cNvPr id="17" name="text-275"/>
+          <p:cNvPr id="17" name="text-269"/>
           <p:cNvSpPr txBox="1"/>
           <p:nvPr/>
         </p:nvSpPr>
@@ -4180,7 +4156,7 @@
       </p:sp>
       <p:sp>
         <p:nvSpPr>
-          <p:cNvPr id="18" name="text-276"/>
+          <p:cNvPr id="18" name="text-270"/>
           <p:cNvSpPr txBox="1"/>
           <p:nvPr/>
         </p:nvSpPr>
@@ -4216,7 +4192,7 @@
       </p:sp>
       <p:sp>
         <p:nvSpPr>
-          <p:cNvPr id="19" name="card-277"/>
+          <p:cNvPr id="19" name="card-271"/>
           <p:cNvSpPr/>
           <p:nvPr/>
         </p:nvSpPr>
@@ -4238,7 +4214,7 @@
       </p:sp>
       <p:sp>
         <p:nvSpPr>
-          <p:cNvPr id="20" name="text-278"/>
+          <p:cNvPr id="20" name="text-272"/>
           <p:cNvSpPr txBox="1"/>
           <p:nvPr/>
         </p:nvSpPr>
@@ -4277,7 +4253,7 @@
       </p:sp>
       <p:sp>
         <p:nvSpPr>
-          <p:cNvPr id="21" name="text-279"/>
+          <p:cNvPr id="21" name="text-273"/>
           <p:cNvSpPr txBox="1"/>
           <p:nvPr/>
         </p:nvSpPr>
@@ -4316,7 +4292,7 @@
       </p:sp>
       <p:sp>
         <p:nvSpPr>
-          <p:cNvPr id="22" name="text-280"/>
+          <p:cNvPr id="22" name="text-274"/>
           <p:cNvSpPr txBox="1"/>
           <p:nvPr/>
         </p:nvSpPr>
@@ -4352,7 +4328,7 @@
       </p:sp>
       <p:sp>
         <p:nvSpPr>
-          <p:cNvPr id="23" name="card-281"/>
+          <p:cNvPr id="23" name="card-275"/>
           <p:cNvSpPr/>
           <p:nvPr/>
         </p:nvSpPr>
@@ -4374,7 +4350,7 @@
       </p:sp>
       <p:sp>
         <p:nvSpPr>
-          <p:cNvPr id="24" name="text-282"/>
+          <p:cNvPr id="24" name="text-276"/>
           <p:cNvSpPr txBox="1"/>
           <p:nvPr/>
         </p:nvSpPr>
@@ -4413,7 +4389,7 @@
       </p:sp>
       <p:sp>
         <p:nvSpPr>
-          <p:cNvPr id="25" name="link-283"/>
+          <p:cNvPr id="25" name="link-277"/>
           <p:cNvSpPr/>
           <p:nvPr/>
         </p:nvSpPr>
@@ -4436,7 +4412,7 @@
       </p:sp>
       <p:sp>
         <p:nvSpPr>
-          <p:cNvPr id="26" name="text-284"/>
+          <p:cNvPr id="26" name="text-278"/>
           <p:cNvSpPr txBox="1"/>
           <p:nvPr/>
         </p:nvSpPr>
@@ -4472,7 +4448,7 @@
       </p:sp>
       <p:sp>
         <p:nvSpPr>
-          <p:cNvPr id="27" name="text-285"/>
+          <p:cNvPr id="27" name="text-279"/>
           <p:cNvSpPr txBox="1"/>
           <p:nvPr/>
         </p:nvSpPr>
@@ -4511,7 +4487,7 @@
       </p:sp>
       <p:sp>
         <p:nvSpPr>
-          <p:cNvPr id="28" name="text-286"/>
+          <p:cNvPr id="28" name="text-280"/>
           <p:cNvSpPr txBox="1"/>
           <p:nvPr/>
         </p:nvSpPr>
@@ -4547,7 +4523,7 @@
       </p:sp>
       <p:sp>
         <p:nvSpPr>
-          <p:cNvPr id="29" name="card-287"/>
+          <p:cNvPr id="29" name="card-281"/>
           <p:cNvSpPr/>
           <p:nvPr/>
         </p:nvSpPr>
@@ -4569,7 +4545,7 @@
       </p:sp>
       <p:sp>
         <p:nvSpPr>
-          <p:cNvPr id="30" name="text-288"/>
+          <p:cNvPr id="30" name="text-282"/>
           <p:cNvSpPr txBox="1"/>
           <p:nvPr/>
         </p:nvSpPr>
@@ -4608,7 +4584,7 @@
       </p:sp>
       <p:sp>
         <p:nvSpPr>
-          <p:cNvPr id="31" name="text-289"/>
+          <p:cNvPr id="31" name="text-283"/>
           <p:cNvSpPr txBox="1"/>
           <p:nvPr/>
         </p:nvSpPr>
@@ -4647,7 +4623,7 @@
       </p:sp>
       <p:sp>
         <p:nvSpPr>
-          <p:cNvPr id="32" name="text-290"/>
+          <p:cNvPr id="32" name="text-284"/>
           <p:cNvSpPr txBox="1"/>
           <p:nvPr/>
         </p:nvSpPr>
@@ -4683,7 +4659,7 @@
       </p:sp>
       <p:sp>
         <p:nvSpPr>
-          <p:cNvPr id="33" name="card-291"/>
+          <p:cNvPr id="33" name="card-285"/>
           <p:cNvSpPr/>
           <p:nvPr/>
         </p:nvSpPr>
@@ -4705,7 +4681,7 @@
       </p:sp>
       <p:sp>
         <p:nvSpPr>
-          <p:cNvPr id="34" name="text-292"/>
+          <p:cNvPr id="34" name="text-286"/>
           <p:cNvSpPr txBox="1"/>
           <p:nvPr/>
         </p:nvSpPr>
@@ -4744,7 +4720,7 @@
       </p:sp>
       <p:sp>
         <p:nvSpPr>
-          <p:cNvPr id="35" name="link-293"/>
+          <p:cNvPr id="35" name="link-287"/>
           <p:cNvSpPr/>
           <p:nvPr/>
         </p:nvSpPr>
@@ -4767,7 +4743,7 @@
       </p:sp>
       <p:sp>
         <p:nvSpPr>
-          <p:cNvPr id="36" name="text-294"/>
+          <p:cNvPr id="36" name="text-288"/>
           <p:cNvSpPr txBox="1"/>
           <p:nvPr/>
         </p:nvSpPr>
@@ -4803,7 +4779,7 @@
       </p:sp>
       <p:sp>
         <p:nvSpPr>
-          <p:cNvPr id="37" name="text-295"/>
+          <p:cNvPr id="37" name="text-289"/>
           <p:cNvSpPr txBox="1"/>
           <p:nvPr/>
         </p:nvSpPr>
@@ -4842,7 +4818,7 @@
       </p:sp>
       <p:sp>
         <p:nvSpPr>
-          <p:cNvPr id="38" name="text-296"/>
+          <p:cNvPr id="38" name="text-290"/>
           <p:cNvSpPr txBox="1"/>
           <p:nvPr/>
         </p:nvSpPr>
@@ -4878,7 +4854,7 @@
       </p:sp>
       <p:sp>
         <p:nvSpPr>
-          <p:cNvPr id="39" name="card-297"/>
+          <p:cNvPr id="39" name="card-291"/>
           <p:cNvSpPr/>
           <p:nvPr/>
         </p:nvSpPr>
@@ -4900,7 +4876,7 @@
       </p:sp>
       <p:sp>
         <p:nvSpPr>
-          <p:cNvPr id="40" name="text-298"/>
+          <p:cNvPr id="40" name="text-292"/>
           <p:cNvSpPr txBox="1"/>
           <p:nvPr/>
         </p:nvSpPr>
@@ -4939,7 +4915,7 @@
       </p:sp>
       <p:sp>
         <p:nvSpPr>
-          <p:cNvPr id="41" name="link-299"/>
+          <p:cNvPr id="41" name="link-293"/>
           <p:cNvSpPr/>
           <p:nvPr/>
         </p:nvSpPr>
@@ -4962,7 +4938,7 @@
       </p:sp>
       <p:sp>
         <p:nvSpPr>
-          <p:cNvPr id="42" name="text-300"/>
+          <p:cNvPr id="42" name="text-294"/>
           <p:cNvSpPr txBox="1"/>
           <p:nvPr/>
         </p:nvSpPr>
@@ -4998,7 +4974,7 @@
       </p:sp>
       <p:sp>
         <p:nvSpPr>
-          <p:cNvPr id="43" name="text-301"/>
+          <p:cNvPr id="43" name="text-295"/>
           <p:cNvSpPr txBox="1"/>
           <p:nvPr/>
         </p:nvSpPr>
@@ -5037,7 +5013,7 @@
       </p:sp>
       <p:sp>
         <p:nvSpPr>
-          <p:cNvPr id="44" name="text-302"/>
+          <p:cNvPr id="44" name="text-296"/>
           <p:cNvSpPr txBox="1"/>
           <p:nvPr/>
         </p:nvSpPr>
@@ -5073,7 +5049,7 @@
       </p:sp>
       <p:sp>
         <p:nvSpPr>
-          <p:cNvPr id="45" name="card-303"/>
+          <p:cNvPr id="45" name="card-297"/>
           <p:cNvSpPr/>
           <p:nvPr/>
         </p:nvSpPr>
@@ -5095,7 +5071,7 @@
       </p:sp>
       <p:sp>
         <p:nvSpPr>
-          <p:cNvPr id="46" name="text-304"/>
+          <p:cNvPr id="46" name="text-298"/>
           <p:cNvSpPr txBox="1"/>
           <p:nvPr/>
         </p:nvSpPr>
@@ -5134,7 +5110,7 @@
       </p:sp>
       <p:sp>
         <p:nvSpPr>
-          <p:cNvPr id="47" name="text-305"/>
+          <p:cNvPr id="47" name="text-299"/>
           <p:cNvSpPr txBox="1"/>
           <p:nvPr/>
         </p:nvSpPr>
@@ -5173,7 +5149,7 @@
       </p:sp>
       <p:sp>
         <p:nvSpPr>
-          <p:cNvPr id="48" name="text-306"/>
+          <p:cNvPr id="48" name="text-300"/>
           <p:cNvSpPr txBox="1"/>
           <p:nvPr/>
         </p:nvSpPr>
@@ -5209,7 +5185,7 @@
       </p:sp>
       <p:sp>
         <p:nvSpPr>
-          <p:cNvPr id="49" name="card-307"/>
+          <p:cNvPr id="49" name="card-301"/>
           <p:cNvSpPr/>
           <p:nvPr/>
         </p:nvSpPr>
@@ -5231,7 +5207,7 @@
       </p:sp>
       <p:sp>
         <p:nvSpPr>
-          <p:cNvPr id="50" name="text-308"/>
+          <p:cNvPr id="50" name="text-302"/>
           <p:cNvSpPr txBox="1"/>
           <p:nvPr/>
         </p:nvSpPr>
@@ -5270,7 +5246,7 @@
       </p:sp>
       <p:sp>
         <p:nvSpPr>
-          <p:cNvPr id="51" name="text-309"/>
+          <p:cNvPr id="51" name="text-303"/>
           <p:cNvSpPr txBox="1"/>
           <p:nvPr/>
         </p:nvSpPr>
@@ -5464,7 +5440,7 @@
       </p:sp>
       <p:sp>
         <p:nvSpPr>
-          <p:cNvPr id="3" name="card-310"/>
+          <p:cNvPr id="3" name="card-304"/>
           <p:cNvSpPr/>
           <p:nvPr/>
         </p:nvSpPr>
@@ -5486,7 +5462,7 @@
       </p:sp>
       <p:sp>
         <p:nvSpPr>
-          <p:cNvPr id="4" name="text-311"/>
+          <p:cNvPr id="4" name="text-305"/>
           <p:cNvSpPr txBox="1"/>
           <p:nvPr/>
         </p:nvSpPr>
@@ -5525,7 +5501,7 @@
       </p:sp>
       <p:sp>
         <p:nvSpPr>
-          <p:cNvPr id="5" name="text-312"/>
+          <p:cNvPr id="5" name="text-306"/>
           <p:cNvSpPr txBox="1"/>
           <p:nvPr/>
         </p:nvSpPr>
@@ -5601,7 +5577,7 @@
       </p:sp>
       <p:sp>
         <p:nvSpPr>
-          <p:cNvPr id="6" name="text-313"/>
+          <p:cNvPr id="6" name="text-307"/>
           <p:cNvSpPr txBox="1"/>
           <p:nvPr/>
         </p:nvSpPr>
@@ -5637,7 +5613,7 @@
       </p:sp>
       <p:sp>
         <p:nvSpPr>
-          <p:cNvPr id="7" name="card-314"/>
+          <p:cNvPr id="7" name="card-308"/>
           <p:cNvSpPr/>
           <p:nvPr/>
         </p:nvSpPr>
@@ -5659,7 +5635,7 @@
       </p:sp>
       <p:sp>
         <p:nvSpPr>
-          <p:cNvPr id="8" name="text-315"/>
+          <p:cNvPr id="8" name="text-309"/>
           <p:cNvSpPr txBox="1"/>
           <p:nvPr/>
         </p:nvSpPr>
@@ -5698,7 +5674,7 @@
       </p:sp>
       <p:sp>
         <p:nvSpPr>
-          <p:cNvPr id="9" name="card-316"/>
+          <p:cNvPr id="9" name="card-310"/>
           <p:cNvSpPr/>
           <p:nvPr/>
         </p:nvSpPr>
@@ -5720,7 +5696,7 @@
       </p:sp>
       <p:sp>
         <p:nvSpPr>
-          <p:cNvPr id="10" name="text-317"/>
+          <p:cNvPr id="10" name="text-311"/>
           <p:cNvSpPr txBox="1"/>
           <p:nvPr/>
         </p:nvSpPr>
@@ -5759,7 +5735,7 @@
       </p:sp>
       <p:sp>
         <p:nvSpPr>
-          <p:cNvPr id="11" name="text-318"/>
+          <p:cNvPr id="11" name="text-312"/>
           <p:cNvSpPr txBox="1"/>
           <p:nvPr/>
         </p:nvSpPr>
@@ -5835,7 +5811,7 @@
       </p:sp>
       <p:sp>
         <p:nvSpPr>
-          <p:cNvPr id="12" name="text-319"/>
+          <p:cNvPr id="12" name="text-313"/>
           <p:cNvSpPr txBox="1"/>
           <p:nvPr/>
         </p:nvSpPr>
@@ -5871,7 +5847,7 @@
       </p:sp>
       <p:sp>
         <p:nvSpPr>
-          <p:cNvPr id="13" name="card-320"/>
+          <p:cNvPr id="13" name="card-314"/>
           <p:cNvSpPr/>
           <p:nvPr/>
         </p:nvSpPr>
@@ -5893,7 +5869,7 @@
       </p:sp>
       <p:sp>
         <p:nvSpPr>
-          <p:cNvPr id="14" name="text-321"/>
+          <p:cNvPr id="14" name="text-315"/>
           <p:cNvSpPr txBox="1"/>
           <p:nvPr/>
         </p:nvSpPr>
@@ -5932,7 +5908,7 @@
       </p:sp>
       <p:sp>
         <p:nvSpPr>
-          <p:cNvPr id="15" name="text-322"/>
+          <p:cNvPr id="15" name="text-316"/>
           <p:cNvSpPr txBox="1"/>
           <p:nvPr/>
         </p:nvSpPr>
@@ -5968,7 +5944,7 @@
       </p:sp>
       <p:sp>
         <p:nvSpPr>
-          <p:cNvPr id="16" name="card-323"/>
+          <p:cNvPr id="16" name="card-317"/>
           <p:cNvSpPr/>
           <p:nvPr/>
         </p:nvSpPr>
@@ -5995,7 +5971,7 @@
       </p:sp>
       <p:sp>
         <p:nvSpPr>
-          <p:cNvPr id="17" name="text-324"/>
+          <p:cNvPr id="17" name="text-318"/>
           <p:cNvSpPr txBox="1"/>
           <p:nvPr/>
         </p:nvSpPr>
@@ -6048,7 +6024,7 @@
       </p:sp>
       <p:sp>
         <p:nvSpPr>
-          <p:cNvPr id="18" name="card-325"/>
+          <p:cNvPr id="18" name="card-319"/>
           <p:cNvSpPr/>
           <p:nvPr/>
         </p:nvSpPr>
@@ -6075,7 +6051,7 @@
       </p:sp>
       <p:sp>
         <p:nvSpPr>
-          <p:cNvPr id="19" name="text-326"/>
+          <p:cNvPr id="19" name="text-320"/>
           <p:cNvSpPr txBox="1"/>
           <p:nvPr/>
         </p:nvSpPr>
@@ -6128,7 +6104,7 @@
       </p:sp>
       <p:sp>
         <p:nvSpPr>
-          <p:cNvPr id="20" name="card-327"/>
+          <p:cNvPr id="20" name="card-321"/>
           <p:cNvSpPr/>
           <p:nvPr/>
         </p:nvSpPr>
@@ -6155,7 +6131,7 @@
       </p:sp>
       <p:sp>
         <p:nvSpPr>
-          <p:cNvPr id="21" name="text-328"/>
+          <p:cNvPr id="21" name="text-322"/>
           <p:cNvSpPr txBox="1"/>
           <p:nvPr/>
         </p:nvSpPr>
@@ -6208,7 +6184,7 @@
       </p:sp>
       <p:sp>
         <p:nvSpPr>
-          <p:cNvPr id="22" name="card-329"/>
+          <p:cNvPr id="22" name="card-323"/>
           <p:cNvSpPr/>
           <p:nvPr/>
         </p:nvSpPr>
@@ -6235,7 +6211,7 @@
       </p:sp>
       <p:sp>
         <p:nvSpPr>
-          <p:cNvPr id="23" name="text-330"/>
+          <p:cNvPr id="23" name="text-324"/>
           <p:cNvSpPr txBox="1"/>
           <p:nvPr/>
         </p:nvSpPr>
@@ -6288,7 +6264,7 @@
       </p:sp>
       <p:sp>
         <p:nvSpPr>
-          <p:cNvPr id="24" name="card-331"/>
+          <p:cNvPr id="24" name="card-325"/>
           <p:cNvSpPr/>
           <p:nvPr/>
         </p:nvSpPr>
@@ -6315,7 +6291,7 @@
       </p:sp>
       <p:sp>
         <p:nvSpPr>
-          <p:cNvPr id="25" name="text-332"/>
+          <p:cNvPr id="25" name="text-326"/>
           <p:cNvSpPr txBox="1"/>
           <p:nvPr/>
         </p:nvSpPr>
@@ -6476,7 +6452,7 @@
       </p:sp>
       <p:sp>
         <p:nvSpPr>
-          <p:cNvPr id="3" name="text-333"/>
+          <p:cNvPr id="3" name="text-327"/>
           <p:cNvSpPr txBox="1"/>
           <p:nvPr/>
         </p:nvSpPr>
@@ -6512,19 +6488,60 @@
       </p:sp>
       <p:sp>
         <p:nvSpPr>
-          <p:cNvPr id="4" name="card-334"/>
+          <p:cNvPr id="4" name="link-328"/>
           <p:cNvSpPr/>
           <p:nvPr/>
         </p:nvSpPr>
         <p:spPr>
           <a:xfrm>
-            <a:off x="548640" y="1874520"/>
-            <a:ext cx="7543800" cy="3931920"/>
-          </a:xfrm>
-          <a:prstGeom prst="roundRect">
-            <a:avLst>
-              <a:gd name="adj" fmla="val 3256"/>
-            </a:avLst>
+            <a:off x="2560320" y="2697480"/>
+            <a:ext cx="1435608" cy="0"/>
+          </a:xfrm>
+          <a:prstGeom prst="line">
+            <a:avLst/>
+          </a:prstGeom>
+          <a:noFill/>
+          <a:ln w="19050">
+            <a:solidFill>
+              <a:srgbClr val="4A5870"/>
+            </a:solidFill>
+            <a:prstDash val="solid"/>
+          </a:ln>
+        </p:spPr>
+      </p:sp>
+      <p:sp>
+        <p:nvSpPr>
+          <p:cNvPr id="5" name="node-329"/>
+          <p:cNvSpPr/>
+          <p:nvPr/>
+        </p:nvSpPr>
+        <p:spPr>
+          <a:xfrm>
+            <a:off x="3941064" y="2642616"/>
+            <a:ext cx="109728" cy="109728"/>
+          </a:xfrm>
+          <a:prstGeom prst="ellipse">
+            <a:avLst/>
+          </a:prstGeom>
+          <a:solidFill>
+            <a:srgbClr val="026FD7"/>
+          </a:solidFill>
+          <a:ln/>
+        </p:spPr>
+      </p:sp>
+      <p:sp>
+        <p:nvSpPr>
+          <p:cNvPr id="6" name="node-330"/>
+          <p:cNvSpPr/>
+          <p:nvPr/>
+        </p:nvSpPr>
+        <p:spPr>
+          <a:xfrm>
+            <a:off x="1325880" y="2148840"/>
+            <a:ext cx="1097280" cy="1097280"/>
+          </a:xfrm>
+          <a:prstGeom prst="ellipse">
+            <a:avLst/>
           </a:prstGeom>
           <a:solidFill>
             <a:schemeClr val="tx1"/>
@@ -6532,373 +6549,9 @@
           <a:ln/>
         </p:spPr>
       </p:sp>
-      <p:sp>
-        <p:nvSpPr>
-          <p:cNvPr id="5" name="node-335"/>
-          <p:cNvSpPr/>
-          <p:nvPr/>
-        </p:nvSpPr>
-        <p:spPr>
-          <a:xfrm>
-            <a:off x="804672" y="2066544"/>
-            <a:ext cx="118872" cy="118872"/>
-          </a:xfrm>
-          <a:prstGeom prst="ellipse">
-            <a:avLst/>
-          </a:prstGeom>
-          <a:solidFill>
-            <a:srgbClr val="3A4A63"/>
-          </a:solidFill>
-          <a:ln/>
-        </p:spPr>
-      </p:sp>
-      <p:sp>
-        <p:nvSpPr>
-          <p:cNvPr id="6" name="node-336"/>
-          <p:cNvSpPr/>
-          <p:nvPr/>
-        </p:nvSpPr>
-        <p:spPr>
-          <a:xfrm>
-            <a:off x="1005840" y="2066544"/>
-            <a:ext cx="118872" cy="118872"/>
-          </a:xfrm>
-          <a:prstGeom prst="ellipse">
-            <a:avLst/>
-          </a:prstGeom>
-          <a:solidFill>
-            <a:srgbClr val="3A4A63"/>
-          </a:solidFill>
-          <a:ln/>
-        </p:spPr>
-      </p:sp>
-      <p:sp>
-        <p:nvSpPr>
-          <p:cNvPr id="7" name="node-337"/>
-          <p:cNvSpPr/>
-          <p:nvPr/>
-        </p:nvSpPr>
-        <p:spPr>
-          <a:xfrm>
-            <a:off x="1207008" y="2066544"/>
-            <a:ext cx="118872" cy="118872"/>
-          </a:xfrm>
-          <a:prstGeom prst="ellipse">
-            <a:avLst/>
-          </a:prstGeom>
-          <a:solidFill>
-            <a:srgbClr val="3A4A63"/>
-          </a:solidFill>
-          <a:ln/>
-        </p:spPr>
-      </p:sp>
-      <p:sp>
-        <p:nvSpPr>
-          <p:cNvPr id="8" name="text-338"/>
-          <p:cNvSpPr txBox="1"/>
-          <p:nvPr/>
-        </p:nvSpPr>
-        <p:spPr>
-          <a:xfrm>
-            <a:off x="868680" y="2377440"/>
-            <a:ext cx="7040880" cy="3291840"/>
-          </a:xfrm>
-          <a:prstGeom prst="rect">
-            <a:avLst/>
-          </a:prstGeom>
-          <a:noFill/>
-          <a:ln/>
-        </p:spPr>
-        <p:txBody>
-          <a:bodyPr wrap="square" lIns="0" tIns="0" rIns="0" bIns="0" rtlCol="0" anchor="t"/>
-          <a:lstStyle/>
-          <a:p>
-            <a:pPr indent="0" marL="0">
-              <a:spcAft>
-                <a:spcPts val="200"/>
-              </a:spcAft>
-              <a:buNone/>
-            </a:pPr>
-            <a:r>
-              <a:rPr lang="en-US" sz="1300" dirty="0">
-                <a:solidFill>
-                  <a:srgbClr val="A9B7CC"/>
-                </a:solidFill>
-                <a:latin typeface="Menlo" pitchFamily="34" charset="0"/>
-                <a:ea typeface="Menlo" pitchFamily="34" charset="-122"/>
-                <a:cs typeface="Menlo" pitchFamily="34" charset="-120"/>
-              </a:rPr>
-              <a:t># sign in once, open a named browser</a:t>
-            </a:r>
-            <a:endParaRPr lang="en-US" sz="1300" dirty="0"/>
-          </a:p>
-          <a:p>
-            <a:pPr indent="0" marL="0">
-              <a:spcAft>
-                <a:spcPts val="900"/>
-              </a:spcAft>
-              <a:buNone/>
-            </a:pPr>
-            <a:r>
-              <a:rPr lang="en-US" sz="1300" b="1" dirty="0">
-                <a:solidFill>
-                  <a:srgbClr val="5CC8FF"/>
-                </a:solidFill>
-                <a:latin typeface="Menlo" pitchFamily="34" charset="0"/>
-                <a:ea typeface="Menlo" pitchFamily="34" charset="-122"/>
-                <a:cs typeface="Menlo" pitchFamily="34" charset="-120"/>
-              </a:rPr>
-              <a:t>$ </a:t>
-            </a:r>
-            <a:pPr indent="0" marL="0">
-              <a:spcAft>
-                <a:spcPts val="900"/>
-              </a:spcAft>
-              <a:buNone/>
-            </a:pPr>
-            <a:r>
-              <a:rPr lang="en-US" sz="1300" dirty="0">
-                <a:solidFill>
-                  <a:srgbClr val="FFFFFF"/>
-                </a:solidFill>
-                <a:latin typeface="Menlo" pitchFamily="34" charset="0"/>
-                <a:ea typeface="Menlo" pitchFamily="34" charset="-122"/>
-                <a:cs typeface="Menlo" pitchFamily="34" charset="-120"/>
-              </a:rPr>
-              <a:t>make auth &amp;&amp; source .env.staging</a:t>
-            </a:r>
-            <a:endParaRPr lang="en-US" sz="1300" dirty="0"/>
-          </a:p>
-          <a:p>
-            <a:pPr indent="0" marL="0">
-              <a:spcAft>
-                <a:spcPts val="900"/>
-              </a:spcAft>
-              <a:buNone/>
-            </a:pPr>
-            <a:r>
-              <a:rPr lang="en-US" sz="1300" b="1" dirty="0">
-                <a:solidFill>
-                  <a:srgbClr val="5CC8FF"/>
-                </a:solidFill>
-                <a:latin typeface="Menlo" pitchFamily="34" charset="0"/>
-                <a:ea typeface="Menlo" pitchFamily="34" charset="-122"/>
-                <a:cs typeface="Menlo" pitchFamily="34" charset="-120"/>
-              </a:rPr>
-              <a:t>$ </a:t>
-            </a:r>
-            <a:pPr indent="0" marL="0">
-              <a:spcAft>
-                <a:spcPts val="900"/>
-              </a:spcAft>
-              <a:buNone/>
-            </a:pPr>
-            <a:r>
-              <a:rPr lang="en-US" sz="1300" dirty="0">
-                <a:solidFill>
-                  <a:srgbClr val="FFFFFF"/>
-                </a:solidFill>
-                <a:latin typeface="Menlo" pitchFamily="34" charset="0"/>
-                <a:ea typeface="Menlo" pitchFamily="34" charset="-122"/>
-                <a:cs typeface="Menlo" pitchFamily="34" charset="-120"/>
-              </a:rPr>
-              <a:t>playwright-cli -s=obi open</a:t>
-            </a:r>
-            <a:endParaRPr lang="en-US" sz="1300" dirty="0"/>
-          </a:p>
-          <a:p>
-            <a:pPr indent="0" marL="0">
-              <a:spcAft>
-                <a:spcPts val="900"/>
-              </a:spcAft>
-              <a:buNone/>
-            </a:pPr>
-            <a:r>
-              <a:rPr lang="en-US" sz="1300" b="1" dirty="0">
-                <a:solidFill>
-                  <a:srgbClr val="5CC8FF"/>
-                </a:solidFill>
-                <a:latin typeface="Menlo" pitchFamily="34" charset="0"/>
-                <a:ea typeface="Menlo" pitchFamily="34" charset="-122"/>
-                <a:cs typeface="Menlo" pitchFamily="34" charset="-120"/>
-              </a:rPr>
-              <a:t>$ </a:t>
-            </a:r>
-            <a:pPr indent="0" marL="0">
-              <a:spcAft>
-                <a:spcPts val="900"/>
-              </a:spcAft>
-              <a:buNone/>
-            </a:pPr>
-            <a:r>
-              <a:rPr lang="en-US" sz="1300" dirty="0">
-                <a:solidFill>
-                  <a:srgbClr val="FFFFFF"/>
-                </a:solidFill>
-                <a:latin typeface="Menlo" pitchFamily="34" charset="0"/>
-                <a:ea typeface="Menlo" pitchFamily="34" charset="-122"/>
-                <a:cs typeface="Menlo" pitchFamily="34" charset="-120"/>
-              </a:rPr>
-              <a:t>playwright-cli -s=obi state-load .e2e-runs/live/auth/primary.json</a:t>
-            </a:r>
-            <a:endParaRPr lang="en-US" sz="1300" dirty="0"/>
-          </a:p>
-          <a:p>
-            <a:pPr indent="0" marL="0">
-              <a:spcAft>
-                <a:spcPts val="900"/>
-              </a:spcAft>
-              <a:buNone/>
-            </a:pPr>
-            <a:r>
-              <a:rPr lang="en-US" sz="1300" b="1" dirty="0">
-                <a:solidFill>
-                  <a:srgbClr val="5CC8FF"/>
-                </a:solidFill>
-                <a:latin typeface="Menlo" pitchFamily="34" charset="0"/>
-                <a:ea typeface="Menlo" pitchFamily="34" charset="-122"/>
-                <a:cs typeface="Menlo" pitchFamily="34" charset="-120"/>
-              </a:rPr>
-              <a:t>$ </a:t>
-            </a:r>
-            <a:pPr indent="0" marL="0">
-              <a:spcAft>
-                <a:spcPts val="900"/>
-              </a:spcAft>
-              <a:buNone/>
-            </a:pPr>
-            <a:r>
-              <a:rPr lang="en-US" sz="1300" dirty="0">
-                <a:solidFill>
-                  <a:srgbClr val="FFFFFF"/>
-                </a:solidFill>
-                <a:latin typeface="Menlo" pitchFamily="34" charset="0"/>
-                <a:ea typeface="Menlo" pitchFamily="34" charset="-122"/>
-                <a:cs typeface="Menlo" pitchFamily="34" charset="-120"/>
-              </a:rPr>
-              <a:t>playwright-cli -s=obi goto "$E2E_BASE_URL/app/virtual-lab"</a:t>
-            </a:r>
-            <a:endParaRPr lang="en-US" sz="1300" dirty="0"/>
-          </a:p>
-          <a:p>
-            <a:pPr indent="0" marL="0">
-              <a:spcAft>
-                <a:spcPts val="200"/>
-              </a:spcAft>
-              <a:buNone/>
-            </a:pPr>
-            <a:r>
-              <a:rPr lang="en-US" sz="1300" dirty="0">
-                <a:solidFill>
-                  <a:srgbClr val="A9B7CC"/>
-                </a:solidFill>
-                <a:latin typeface="Menlo" pitchFamily="34" charset="0"/>
-                <a:ea typeface="Menlo" pitchFamily="34" charset="-122"/>
-                <a:cs typeface="Menlo" pitchFamily="34" charset="-120"/>
-              </a:rPr>
-              <a:t># find the words your scenario quotes</a:t>
-            </a:r>
-            <a:endParaRPr lang="en-US" sz="1300" dirty="0"/>
-          </a:p>
-          <a:p>
-            <a:pPr indent="0" marL="0">
-              <a:spcAft>
-                <a:spcPts val="900"/>
-              </a:spcAft>
-              <a:buNone/>
-            </a:pPr>
-            <a:r>
-              <a:rPr lang="en-US" sz="1300" b="1" dirty="0">
-                <a:solidFill>
-                  <a:srgbClr val="5CC8FF"/>
-                </a:solidFill>
-                <a:latin typeface="Menlo" pitchFamily="34" charset="0"/>
-                <a:ea typeface="Menlo" pitchFamily="34" charset="-122"/>
-                <a:cs typeface="Menlo" pitchFamily="34" charset="-120"/>
-              </a:rPr>
-              <a:t>$ </a:t>
-            </a:r>
-            <a:pPr indent="0" marL="0">
-              <a:spcAft>
-                <a:spcPts val="900"/>
-              </a:spcAft>
-              <a:buNone/>
-            </a:pPr>
-            <a:r>
-              <a:rPr lang="en-US" sz="1300" dirty="0">
-                <a:solidFill>
-                  <a:srgbClr val="FFFFFF"/>
-                </a:solidFill>
-                <a:latin typeface="Menlo" pitchFamily="34" charset="0"/>
-                <a:ea typeface="Menlo" pitchFamily="34" charset="-122"/>
-                <a:cs typeface="Menlo" pitchFamily="34" charset="-120"/>
-              </a:rPr>
-              <a:t>playwright-cli -s=obi find "Add to library"</a:t>
-            </a:r>
-            <a:endParaRPr lang="en-US" sz="1300" dirty="0"/>
-          </a:p>
-          <a:p>
-            <a:pPr indent="0" marL="0">
-              <a:spcAft>
-                <a:spcPts val="900"/>
-              </a:spcAft>
-              <a:buNone/>
-            </a:pPr>
-            <a:r>
-              <a:rPr lang="en-US" sz="1300" b="1" dirty="0">
-                <a:solidFill>
-                  <a:srgbClr val="5CC8FF"/>
-                </a:solidFill>
-                <a:latin typeface="Menlo" pitchFamily="34" charset="0"/>
-                <a:ea typeface="Menlo" pitchFamily="34" charset="-122"/>
-                <a:cs typeface="Menlo" pitchFamily="34" charset="-120"/>
-              </a:rPr>
-              <a:t>$ </a:t>
-            </a:r>
-            <a:pPr indent="0" marL="0">
-              <a:spcAft>
-                <a:spcPts val="900"/>
-              </a:spcAft>
-              <a:buNone/>
-            </a:pPr>
-            <a:r>
-              <a:rPr lang="en-US" sz="1300" dirty="0">
-                <a:solidFill>
-                  <a:srgbClr val="FFFFFF"/>
-                </a:solidFill>
-                <a:latin typeface="Menlo" pitchFamily="34" charset="0"/>
-                <a:ea typeface="Menlo" pitchFamily="34" charset="-122"/>
-                <a:cs typeface="Menlo" pitchFamily="34" charset="-120"/>
-              </a:rPr>
-              <a:t>playwright-cli -s=obi close</a:t>
-            </a:r>
-            <a:endParaRPr lang="en-US" sz="1300" dirty="0"/>
-          </a:p>
-        </p:txBody>
-      </p:sp>
-      <p:sp>
-        <p:nvSpPr>
-          <p:cNvPr id="9" name="node-339"/>
-          <p:cNvSpPr/>
-          <p:nvPr/>
-        </p:nvSpPr>
-        <p:spPr>
-          <a:xfrm>
-            <a:off x="8366760" y="1874520"/>
-            <a:ext cx="548640" cy="548640"/>
-          </a:xfrm>
-          <a:prstGeom prst="ellipse">
-            <a:avLst/>
-          </a:prstGeom>
-          <a:solidFill>
-            <a:schemeClr val="accent1"/>
-          </a:solidFill>
-          <a:ln/>
-        </p:spPr>
-      </p:sp>
       <p:pic>
         <p:nvPicPr>
-          <p:cNvPr id="10" name="icon-340" descr="preencoded.png">    </p:cNvPr>
+          <p:cNvPr id="7" name="icon-331" descr="preencoded.png">    </p:cNvPr>
           <p:cNvPicPr>
             <a:picLocks noChangeAspect="1"/>
           </p:cNvPicPr>
@@ -6912,8 +6565,8 @@
         </p:blipFill>
         <p:spPr>
           <a:xfrm>
-            <a:off x="8503920" y="2011680"/>
-            <a:ext cx="274320" cy="274320"/>
+            <a:off x="1600200" y="2423160"/>
+            <a:ext cx="548640" cy="548640"/>
           </a:xfrm>
           <a:prstGeom prst="rect">
             <a:avLst/>
@@ -6922,50 +6575,50 @@
       </p:pic>
       <p:sp>
         <p:nvSpPr>
-          <p:cNvPr id="11" name="text-341"/>
-          <p:cNvSpPr txBox="1"/>
-          <p:nvPr/>
-        </p:nvSpPr>
-        <p:spPr>
-          <a:xfrm>
-            <a:off x="9098280" y="1874520"/>
-            <a:ext cx="2560320" cy="365760"/>
-          </a:xfrm>
-          <a:prstGeom prst="rect">
-            <a:avLst/>
-          </a:prstGeom>
-          <a:noFill/>
-          <a:ln/>
-        </p:spPr>
-        <p:txBody>
-          <a:bodyPr wrap="square" lIns="0" tIns="0" rIns="0" bIns="0" rtlCol="0" anchor="ctr"/>
-          <a:lstStyle/>
-          <a:p>
-            <a:pPr indent="0" marL="0">
-              <a:buNone/>
-            </a:pPr>
-            <a:r>
-              <a:rPr lang="en-US" sz="1600" b="1" dirty="0">
+          <p:cNvPr id="8" name="text-332"/>
+          <p:cNvSpPr txBox="1"/>
+          <p:nvPr/>
+        </p:nvSpPr>
+        <p:spPr>
+          <a:xfrm>
+            <a:off x="548640" y="3429000"/>
+            <a:ext cx="2651760" cy="365760"/>
+          </a:xfrm>
+          <a:prstGeom prst="rect">
+            <a:avLst/>
+          </a:prstGeom>
+          <a:noFill/>
+          <a:ln/>
+        </p:spPr>
+        <p:txBody>
+          <a:bodyPr wrap="square" lIns="0" tIns="0" rIns="0" bIns="0" rtlCol="0" anchor="ctr"/>
+          <a:lstStyle/>
+          <a:p>
+            <a:pPr algn="ctr" indent="0" marL="0">
+              <a:buNone/>
+            </a:pPr>
+            <a:r>
+              <a:rPr lang="en-US" sz="1700" b="1" dirty="0">
                 <a:solidFill>
                   <a:schemeClr val="tx1"/>
                 </a:solidFill>
               </a:rPr>
-              <a:t>One browser, kept alive</a:t>
-            </a:r>
-            <a:endParaRPr lang="en-US" sz="1600" dirty="0"/>
-          </a:p>
-        </p:txBody>
-      </p:sp>
-      <p:sp>
-        <p:nvSpPr>
-          <p:cNvPr id="12" name="text-342"/>
-          <p:cNvSpPr txBox="1"/>
-          <p:nvPr/>
-        </p:nvSpPr>
-        <p:spPr>
-          <a:xfrm>
-            <a:off x="9098280" y="2240280"/>
-            <a:ext cx="2560320" cy="777240"/>
+              <a:t>Signs in</a:t>
+            </a:r>
+            <a:endParaRPr lang="en-US" sz="1700" dirty="0"/>
+          </a:p>
+        </p:txBody>
+      </p:sp>
+      <p:sp>
+        <p:nvSpPr>
+          <p:cNvPr id="9" name="text-333"/>
+          <p:cNvSpPr txBox="1"/>
+          <p:nvPr/>
+        </p:nvSpPr>
+        <p:spPr>
+          <a:xfrm>
+            <a:off x="594360" y="3813048"/>
+            <a:ext cx="2560320" cy="594360"/>
           </a:xfrm>
           <a:prstGeom prst="rect">
             <a:avLst/>
@@ -6977,7 +6630,7 @@
           <a:bodyPr wrap="square" lIns="0" tIns="0" rIns="0" bIns="0" rtlCol="0" anchor="t"/>
           <a:lstStyle/>
           <a:p>
-            <a:pPr indent="0" marL="0">
+            <a:pPr algn="ctr" indent="0" marL="0">
               <a:buNone/>
             </a:pPr>
             <a:r>
@@ -6986,7 +6639,7 @@
                   <a:schemeClr val="tx2"/>
                 </a:solidFill>
               </a:rPr>
-              <a:t>every command shares it; the agent reads only the part of the page it asks for</a:t>
+              <a:t>as the QA user</a:t>
             </a:r>
             <a:endParaRPr lang="en-US" sz="1300" dirty="0"/>
           </a:p>
@@ -6994,27 +6647,70 @@
       </p:sp>
       <p:sp>
         <p:nvSpPr>
-          <p:cNvPr id="13" name="node-343"/>
+          <p:cNvPr id="10" name="link-334"/>
           <p:cNvSpPr/>
           <p:nvPr/>
         </p:nvSpPr>
         <p:spPr>
           <a:xfrm>
-            <a:off x="8366760" y="3200400"/>
-            <a:ext cx="548640" cy="548640"/>
+            <a:off x="5367528" y="2697480"/>
+            <a:ext cx="1435608" cy="0"/>
+          </a:xfrm>
+          <a:prstGeom prst="line">
+            <a:avLst/>
+          </a:prstGeom>
+          <a:noFill/>
+          <a:ln w="19050">
+            <a:solidFill>
+              <a:srgbClr val="4A5870"/>
+            </a:solidFill>
+            <a:prstDash val="solid"/>
+          </a:ln>
+        </p:spPr>
+      </p:sp>
+      <p:sp>
+        <p:nvSpPr>
+          <p:cNvPr id="11" name="node-335"/>
+          <p:cNvSpPr/>
+          <p:nvPr/>
+        </p:nvSpPr>
+        <p:spPr>
+          <a:xfrm>
+            <a:off x="6748272" y="2642616"/>
+            <a:ext cx="109728" cy="109728"/>
           </a:xfrm>
           <a:prstGeom prst="ellipse">
             <a:avLst/>
           </a:prstGeom>
           <a:solidFill>
-            <a:schemeClr val="accent1"/>
+            <a:srgbClr val="026FD7"/>
+          </a:solidFill>
+          <a:ln/>
+        </p:spPr>
+      </p:sp>
+      <p:sp>
+        <p:nvSpPr>
+          <p:cNvPr id="12" name="node-336"/>
+          <p:cNvSpPr/>
+          <p:nvPr/>
+        </p:nvSpPr>
+        <p:spPr>
+          <a:xfrm>
+            <a:off x="4133088" y="2148840"/>
+            <a:ext cx="1097280" cy="1097280"/>
+          </a:xfrm>
+          <a:prstGeom prst="ellipse">
+            <a:avLst/>
+          </a:prstGeom>
+          <a:solidFill>
+            <a:schemeClr val="tx1"/>
           </a:solidFill>
           <a:ln/>
         </p:spPr>
       </p:sp>
       <p:pic>
         <p:nvPicPr>
-          <p:cNvPr id="14" name="icon-344" descr="preencoded.png">    </p:cNvPr>
+          <p:cNvPr id="13" name="icon-337" descr="preencoded.png">    </p:cNvPr>
           <p:cNvPicPr>
             <a:picLocks noChangeAspect="1"/>
           </p:cNvPicPr>
@@ -7028,8 +6724,8 @@
         </p:blipFill>
         <p:spPr>
           <a:xfrm>
-            <a:off x="8503920" y="3337560"/>
-            <a:ext cx="274320" cy="274320"/>
+            <a:off x="4407408" y="2423160"/>
+            <a:ext cx="548640" cy="548640"/>
           </a:xfrm>
           <a:prstGeom prst="rect">
             <a:avLst/>
@@ -7038,50 +6734,50 @@
       </p:pic>
       <p:sp>
         <p:nvSpPr>
-          <p:cNvPr id="15" name="text-345"/>
-          <p:cNvSpPr txBox="1"/>
-          <p:nvPr/>
-        </p:nvSpPr>
-        <p:spPr>
-          <a:xfrm>
-            <a:off x="9098280" y="3200400"/>
-            <a:ext cx="2560320" cy="365760"/>
-          </a:xfrm>
-          <a:prstGeom prst="rect">
-            <a:avLst/>
-          </a:prstGeom>
-          <a:noFill/>
-          <a:ln/>
-        </p:spPr>
-        <p:txBody>
-          <a:bodyPr wrap="square" lIns="0" tIns="0" rIns="0" bIns="0" rtlCol="0" anchor="ctr"/>
-          <a:lstStyle/>
-          <a:p>
-            <a:pPr indent="0" marL="0">
-              <a:buNone/>
-            </a:pPr>
-            <a:r>
-              <a:rPr lang="en-US" sz="1600" b="1" dirty="0">
+          <p:cNvPr id="14" name="text-338"/>
+          <p:cNvSpPr txBox="1"/>
+          <p:nvPr/>
+        </p:nvSpPr>
+        <p:spPr>
+          <a:xfrm>
+            <a:off x="3355848" y="3429000"/>
+            <a:ext cx="2651760" cy="365760"/>
+          </a:xfrm>
+          <a:prstGeom prst="rect">
+            <a:avLst/>
+          </a:prstGeom>
+          <a:noFill/>
+          <a:ln/>
+        </p:spPr>
+        <p:txBody>
+          <a:bodyPr wrap="square" lIns="0" tIns="0" rIns="0" bIns="0" rtlCol="0" anchor="ctr"/>
+          <a:lstStyle/>
+          <a:p>
+            <a:pPr algn="ctr" indent="0" marL="0">
+              <a:buNone/>
+            </a:pPr>
+            <a:r>
+              <a:rPr lang="en-US" sz="1700" b="1" dirty="0">
                 <a:solidFill>
                   <a:schemeClr val="tx1"/>
                 </a:solidFill>
               </a:rPr>
-              <a:t>Signed in as the QA user</a:t>
-            </a:r>
-            <a:endParaRPr lang="en-US" sz="1600" dirty="0"/>
-          </a:p>
-        </p:txBody>
-      </p:sp>
-      <p:sp>
-        <p:nvSpPr>
-          <p:cNvPr id="16" name="text-346"/>
-          <p:cNvSpPr txBox="1"/>
-          <p:nvPr/>
-        </p:nvSpPr>
-        <p:spPr>
-          <a:xfrm>
-            <a:off x="9098280" y="3566160"/>
-            <a:ext cx="2560320" cy="777240"/>
+              <a:t>Opens the page</a:t>
+            </a:r>
+            <a:endParaRPr lang="en-US" sz="1700" dirty="0"/>
+          </a:p>
+        </p:txBody>
+      </p:sp>
+      <p:sp>
+        <p:nvSpPr>
+          <p:cNvPr id="15" name="text-339"/>
+          <p:cNvSpPr txBox="1"/>
+          <p:nvPr/>
+        </p:nvSpPr>
+        <p:spPr>
+          <a:xfrm>
+            <a:off x="3401568" y="3813048"/>
+            <a:ext cx="2560320" cy="594360"/>
           </a:xfrm>
           <a:prstGeom prst="rect">
             <a:avLst/>
@@ -7093,7 +6789,7 @@
           <a:bodyPr wrap="square" lIns="0" tIns="0" rIns="0" bIns="0" rtlCol="0" anchor="t"/>
           <a:lstStyle/>
           <a:p>
-            <a:pPr indent="0" marL="0">
+            <a:pPr algn="ctr" indent="0" marL="0">
               <a:buNone/>
             </a:pPr>
             <a:r>
@@ -7102,7 +6798,7 @@
                   <a:schemeClr val="tx2"/>
                 </a:solidFill>
               </a:rPr>
-              <a:t>it loads the session make auth saved</a:t>
+              <a:t>the page your scenario starts on</a:t>
             </a:r>
             <a:endParaRPr lang="en-US" sz="1300" dirty="0"/>
           </a:p>
@@ -7110,14 +6806,57 @@
       </p:sp>
       <p:sp>
         <p:nvSpPr>
-          <p:cNvPr id="17" name="node-347"/>
+          <p:cNvPr id="16" name="link-340"/>
           <p:cNvSpPr/>
           <p:nvPr/>
         </p:nvSpPr>
         <p:spPr>
           <a:xfrm>
-            <a:off x="8366760" y="4526280"/>
-            <a:ext cx="548640" cy="548640"/>
+            <a:off x="8174736" y="2697480"/>
+            <a:ext cx="1435608" cy="0"/>
+          </a:xfrm>
+          <a:prstGeom prst="line">
+            <a:avLst/>
+          </a:prstGeom>
+          <a:noFill/>
+          <a:ln w="19050">
+            <a:solidFill>
+              <a:srgbClr val="4A5870"/>
+            </a:solidFill>
+            <a:prstDash val="solid"/>
+          </a:ln>
+        </p:spPr>
+      </p:sp>
+      <p:sp>
+        <p:nvSpPr>
+          <p:cNvPr id="17" name="node-341"/>
+          <p:cNvSpPr/>
+          <p:nvPr/>
+        </p:nvSpPr>
+        <p:spPr>
+          <a:xfrm>
+            <a:off x="9555480" y="2642616"/>
+            <a:ext cx="109728" cy="109728"/>
+          </a:xfrm>
+          <a:prstGeom prst="ellipse">
+            <a:avLst/>
+          </a:prstGeom>
+          <a:solidFill>
+            <a:srgbClr val="026FD7"/>
+          </a:solidFill>
+          <a:ln/>
+        </p:spPr>
+      </p:sp>
+      <p:sp>
+        <p:nvSpPr>
+          <p:cNvPr id="18" name="node-342"/>
+          <p:cNvSpPr/>
+          <p:nvPr/>
+        </p:nvSpPr>
+        <p:spPr>
+          <a:xfrm>
+            <a:off x="6940296" y="2148840"/>
+            <a:ext cx="1097280" cy="1097280"/>
           </a:xfrm>
           <a:prstGeom prst="ellipse">
             <a:avLst/>
@@ -7130,7 +6869,7 @@
       </p:sp>
       <p:pic>
         <p:nvPicPr>
-          <p:cNvPr id="18" name="icon-348" descr="preencoded.png">    </p:cNvPr>
+          <p:cNvPr id="19" name="icon-343" descr="preencoded.png">    </p:cNvPr>
           <p:cNvPicPr>
             <a:picLocks noChangeAspect="1"/>
           </p:cNvPicPr>
@@ -7144,7 +6883,261 @@
         </p:blipFill>
         <p:spPr>
           <a:xfrm>
-            <a:off x="8503920" y="4663440"/>
+            <a:off x="7214616" y="2423160"/>
+            <a:ext cx="548640" cy="548640"/>
+          </a:xfrm>
+          <a:prstGeom prst="rect">
+            <a:avLst/>
+          </a:prstGeom>
+        </p:spPr>
+      </p:pic>
+      <p:sp>
+        <p:nvSpPr>
+          <p:cNvPr id="20" name="text-344"/>
+          <p:cNvSpPr txBox="1"/>
+          <p:nvPr/>
+        </p:nvSpPr>
+        <p:spPr>
+          <a:xfrm>
+            <a:off x="6163056" y="3429000"/>
+            <a:ext cx="2651760" cy="365760"/>
+          </a:xfrm>
+          <a:prstGeom prst="rect">
+            <a:avLst/>
+          </a:prstGeom>
+          <a:noFill/>
+          <a:ln/>
+        </p:spPr>
+        <p:txBody>
+          <a:bodyPr wrap="square" lIns="0" tIns="0" rIns="0" bIns="0" rtlCol="0" anchor="ctr"/>
+          <a:lstStyle/>
+          <a:p>
+            <a:pPr algn="ctr" indent="0" marL="0">
+              <a:buNone/>
+            </a:pPr>
+            <a:r>
+              <a:rPr lang="en-US" sz="1700" b="1" dirty="0">
+                <a:solidFill>
+                  <a:schemeClr val="tx1"/>
+                </a:solidFill>
+              </a:rPr>
+              <a:t>Finds your words</a:t>
+            </a:r>
+            <a:endParaRPr lang="en-US" sz="1700" dirty="0"/>
+          </a:p>
+        </p:txBody>
+      </p:sp>
+      <p:sp>
+        <p:nvSpPr>
+          <p:cNvPr id="21" name="text-345"/>
+          <p:cNvSpPr txBox="1"/>
+          <p:nvPr/>
+        </p:nvSpPr>
+        <p:spPr>
+          <a:xfrm>
+            <a:off x="6208776" y="3813048"/>
+            <a:ext cx="2560320" cy="594360"/>
+          </a:xfrm>
+          <a:prstGeom prst="rect">
+            <a:avLst/>
+          </a:prstGeom>
+          <a:noFill/>
+          <a:ln/>
+        </p:spPr>
+        <p:txBody>
+          <a:bodyPr wrap="square" lIns="0" tIns="0" rIns="0" bIns="0" rtlCol="0" anchor="t"/>
+          <a:lstStyle/>
+          <a:p>
+            <a:pPr algn="ctr" indent="0" marL="0">
+              <a:buNone/>
+            </a:pPr>
+            <a:r>
+              <a:rPr lang="en-US" sz="1300" dirty="0">
+                <a:solidFill>
+                  <a:schemeClr val="tx2"/>
+                </a:solidFill>
+              </a:rPr>
+              <a:t>each word your scenario quotes</a:t>
+            </a:r>
+            <a:endParaRPr lang="en-US" sz="1300" dirty="0"/>
+          </a:p>
+        </p:txBody>
+      </p:sp>
+      <p:sp>
+        <p:nvSpPr>
+          <p:cNvPr id="22" name="node-346"/>
+          <p:cNvSpPr/>
+          <p:nvPr/>
+        </p:nvSpPr>
+        <p:spPr>
+          <a:xfrm>
+            <a:off x="9747504" y="2148840"/>
+            <a:ext cx="1097280" cy="1097280"/>
+          </a:xfrm>
+          <a:prstGeom prst="ellipse">
+            <a:avLst/>
+          </a:prstGeom>
+          <a:solidFill>
+            <a:schemeClr val="tx1"/>
+          </a:solidFill>
+          <a:ln/>
+        </p:spPr>
+      </p:sp>
+      <p:pic>
+        <p:nvPicPr>
+          <p:cNvPr id="23" name="icon-347" descr="preencoded.png">    </p:cNvPr>
+          <p:cNvPicPr>
+            <a:picLocks noChangeAspect="1"/>
+          </p:cNvPicPr>
+          <p:nvPr/>
+        </p:nvPicPr>
+        <p:blipFill>
+          <a:blip r:embed="rId4"/>
+          <a:stretch>
+            <a:fillRect/>
+          </a:stretch>
+        </p:blipFill>
+        <p:spPr>
+          <a:xfrm>
+            <a:off x="10021824" y="2423160"/>
+            <a:ext cx="548640" cy="548640"/>
+          </a:xfrm>
+          <a:prstGeom prst="rect">
+            <a:avLst/>
+          </a:prstGeom>
+        </p:spPr>
+      </p:pic>
+      <p:sp>
+        <p:nvSpPr>
+          <p:cNvPr id="24" name="text-348"/>
+          <p:cNvSpPr txBox="1"/>
+          <p:nvPr/>
+        </p:nvSpPr>
+        <p:spPr>
+          <a:xfrm>
+            <a:off x="8970264" y="3429000"/>
+            <a:ext cx="2651760" cy="365760"/>
+          </a:xfrm>
+          <a:prstGeom prst="rect">
+            <a:avLst/>
+          </a:prstGeom>
+          <a:noFill/>
+          <a:ln/>
+        </p:spPr>
+        <p:txBody>
+          <a:bodyPr wrap="square" lIns="0" tIns="0" rIns="0" bIns="0" rtlCol="0" anchor="ctr"/>
+          <a:lstStyle/>
+          <a:p>
+            <a:pPr algn="ctr" indent="0" marL="0">
+              <a:buNone/>
+            </a:pPr>
+            <a:r>
+              <a:rPr lang="en-US" sz="1700" b="1" dirty="0">
+                <a:solidFill>
+                  <a:schemeClr val="tx1"/>
+                </a:solidFill>
+              </a:rPr>
+              <a:t>Writes the check</a:t>
+            </a:r>
+            <a:endParaRPr lang="en-US" sz="1700" dirty="0"/>
+          </a:p>
+        </p:txBody>
+      </p:sp>
+      <p:sp>
+        <p:nvSpPr>
+          <p:cNvPr id="25" name="text-349"/>
+          <p:cNvSpPr txBox="1"/>
+          <p:nvPr/>
+        </p:nvSpPr>
+        <p:spPr>
+          <a:xfrm>
+            <a:off x="9015984" y="3813048"/>
+            <a:ext cx="2560320" cy="594360"/>
+          </a:xfrm>
+          <a:prstGeom prst="rect">
+            <a:avLst/>
+          </a:prstGeom>
+          <a:noFill/>
+          <a:ln/>
+        </p:spPr>
+        <p:txBody>
+          <a:bodyPr wrap="square" lIns="0" tIns="0" rIns="0" bIns="0" rtlCol="0" anchor="t"/>
+          <a:lstStyle/>
+          <a:p>
+            <a:pPr algn="ctr" indent="0" marL="0">
+              <a:buNone/>
+            </a:pPr>
+            <a:r>
+              <a:rPr lang="en-US" sz="1300" dirty="0">
+                <a:solidFill>
+                  <a:schemeClr val="tx2"/>
+                </a:solidFill>
+              </a:rPr>
+              <a:t>then runs the test to prove it</a:t>
+            </a:r>
+            <a:endParaRPr lang="en-US" sz="1300" dirty="0"/>
+          </a:p>
+        </p:txBody>
+      </p:sp>
+      <p:sp>
+        <p:nvSpPr>
+          <p:cNvPr id="26" name="card-350"/>
+          <p:cNvSpPr/>
+          <p:nvPr/>
+        </p:nvSpPr>
+        <p:spPr>
+          <a:xfrm>
+            <a:off x="548640" y="4709160"/>
+            <a:ext cx="3575304" cy="960120"/>
+          </a:xfrm>
+          <a:prstGeom prst="roundRect">
+            <a:avLst>
+              <a:gd name="adj" fmla="val 9524"/>
+            </a:avLst>
+          </a:prstGeom>
+          <a:solidFill>
+            <a:schemeClr val="bg2"/>
+          </a:solidFill>
+          <a:ln/>
+        </p:spPr>
+      </p:sp>
+      <p:sp>
+        <p:nvSpPr>
+          <p:cNvPr id="27" name="node-351"/>
+          <p:cNvSpPr/>
+          <p:nvPr/>
+        </p:nvSpPr>
+        <p:spPr>
+          <a:xfrm>
+            <a:off x="777240" y="4914900"/>
+            <a:ext cx="548640" cy="548640"/>
+          </a:xfrm>
+          <a:prstGeom prst="ellipse">
+            <a:avLst/>
+          </a:prstGeom>
+          <a:solidFill>
+            <a:schemeClr val="accent1"/>
+          </a:solidFill>
+          <a:ln/>
+        </p:spPr>
+      </p:sp>
+      <p:pic>
+        <p:nvPicPr>
+          <p:cNvPr id="28" name="icon-352" descr="preencoded.png">    </p:cNvPr>
+          <p:cNvPicPr>
+            <a:picLocks noChangeAspect="1"/>
+          </p:cNvPicPr>
+          <p:nvPr/>
+        </p:nvPicPr>
+        <p:blipFill>
+          <a:blip r:embed="rId5"/>
+          <a:stretch>
+            <a:fillRect/>
+          </a:stretch>
+        </p:blipFill>
+        <p:spPr>
+          <a:xfrm>
+            <a:off x="914400" y="5052060"/>
             <a:ext cx="274320" cy="274320"/>
           </a:xfrm>
           <a:prstGeom prst="rect">
@@ -7154,50 +7147,50 @@
       </p:pic>
       <p:sp>
         <p:nvSpPr>
-          <p:cNvPr id="19" name="text-349"/>
-          <p:cNvSpPr txBox="1"/>
-          <p:nvPr/>
-        </p:nvSpPr>
-        <p:spPr>
-          <a:xfrm>
-            <a:off x="9098280" y="4526280"/>
-            <a:ext cx="2560320" cy="365760"/>
-          </a:xfrm>
-          <a:prstGeom prst="rect">
-            <a:avLst/>
-          </a:prstGeom>
-          <a:noFill/>
-          <a:ln/>
-        </p:spPr>
-        <p:txBody>
-          <a:bodyPr wrap="square" lIns="0" tIns="0" rIns="0" bIns="0" rtlCol="0" anchor="ctr"/>
-          <a:lstStyle/>
-          <a:p>
-            <a:pPr indent="0" marL="0">
-              <a:buNone/>
-            </a:pPr>
-            <a:r>
-              <a:rPr lang="en-US" sz="1600" b="1" dirty="0">
+          <p:cNvPr id="29" name="text-353"/>
+          <p:cNvSpPr txBox="1"/>
+          <p:nvPr/>
+        </p:nvSpPr>
+        <p:spPr>
+          <a:xfrm>
+            <a:off x="1463040" y="4846320"/>
+            <a:ext cx="2560320" cy="347472"/>
+          </a:xfrm>
+          <a:prstGeom prst="rect">
+            <a:avLst/>
+          </a:prstGeom>
+          <a:noFill/>
+          <a:ln/>
+        </p:spPr>
+        <p:txBody>
+          <a:bodyPr wrap="square" lIns="0" tIns="0" rIns="0" bIns="0" rtlCol="0" anchor="ctr"/>
+          <a:lstStyle/>
+          <a:p>
+            <a:pPr indent="0" marL="0">
+              <a:buNone/>
+            </a:pPr>
+            <a:r>
+              <a:rPr lang="en-US" sz="1500" b="1" dirty="0">
                 <a:solidFill>
                   <a:schemeClr val="tx1"/>
                 </a:solidFill>
               </a:rPr>
-              <a:t>Installed by make install</a:t>
-            </a:r>
-            <a:endParaRPr lang="en-US" sz="1600" dirty="0"/>
-          </a:p>
-        </p:txBody>
-      </p:sp>
-      <p:sp>
-        <p:nvSpPr>
-          <p:cNvPr id="20" name="text-350"/>
-          <p:cNvSpPr txBox="1"/>
-          <p:nvPr/>
-        </p:nvSpPr>
-        <p:spPr>
-          <a:xfrm>
-            <a:off x="9098280" y="4892040"/>
-            <a:ext cx="2560320" cy="777240"/>
+              <a:t>One browser, kept alive</a:t>
+            </a:r>
+            <a:endParaRPr lang="en-US" sz="1500" dirty="0"/>
+          </a:p>
+        </p:txBody>
+      </p:sp>
+      <p:sp>
+        <p:nvSpPr>
+          <p:cNvPr id="30" name="text-354"/>
+          <p:cNvSpPr txBox="1"/>
+          <p:nvPr/>
+        </p:nvSpPr>
+        <p:spPr>
+          <a:xfrm>
+            <a:off x="1463040" y="5193792"/>
+            <a:ext cx="2560320" cy="320040"/>
           </a:xfrm>
           <a:prstGeom prst="rect">
             <a:avLst/>
@@ -7213,75 +7206,290 @@
               <a:buNone/>
             </a:pPr>
             <a:r>
-              <a:rPr lang="en-US" sz="1300" dirty="0">
+              <a:rPr lang="en-US" sz="1200" dirty="0">
                 <a:solidFill>
                   <a:schemeClr val="tx2"/>
                 </a:solidFill>
               </a:rPr>
-              <a:t>as a skill for Claude Code and every other agent</a:t>
-            </a:r>
-            <a:endParaRPr lang="en-US" sz="1300" dirty="0"/>
-          </a:p>
-        </p:txBody>
-      </p:sp>
-      <p:sp>
-        <p:nvSpPr>
-          <p:cNvPr id="21" name="text-351"/>
-          <p:cNvSpPr txBox="1"/>
-          <p:nvPr/>
-        </p:nvSpPr>
-        <p:spPr>
-          <a:xfrm>
-            <a:off x="548640" y="5943600"/>
-            <a:ext cx="11064240" cy="320040"/>
-          </a:xfrm>
-          <a:prstGeom prst="rect">
-            <a:avLst/>
-          </a:prstGeom>
-          <a:noFill/>
-          <a:ln/>
-        </p:spPr>
-        <p:txBody>
-          <a:bodyPr wrap="square" lIns="0" tIns="0" rIns="0" bIns="0" rtlCol="0" anchor="ctr"/>
-          <a:lstStyle/>
-          <a:p>
-            <a:pPr indent="0" marL="0">
-              <a:buNone/>
-            </a:pPr>
-            <a:r>
-              <a:rPr lang="en-US" sz="1300" dirty="0">
+              <a:t>every step of the job reuses it</a:t>
+            </a:r>
+            <a:endParaRPr lang="en-US" sz="1200" dirty="0"/>
+          </a:p>
+        </p:txBody>
+      </p:sp>
+      <p:sp>
+        <p:nvSpPr>
+          <p:cNvPr id="31" name="card-355"/>
+          <p:cNvSpPr/>
+          <p:nvPr/>
+        </p:nvSpPr>
+        <p:spPr>
+          <a:xfrm>
+            <a:off x="4306824" y="4709160"/>
+            <a:ext cx="3575304" cy="960120"/>
+          </a:xfrm>
+          <a:prstGeom prst="roundRect">
+            <a:avLst>
+              <a:gd name="adj" fmla="val 9524"/>
+            </a:avLst>
+          </a:prstGeom>
+          <a:solidFill>
+            <a:schemeClr val="bg2"/>
+          </a:solidFill>
+          <a:ln/>
+        </p:spPr>
+      </p:sp>
+      <p:sp>
+        <p:nvSpPr>
+          <p:cNvPr id="32" name="node-356"/>
+          <p:cNvSpPr/>
+          <p:nvPr/>
+        </p:nvSpPr>
+        <p:spPr>
+          <a:xfrm>
+            <a:off x="4535424" y="4914900"/>
+            <a:ext cx="548640" cy="548640"/>
+          </a:xfrm>
+          <a:prstGeom prst="ellipse">
+            <a:avLst/>
+          </a:prstGeom>
+          <a:solidFill>
+            <a:schemeClr val="accent1"/>
+          </a:solidFill>
+          <a:ln/>
+        </p:spPr>
+      </p:sp>
+      <p:pic>
+        <p:nvPicPr>
+          <p:cNvPr id="33" name="icon-357" descr="preencoded.png">    </p:cNvPr>
+          <p:cNvPicPr>
+            <a:picLocks noChangeAspect="1"/>
+          </p:cNvPicPr>
+          <p:nvPr/>
+        </p:nvPicPr>
+        <p:blipFill>
+          <a:blip r:embed="rId6"/>
+          <a:stretch>
+            <a:fillRect/>
+          </a:stretch>
+        </p:blipFill>
+        <p:spPr>
+          <a:xfrm>
+            <a:off x="4672584" y="5052060"/>
+            <a:ext cx="274320" cy="274320"/>
+          </a:xfrm>
+          <a:prstGeom prst="rect">
+            <a:avLst/>
+          </a:prstGeom>
+        </p:spPr>
+      </p:pic>
+      <p:sp>
+        <p:nvSpPr>
+          <p:cNvPr id="34" name="text-358"/>
+          <p:cNvSpPr txBox="1"/>
+          <p:nvPr/>
+        </p:nvSpPr>
+        <p:spPr>
+          <a:xfrm>
+            <a:off x="5221224" y="4846320"/>
+            <a:ext cx="2560320" cy="347472"/>
+          </a:xfrm>
+          <a:prstGeom prst="rect">
+            <a:avLst/>
+          </a:prstGeom>
+          <a:noFill/>
+          <a:ln/>
+        </p:spPr>
+        <p:txBody>
+          <a:bodyPr wrap="square" lIns="0" tIns="0" rIns="0" bIns="0" rtlCol="0" anchor="ctr"/>
+          <a:lstStyle/>
+          <a:p>
+            <a:pPr indent="0" marL="0">
+              <a:buNone/>
+            </a:pPr>
+            <a:r>
+              <a:rPr lang="en-US" sz="1500" b="1" dirty="0">
+                <a:solidFill>
+                  <a:schemeClr val="tx1"/>
+                </a:solidFill>
+              </a:rPr>
+              <a:t>Nothing on your screen</a:t>
+            </a:r>
+            <a:endParaRPr lang="en-US" sz="1500" dirty="0"/>
+          </a:p>
+        </p:txBody>
+      </p:sp>
+      <p:sp>
+        <p:nvSpPr>
+          <p:cNvPr id="35" name="text-359"/>
+          <p:cNvSpPr txBox="1"/>
+          <p:nvPr/>
+        </p:nvSpPr>
+        <p:spPr>
+          <a:xfrm>
+            <a:off x="5221224" y="5193792"/>
+            <a:ext cx="2560320" cy="320040"/>
+          </a:xfrm>
+          <a:prstGeom prst="rect">
+            <a:avLst/>
+          </a:prstGeom>
+          <a:noFill/>
+          <a:ln/>
+        </p:spPr>
+        <p:txBody>
+          <a:bodyPr wrap="square" lIns="0" tIns="0" rIns="0" bIns="0" rtlCol="0" anchor="t"/>
+          <a:lstStyle/>
+          <a:p>
+            <a:pPr indent="0" marL="0">
+              <a:buNone/>
+            </a:pPr>
+            <a:r>
+              <a:rPr lang="en-US" sz="1200" dirty="0">
                 <a:solidFill>
                   <a:schemeClr val="tx2"/>
                 </a:solidFill>
               </a:rPr>
-              <a:t>No global command? </a:t>
-            </a:r>
-            <a:pPr indent="0" marL="0">
-              <a:buNone/>
-            </a:pPr>
-            <a:r>
-              <a:rPr lang="en-US" sz="1300" b="1" dirty="0">
+              <a:t>it works in the background</a:t>
+            </a:r>
+            <a:endParaRPr lang="en-US" sz="1200" dirty="0"/>
+          </a:p>
+        </p:txBody>
+      </p:sp>
+      <p:sp>
+        <p:nvSpPr>
+          <p:cNvPr id="36" name="card-360"/>
+          <p:cNvSpPr/>
+          <p:nvPr/>
+        </p:nvSpPr>
+        <p:spPr>
+          <a:xfrm>
+            <a:off x="8065008" y="4709160"/>
+            <a:ext cx="3575304" cy="960120"/>
+          </a:xfrm>
+          <a:prstGeom prst="roundRect">
+            <a:avLst>
+              <a:gd name="adj" fmla="val 9524"/>
+            </a:avLst>
+          </a:prstGeom>
+          <a:solidFill>
+            <a:schemeClr val="bg2"/>
+          </a:solidFill>
+          <a:ln/>
+        </p:spPr>
+      </p:sp>
+      <p:sp>
+        <p:nvSpPr>
+          <p:cNvPr id="37" name="node-361"/>
+          <p:cNvSpPr/>
+          <p:nvPr/>
+        </p:nvSpPr>
+        <p:spPr>
+          <a:xfrm>
+            <a:off x="8293608" y="4914900"/>
+            <a:ext cx="548640" cy="548640"/>
+          </a:xfrm>
+          <a:prstGeom prst="ellipse">
+            <a:avLst/>
+          </a:prstGeom>
+          <a:solidFill>
+            <a:schemeClr val="accent1"/>
+          </a:solidFill>
+          <a:ln/>
+        </p:spPr>
+      </p:sp>
+      <p:pic>
+        <p:nvPicPr>
+          <p:cNvPr id="38" name="icon-362" descr="preencoded.png">    </p:cNvPr>
+          <p:cNvPicPr>
+            <a:picLocks noChangeAspect="1"/>
+          </p:cNvPicPr>
+          <p:nvPr/>
+        </p:nvPicPr>
+        <p:blipFill>
+          <a:blip r:embed="rId7"/>
+          <a:stretch>
+            <a:fillRect/>
+          </a:stretch>
+        </p:blipFill>
+        <p:spPr>
+          <a:xfrm>
+            <a:off x="8430768" y="5052060"/>
+            <a:ext cx="274320" cy="274320"/>
+          </a:xfrm>
+          <a:prstGeom prst="rect">
+            <a:avLst/>
+          </a:prstGeom>
+        </p:spPr>
+      </p:pic>
+      <p:sp>
+        <p:nvSpPr>
+          <p:cNvPr id="39" name="text-363"/>
+          <p:cNvSpPr txBox="1"/>
+          <p:nvPr/>
+        </p:nvSpPr>
+        <p:spPr>
+          <a:xfrm>
+            <a:off x="8979408" y="4846320"/>
+            <a:ext cx="2560320" cy="347472"/>
+          </a:xfrm>
+          <a:prstGeom prst="rect">
+            <a:avLst/>
+          </a:prstGeom>
+          <a:noFill/>
+          <a:ln/>
+        </p:spPr>
+        <p:txBody>
+          <a:bodyPr wrap="square" lIns="0" tIns="0" rIns="0" bIns="0" rtlCol="0" anchor="ctr"/>
+          <a:lstStyle/>
+          <a:p>
+            <a:pPr indent="0" marL="0">
+              <a:buNone/>
+            </a:pPr>
+            <a:r>
+              <a:rPr lang="en-US" sz="1500" b="1" dirty="0">
                 <a:solidFill>
                   <a:schemeClr val="tx1"/>
                 </a:solidFill>
-                <a:latin typeface="Menlo" pitchFamily="34" charset="0"/>
-                <a:ea typeface="Menlo" pitchFamily="34" charset="-122"/>
-                <a:cs typeface="Menlo" pitchFamily="34" charset="-120"/>
-              </a:rPr>
-              <a:t>bunx --bun playwright cli &lt;command&gt;</a:t>
-            </a:r>
-            <a:pPr indent="0" marL="0">
-              <a:buNone/>
-            </a:pPr>
-            <a:r>
-              <a:rPr lang="en-US" sz="1300" dirty="0">
+              </a:rPr>
+              <a:t>Installed by make setup</a:t>
+            </a:r>
+            <a:endParaRPr lang="en-US" sz="1500" dirty="0"/>
+          </a:p>
+        </p:txBody>
+      </p:sp>
+      <p:sp>
+        <p:nvSpPr>
+          <p:cNvPr id="40" name="text-364"/>
+          <p:cNvSpPr txBox="1"/>
+          <p:nvPr/>
+        </p:nvSpPr>
+        <p:spPr>
+          <a:xfrm>
+            <a:off x="8979408" y="5193792"/>
+            <a:ext cx="2560320" cy="320040"/>
+          </a:xfrm>
+          <a:prstGeom prst="rect">
+            <a:avLst/>
+          </a:prstGeom>
+          <a:noFill/>
+          <a:ln/>
+        </p:spPr>
+        <p:txBody>
+          <a:bodyPr wrap="square" lIns="0" tIns="0" rIns="0" bIns="0" rtlCol="0" anchor="t"/>
+          <a:lstStyle/>
+          <a:p>
+            <a:pPr indent="0" marL="0">
+              <a:buNone/>
+            </a:pPr>
+            <a:r>
+              <a:rPr lang="en-US" sz="1200" dirty="0">
                 <a:solidFill>
                   <a:schemeClr val="tx2"/>
                 </a:solidFill>
               </a:rPr>
-              <a:t> does the same. The Playwright MCP server is not used.</a:t>
-            </a:r>
-            <a:endParaRPr lang="en-US" sz="1300" dirty="0"/>
+              <a:t>as a skill, for every agent</a:t>
+            </a:r>
+            <a:endParaRPr lang="en-US" sz="1200" dirty="0"/>
           </a:p>
         </p:txBody>
       </p:sp>
@@ -7395,7 +7603,7 @@
       </p:sp>
       <p:sp>
         <p:nvSpPr>
-          <p:cNvPr id="3" name="card-352"/>
+          <p:cNvPr id="3" name="card-365"/>
           <p:cNvSpPr/>
           <p:nvPr/>
         </p:nvSpPr>
@@ -7429,7 +7637,7 @@
       </p:sp>
       <p:sp>
         <p:nvSpPr>
-          <p:cNvPr id="4" name="text-353"/>
+          <p:cNvPr id="4" name="text-366"/>
           <p:cNvSpPr txBox="1"/>
           <p:nvPr/>
         </p:nvSpPr>
@@ -7468,7 +7676,7 @@
       </p:sp>
       <p:sp>
         <p:nvSpPr>
-          <p:cNvPr id="5" name="text-354"/>
+          <p:cNvPr id="5" name="text-367"/>
           <p:cNvSpPr txBox="1"/>
           <p:nvPr/>
         </p:nvSpPr>
@@ -7762,7 +7970,7 @@
       </p:sp>
       <p:sp>
         <p:nvSpPr>
-          <p:cNvPr id="6" name="node-355"/>
+          <p:cNvPr id="6" name="node-368"/>
           <p:cNvSpPr/>
           <p:nvPr/>
         </p:nvSpPr>
@@ -7782,7 +7990,7 @@
       </p:sp>
       <p:sp>
         <p:nvSpPr>
-          <p:cNvPr id="7" name="text-356"/>
+          <p:cNvPr id="7" name="text-369"/>
           <p:cNvSpPr txBox="1"/>
           <p:nvPr/>
         </p:nvSpPr>
@@ -7818,7 +8026,7 @@
       </p:sp>
       <p:sp>
         <p:nvSpPr>
-          <p:cNvPr id="8" name="card-357"/>
+          <p:cNvPr id="8" name="card-370"/>
           <p:cNvSpPr/>
           <p:nvPr/>
         </p:nvSpPr>
@@ -7840,7 +8048,7 @@
       </p:sp>
       <p:sp>
         <p:nvSpPr>
-          <p:cNvPr id="9" name="text-358"/>
+          <p:cNvPr id="9" name="text-371"/>
           <p:cNvSpPr txBox="1"/>
           <p:nvPr/>
         </p:nvSpPr>
@@ -7879,7 +8087,7 @@
       </p:sp>
       <p:sp>
         <p:nvSpPr>
-          <p:cNvPr id="10" name="text-359"/>
+          <p:cNvPr id="10" name="text-372"/>
           <p:cNvSpPr txBox="1"/>
           <p:nvPr/>
         </p:nvSpPr>
@@ -7915,7 +8123,7 @@
       </p:sp>
       <p:sp>
         <p:nvSpPr>
-          <p:cNvPr id="11" name="node-360"/>
+          <p:cNvPr id="11" name="node-373"/>
           <p:cNvSpPr/>
           <p:nvPr/>
         </p:nvSpPr>
@@ -7935,7 +8143,7 @@
       </p:sp>
       <p:sp>
         <p:nvSpPr>
-          <p:cNvPr id="12" name="text-361"/>
+          <p:cNvPr id="12" name="text-374"/>
           <p:cNvSpPr txBox="1"/>
           <p:nvPr/>
         </p:nvSpPr>
@@ -7971,7 +8179,7 @@
       </p:sp>
       <p:sp>
         <p:nvSpPr>
-          <p:cNvPr id="13" name="card-362"/>
+          <p:cNvPr id="13" name="card-375"/>
           <p:cNvSpPr/>
           <p:nvPr/>
         </p:nvSpPr>
@@ -7993,7 +8201,7 @@
       </p:sp>
       <p:sp>
         <p:nvSpPr>
-          <p:cNvPr id="14" name="text-363"/>
+          <p:cNvPr id="14" name="text-376"/>
           <p:cNvSpPr txBox="1"/>
           <p:nvPr/>
         </p:nvSpPr>
@@ -8029,7 +8237,7 @@
       </p:sp>
       <p:sp>
         <p:nvSpPr>
-          <p:cNvPr id="15" name="text-364"/>
+          <p:cNvPr id="15" name="text-377"/>
           <p:cNvSpPr txBox="1"/>
           <p:nvPr/>
         </p:nvSpPr>
@@ -8065,7 +8273,7 @@
       </p:sp>
       <p:sp>
         <p:nvSpPr>
-          <p:cNvPr id="16" name="node-365"/>
+          <p:cNvPr id="16" name="node-378"/>
           <p:cNvSpPr/>
           <p:nvPr/>
         </p:nvSpPr>
@@ -8085,7 +8293,7 @@
       </p:sp>
       <p:sp>
         <p:nvSpPr>
-          <p:cNvPr id="17" name="text-366"/>
+          <p:cNvPr id="17" name="text-379"/>
           <p:cNvSpPr txBox="1"/>
           <p:nvPr/>
         </p:nvSpPr>
@@ -8121,7 +8329,7 @@
       </p:sp>
       <p:sp>
         <p:nvSpPr>
-          <p:cNvPr id="18" name="card-367"/>
+          <p:cNvPr id="18" name="card-380"/>
           <p:cNvSpPr/>
           <p:nvPr/>
         </p:nvSpPr>
@@ -8143,7 +8351,7 @@
       </p:sp>
       <p:sp>
         <p:nvSpPr>
-          <p:cNvPr id="19" name="text-368"/>
+          <p:cNvPr id="19" name="text-381"/>
           <p:cNvSpPr txBox="1"/>
           <p:nvPr/>
         </p:nvSpPr>
@@ -8182,7 +8390,7 @@
       </p:sp>
       <p:sp>
         <p:nvSpPr>
-          <p:cNvPr id="20" name="text-369"/>
+          <p:cNvPr id="20" name="text-382"/>
           <p:cNvSpPr txBox="1"/>
           <p:nvPr/>
         </p:nvSpPr>
@@ -8218,7 +8426,7 @@
       </p:sp>
       <p:sp>
         <p:nvSpPr>
-          <p:cNvPr id="21" name="node-370"/>
+          <p:cNvPr id="21" name="node-383"/>
           <p:cNvSpPr/>
           <p:nvPr/>
         </p:nvSpPr>
@@ -8238,7 +8446,7 @@
       </p:sp>
       <p:sp>
         <p:nvSpPr>
-          <p:cNvPr id="22" name="text-371"/>
+          <p:cNvPr id="22" name="text-384"/>
           <p:cNvSpPr txBox="1"/>
           <p:nvPr/>
         </p:nvSpPr>
@@ -8274,7 +8482,7 @@
       </p:sp>
       <p:sp>
         <p:nvSpPr>
-          <p:cNvPr id="23" name="card-372"/>
+          <p:cNvPr id="23" name="card-385"/>
           <p:cNvSpPr/>
           <p:nvPr/>
         </p:nvSpPr>
@@ -8296,7 +8504,7 @@
       </p:sp>
       <p:sp>
         <p:nvSpPr>
-          <p:cNvPr id="24" name="text-373"/>
+          <p:cNvPr id="24" name="text-386"/>
           <p:cNvSpPr txBox="1"/>
           <p:nvPr/>
         </p:nvSpPr>
@@ -8335,7 +8543,7 @@
       </p:sp>
       <p:sp>
         <p:nvSpPr>
-          <p:cNvPr id="25" name="text-374"/>
+          <p:cNvPr id="25" name="text-387"/>
           <p:cNvSpPr txBox="1"/>
           <p:nvPr/>
         </p:nvSpPr>
@@ -8371,7 +8579,7 @@
       </p:sp>
       <p:sp>
         <p:nvSpPr>
-          <p:cNvPr id="26" name="node-375"/>
+          <p:cNvPr id="26" name="node-388"/>
           <p:cNvSpPr/>
           <p:nvPr/>
         </p:nvSpPr>
@@ -8391,7 +8599,7 @@
       </p:sp>
       <p:sp>
         <p:nvSpPr>
-          <p:cNvPr id="27" name="text-376"/>
+          <p:cNvPr id="27" name="text-389"/>
           <p:cNvSpPr txBox="1"/>
           <p:nvPr/>
         </p:nvSpPr>
@@ -8427,7 +8635,7 @@
       </p:sp>
       <p:sp>
         <p:nvSpPr>
-          <p:cNvPr id="28" name="card-377"/>
+          <p:cNvPr id="28" name="card-390"/>
           <p:cNvSpPr/>
           <p:nvPr/>
         </p:nvSpPr>
@@ -8449,7 +8657,7 @@
       </p:sp>
       <p:sp>
         <p:nvSpPr>
-          <p:cNvPr id="29" name="text-378"/>
+          <p:cNvPr id="29" name="text-391"/>
           <p:cNvSpPr txBox="1"/>
           <p:nvPr/>
         </p:nvSpPr>
@@ -8488,7 +8696,7 @@
       </p:sp>
       <p:sp>
         <p:nvSpPr>
-          <p:cNvPr id="30" name="text-379"/>
+          <p:cNvPr id="30" name="text-392"/>
           <p:cNvSpPr txBox="1"/>
           <p:nvPr/>
         </p:nvSpPr>
@@ -8524,7 +8732,7 @@
       </p:sp>
       <p:sp>
         <p:nvSpPr>
-          <p:cNvPr id="31" name="node-380"/>
+          <p:cNvPr id="31" name="node-393"/>
           <p:cNvSpPr/>
           <p:nvPr/>
         </p:nvSpPr>
@@ -8544,7 +8752,7 @@
       </p:sp>
       <p:sp>
         <p:nvSpPr>
-          <p:cNvPr id="32" name="text-381"/>
+          <p:cNvPr id="32" name="text-394"/>
           <p:cNvSpPr txBox="1"/>
           <p:nvPr/>
         </p:nvSpPr>
@@ -8580,7 +8788,7 @@
       </p:sp>
       <p:sp>
         <p:nvSpPr>
-          <p:cNvPr id="33" name="card-382"/>
+          <p:cNvPr id="33" name="card-395"/>
           <p:cNvSpPr/>
           <p:nvPr/>
         </p:nvSpPr>
@@ -8602,7 +8810,7 @@
       </p:sp>
       <p:sp>
         <p:nvSpPr>
-          <p:cNvPr id="34" name="text-383"/>
+          <p:cNvPr id="34" name="text-396"/>
           <p:cNvSpPr txBox="1"/>
           <p:nvPr/>
         </p:nvSpPr>
@@ -8641,7 +8849,7 @@
       </p:sp>
       <p:sp>
         <p:nvSpPr>
-          <p:cNvPr id="35" name="text-384"/>
+          <p:cNvPr id="35" name="text-397"/>
           <p:cNvSpPr txBox="1"/>
           <p:nvPr/>
         </p:nvSpPr>
@@ -8785,7 +8993,7 @@
       </p:sp>
       <p:sp>
         <p:nvSpPr>
-          <p:cNvPr id="3" name="text-385"/>
+          <p:cNvPr id="3" name="text-398"/>
           <p:cNvSpPr txBox="1"/>
           <p:nvPr/>
         </p:nvSpPr>
@@ -8824,7 +9032,7 @@
       </p:sp>
       <p:sp>
         <p:nvSpPr>
-          <p:cNvPr id="4" name="card-386"/>
+          <p:cNvPr id="4" name="card-399"/>
           <p:cNvSpPr/>
           <p:nvPr/>
         </p:nvSpPr>
@@ -8846,7 +9054,7 @@
       </p:sp>
       <p:sp>
         <p:nvSpPr>
-          <p:cNvPr id="5" name="node-387"/>
+          <p:cNvPr id="5" name="node-400"/>
           <p:cNvSpPr/>
           <p:nvPr/>
         </p:nvSpPr>
@@ -8866,7 +9074,7 @@
       </p:sp>
       <p:pic>
         <p:nvPicPr>
-          <p:cNvPr id="6" name="icon-388" descr="preencoded.png">    </p:cNvPr>
+          <p:cNvPr id="6" name="icon-401" descr="preencoded.png">    </p:cNvPr>
           <p:cNvPicPr>
             <a:picLocks noChangeAspect="1"/>
           </p:cNvPicPr>
@@ -8890,7 +9098,7 @@
       </p:pic>
       <p:sp>
         <p:nvSpPr>
-          <p:cNvPr id="7" name="text-389"/>
+          <p:cNvPr id="7" name="text-402"/>
           <p:cNvSpPr txBox="1"/>
           <p:nvPr/>
         </p:nvSpPr>
@@ -8929,7 +9137,7 @@
       </p:sp>
       <p:sp>
         <p:nvSpPr>
-          <p:cNvPr id="8" name="text-390"/>
+          <p:cNvPr id="8" name="text-403"/>
           <p:cNvSpPr txBox="1"/>
           <p:nvPr/>
         </p:nvSpPr>
@@ -8979,7 +9187,7 @@
       </p:sp>
       <p:sp>
         <p:nvSpPr>
-          <p:cNvPr id="9" name="card-391"/>
+          <p:cNvPr id="9" name="card-404"/>
           <p:cNvSpPr/>
           <p:nvPr/>
         </p:nvSpPr>
@@ -9001,7 +9209,7 @@
       </p:sp>
       <p:sp>
         <p:nvSpPr>
-          <p:cNvPr id="10" name="node-392"/>
+          <p:cNvPr id="10" name="node-405"/>
           <p:cNvSpPr/>
           <p:nvPr/>
         </p:nvSpPr>
@@ -9021,7 +9229,7 @@
       </p:sp>
       <p:pic>
         <p:nvPicPr>
-          <p:cNvPr id="11" name="icon-393" descr="preencoded.png">    </p:cNvPr>
+          <p:cNvPr id="11" name="icon-406" descr="preencoded.png">    </p:cNvPr>
           <p:cNvPicPr>
             <a:picLocks noChangeAspect="1"/>
           </p:cNvPicPr>
@@ -9045,7 +9253,7 @@
       </p:pic>
       <p:sp>
         <p:nvSpPr>
-          <p:cNvPr id="12" name="text-394"/>
+          <p:cNvPr id="12" name="text-407"/>
           <p:cNvSpPr txBox="1"/>
           <p:nvPr/>
         </p:nvSpPr>
@@ -9084,7 +9292,7 @@
       </p:sp>
       <p:sp>
         <p:nvSpPr>
-          <p:cNvPr id="13" name="text-395"/>
+          <p:cNvPr id="13" name="text-408"/>
           <p:cNvSpPr txBox="1"/>
           <p:nvPr/>
         </p:nvSpPr>
@@ -9120,7 +9328,7 @@
       </p:sp>
       <p:sp>
         <p:nvSpPr>
-          <p:cNvPr id="14" name="text-396"/>
+          <p:cNvPr id="14" name="text-409"/>
           <p:cNvSpPr txBox="1"/>
           <p:nvPr/>
         </p:nvSpPr>
@@ -10120,12 +10328,12 @@
         </p:nvSpPr>
         <p:spPr>
           <a:xfrm>
-            <a:off x="548640" y="1463040"/>
-            <a:ext cx="2633472" cy="3840480"/>
+            <a:off x="548640" y="1600200"/>
+            <a:ext cx="3545129" cy="3840480"/>
           </a:xfrm>
           <a:prstGeom prst="roundRect">
             <a:avLst>
-              <a:gd name="adj" fmla="val 3472"/>
+              <a:gd name="adj" fmla="val 2579"/>
             </a:avLst>
           </a:prstGeom>
           <a:solidFill>
@@ -10142,7 +10350,7 @@
         </p:nvSpPr>
         <p:spPr>
           <a:xfrm>
-            <a:off x="822960" y="1737360"/>
+            <a:off x="914400" y="1892808"/>
             <a:ext cx="694944" cy="694944"/>
           </a:xfrm>
           <a:prstGeom prst="ellipse">
@@ -10170,7 +10378,7 @@
         </p:blipFill>
         <p:spPr>
           <a:xfrm>
-            <a:off x="996696" y="1911096"/>
+            <a:off x="1088136" y="2066544"/>
             <a:ext cx="347472" cy="347472"/>
           </a:xfrm>
           <a:prstGeom prst="rect">
@@ -10186,8 +10394,8 @@
         </p:nvSpPr>
         <p:spPr>
           <a:xfrm>
-            <a:off x="822960" y="2697480"/>
-            <a:ext cx="2194560" cy="1097280"/>
+            <a:off x="914400" y="2834640"/>
+            <a:ext cx="2813609" cy="1097280"/>
           </a:xfrm>
           <a:prstGeom prst="rect">
             <a:avLst/>
@@ -10225,8 +10433,8 @@
         </p:nvSpPr>
         <p:spPr>
           <a:xfrm>
-            <a:off x="822960" y="3840480"/>
-            <a:ext cx="2194560" cy="365760"/>
+            <a:off x="914400" y="3977640"/>
+            <a:ext cx="2813609" cy="365760"/>
           </a:xfrm>
           <a:prstGeom prst="rect">
             <a:avLst/>
@@ -10261,8 +10469,8 @@
         </p:nvSpPr>
         <p:spPr>
           <a:xfrm>
-            <a:off x="822960" y="4297680"/>
-            <a:ext cx="2148840" cy="731520"/>
+            <a:off x="914400" y="4434840"/>
+            <a:ext cx="2813609" cy="731520"/>
           </a:xfrm>
           <a:prstGeom prst="rect">
             <a:avLst/>
@@ -10278,28 +10486,28 @@
               <a:buNone/>
             </a:pPr>
             <a:r>
-              <a:rPr lang="en-US" sz="1300" dirty="0">
+              <a:rPr lang="en-US" sz="1400" dirty="0">
                 <a:solidFill>
                   <a:schemeClr val="tx2"/>
                 </a:solidFill>
               </a:rPr>
               <a:t>52 data · 18 workflows</a:t>
             </a:r>
-            <a:endParaRPr lang="en-US" sz="1300" dirty="0"/>
-          </a:p>
-          <a:p>
-            <a:pPr indent="0" marL="0">
-              <a:buNone/>
-            </a:pPr>
-            <a:r>
-              <a:rPr lang="en-US" sz="1300" dirty="0">
+            <a:endParaRPr lang="en-US" sz="1400" dirty="0"/>
+          </a:p>
+          <a:p>
+            <a:pPr indent="0" marL="0">
+              <a:buNone/>
+            </a:pPr>
+            <a:r>
+              <a:rPr lang="en-US" sz="1400" dirty="0">
                 <a:solidFill>
                   <a:schemeClr val="tx2"/>
                 </a:solidFill>
               </a:rPr>
               <a:t>10 website · 4 virtual labs</a:t>
             </a:r>
-            <a:endParaRPr lang="en-US" sz="1300" dirty="0"/>
+            <a:endParaRPr lang="en-US" sz="1400" dirty="0"/>
           </a:p>
         </p:txBody>
       </p:sp>
@@ -10311,12 +10519,12 @@
         </p:nvSpPr>
         <p:spPr>
           <a:xfrm>
-            <a:off x="3364992" y="1463040"/>
-            <a:ext cx="2633472" cy="3840480"/>
+            <a:off x="4322369" y="1600200"/>
+            <a:ext cx="3545129" cy="3840480"/>
           </a:xfrm>
           <a:prstGeom prst="roundRect">
             <a:avLst>
-              <a:gd name="adj" fmla="val 3472"/>
+              <a:gd name="adj" fmla="val 2579"/>
             </a:avLst>
           </a:prstGeom>
           <a:solidFill>
@@ -10333,7 +10541,7 @@
         </p:nvSpPr>
         <p:spPr>
           <a:xfrm>
-            <a:off x="3639312" y="1737360"/>
+            <a:off x="4688129" y="1892808"/>
             <a:ext cx="694944" cy="694944"/>
           </a:xfrm>
           <a:prstGeom prst="ellipse">
@@ -10361,7 +10569,7 @@
         </p:blipFill>
         <p:spPr>
           <a:xfrm>
-            <a:off x="3813048" y="1911096"/>
+            <a:off x="4861865" y="2066544"/>
             <a:ext cx="347472" cy="347472"/>
           </a:xfrm>
           <a:prstGeom prst="rect">
@@ -10377,8 +10585,8 @@
         </p:nvSpPr>
         <p:spPr>
           <a:xfrm>
-            <a:off x="3639312" y="2697480"/>
-            <a:ext cx="2194560" cy="1097280"/>
+            <a:off x="4688129" y="2834640"/>
+            <a:ext cx="2813609" cy="1097280"/>
           </a:xfrm>
           <a:prstGeom prst="rect">
             <a:avLst/>
@@ -10416,8 +10624,8 @@
         </p:nvSpPr>
         <p:spPr>
           <a:xfrm>
-            <a:off x="3639312" y="3840480"/>
-            <a:ext cx="2194560" cy="365760"/>
+            <a:off x="4688129" y="3977640"/>
+            <a:ext cx="2813609" cy="365760"/>
           </a:xfrm>
           <a:prstGeom prst="rect">
             <a:avLst/>
@@ -10452,8 +10660,8 @@
         </p:nvSpPr>
         <p:spPr>
           <a:xfrm>
-            <a:off x="3639312" y="4297680"/>
-            <a:ext cx="2148840" cy="731520"/>
+            <a:off x="4688129" y="4434840"/>
+            <a:ext cx="2813609" cy="731520"/>
           </a:xfrm>
           <a:prstGeom prst="rect">
             <a:avLst/>
@@ -10469,14 +10677,28 @@
               <a:buNone/>
             </a:pPr>
             <a:r>
-              <a:rPr lang="en-US" sz="1300" dirty="0">
+              <a:rPr lang="en-US" sz="1400" dirty="0">
                 <a:solidFill>
                   <a:schemeClr val="tx2"/>
                 </a:solidFill>
               </a:rPr>
-              <a:t>written in plain English, one per ## heading</a:t>
-            </a:r>
-            <a:endParaRPr lang="en-US" sz="1300" dirty="0"/>
+              <a:t>written in plain English,</a:t>
+            </a:r>
+            <a:endParaRPr lang="en-US" sz="1400" dirty="0"/>
+          </a:p>
+          <a:p>
+            <a:pPr indent="0" marL="0">
+              <a:buNone/>
+            </a:pPr>
+            <a:r>
+              <a:rPr lang="en-US" sz="1400" dirty="0">
+                <a:solidFill>
+                  <a:schemeClr val="tx2"/>
+                </a:solidFill>
+              </a:rPr>
+              <a:t>one per ## heading</a:t>
+            </a:r>
+            <a:endParaRPr lang="en-US" sz="1400" dirty="0"/>
           </a:p>
         </p:txBody>
       </p:sp>
@@ -10488,12 +10710,12 @@
         </p:nvSpPr>
         <p:spPr>
           <a:xfrm>
-            <a:off x="6181344" y="1463040"/>
-            <a:ext cx="2633472" cy="3840480"/>
+            <a:off x="8096098" y="1600200"/>
+            <a:ext cx="3545129" cy="3840480"/>
           </a:xfrm>
           <a:prstGeom prst="roundRect">
             <a:avLst>
-              <a:gd name="adj" fmla="val 3472"/>
+              <a:gd name="adj" fmla="val 2579"/>
             </a:avLst>
           </a:prstGeom>
           <a:solidFill>
@@ -10510,7 +10732,7 @@
         </p:nvSpPr>
         <p:spPr>
           <a:xfrm>
-            <a:off x="6455664" y="1737360"/>
+            <a:off x="8461858" y="1892808"/>
             <a:ext cx="694944" cy="694944"/>
           </a:xfrm>
           <a:prstGeom prst="ellipse">
@@ -10538,7 +10760,7 @@
         </p:blipFill>
         <p:spPr>
           <a:xfrm>
-            <a:off x="6629400" y="1911096"/>
+            <a:off x="8635594" y="2066544"/>
             <a:ext cx="347472" cy="347472"/>
           </a:xfrm>
           <a:prstGeom prst="rect">
@@ -10554,8 +10776,8 @@
         </p:nvSpPr>
         <p:spPr>
           <a:xfrm>
-            <a:off x="6455664" y="2697480"/>
-            <a:ext cx="2194560" cy="1097280"/>
+            <a:off x="8461858" y="2834640"/>
+            <a:ext cx="2813609" cy="1097280"/>
           </a:xfrm>
           <a:prstGeom prst="rect">
             <a:avLst/>
@@ -10593,8 +10815,8 @@
         </p:nvSpPr>
         <p:spPr>
           <a:xfrm>
-            <a:off x="6455664" y="3840480"/>
-            <a:ext cx="2194560" cy="365760"/>
+            <a:off x="8461858" y="3977640"/>
+            <a:ext cx="2813609" cy="365760"/>
           </a:xfrm>
           <a:prstGeom prst="rect">
             <a:avLst/>
@@ -10629,8 +10851,8 @@
         </p:nvSpPr>
         <p:spPr>
           <a:xfrm>
-            <a:off x="6455664" y="4297680"/>
-            <a:ext cx="2148840" cy="731520"/>
+            <a:off x="8461858" y="4434840"/>
+            <a:ext cx="2813609" cy="731520"/>
           </a:xfrm>
           <a:prstGeom prst="rect">
             <a:avLst/>
@@ -10646,205 +10868,28 @@
               <a:buNone/>
             </a:pPr>
             <a:r>
-              <a:rPr lang="en-US" sz="1300" dirty="0">
+              <a:rPr lang="en-US" sz="1400" dirty="0">
                 <a:solidFill>
                   <a:schemeClr val="tx2"/>
                 </a:solidFill>
               </a:rPr>
-              <a:t>a case can run once per seed configuration</a:t>
-            </a:r>
-            <a:endParaRPr lang="en-US" sz="1300" dirty="0"/>
-          </a:p>
-        </p:txBody>
-      </p:sp>
-      <p:sp>
-        <p:nvSpPr>
-          <p:cNvPr id="21" name="card-48"/>
-          <p:cNvSpPr/>
-          <p:nvPr/>
-        </p:nvSpPr>
-        <p:spPr>
-          <a:xfrm>
-            <a:off x="8997696" y="1463040"/>
-            <a:ext cx="2633472" cy="3840480"/>
-          </a:xfrm>
-          <a:prstGeom prst="roundRect">
-            <a:avLst>
-              <a:gd name="adj" fmla="val 3472"/>
-            </a:avLst>
-          </a:prstGeom>
-          <a:solidFill>
-            <a:schemeClr val="bg2"/>
-          </a:solidFill>
-          <a:ln/>
-        </p:spPr>
-      </p:sp>
-      <p:sp>
-        <p:nvSpPr>
-          <p:cNvPr id="22" name="node-49"/>
-          <p:cNvSpPr/>
-          <p:nvPr/>
-        </p:nvSpPr>
-        <p:spPr>
-          <a:xfrm>
-            <a:off x="9272016" y="1737360"/>
-            <a:ext cx="694944" cy="694944"/>
-          </a:xfrm>
-          <a:prstGeom prst="ellipse">
-            <a:avLst/>
-          </a:prstGeom>
-          <a:solidFill>
-            <a:schemeClr val="accent3"/>
-          </a:solidFill>
-          <a:ln/>
-        </p:spPr>
-      </p:sp>
-      <p:pic>
-        <p:nvPicPr>
-          <p:cNvPr id="23" name="icon-50" descr="preencoded.png">    </p:cNvPr>
-          <p:cNvPicPr>
-            <a:picLocks noChangeAspect="1"/>
-          </p:cNvPicPr>
-          <p:nvPr/>
-        </p:nvPicPr>
-        <p:blipFill>
-          <a:blip r:embed="rId4"/>
-          <a:stretch>
-            <a:fillRect/>
-          </a:stretch>
-        </p:blipFill>
-        <p:spPr>
-          <a:xfrm>
-            <a:off x="9445752" y="1911096"/>
-            <a:ext cx="347472" cy="347472"/>
-          </a:xfrm>
-          <a:prstGeom prst="rect">
-            <a:avLst/>
-          </a:prstGeom>
-        </p:spPr>
-      </p:pic>
-      <p:sp>
-        <p:nvSpPr>
-          <p:cNvPr id="24" name="text-51"/>
-          <p:cNvSpPr txBox="1"/>
-          <p:nvPr/>
-        </p:nvSpPr>
-        <p:spPr>
-          <a:xfrm>
-            <a:off x="9272016" y="2697480"/>
-            <a:ext cx="2194560" cy="1097280"/>
-          </a:xfrm>
-          <a:prstGeom prst="rect">
-            <a:avLst/>
-          </a:prstGeom>
-          <a:noFill/>
-          <a:ln/>
-        </p:spPr>
-        <p:txBody>
-          <a:bodyPr wrap="square" lIns="0" tIns="0" rIns="0" bIns="0" rtlCol="0" anchor="ctr"/>
-          <a:lstStyle/>
-          <a:p>
-            <a:pPr indent="0" marL="0">
-              <a:buNone/>
-            </a:pPr>
-            <a:r>
-              <a:rPr lang="en-US" sz="7200" b="1" dirty="0">
-                <a:solidFill>
-                  <a:schemeClr val="accent3"/>
-                </a:solidFill>
-                <a:latin typeface="+mj-lt" pitchFamily="34" charset="0"/>
-                <a:ea typeface="+mj-lt" pitchFamily="34" charset="-122"/>
-                <a:cs typeface="+mj-lt" pitchFamily="34" charset="-120"/>
-              </a:rPr>
-              <a:t>~290</a:t>
-            </a:r>
-            <a:endParaRPr lang="en-US" sz="7200" dirty="0"/>
-          </a:p>
-        </p:txBody>
-      </p:sp>
-      <p:sp>
-        <p:nvSpPr>
-          <p:cNvPr id="25" name="text-52"/>
-          <p:cNvSpPr txBox="1"/>
-          <p:nvPr/>
-        </p:nvSpPr>
-        <p:spPr>
-          <a:xfrm>
-            <a:off x="9272016" y="3840480"/>
-            <a:ext cx="2194560" cy="365760"/>
-          </a:xfrm>
-          <a:prstGeom prst="rect">
-            <a:avLst/>
-          </a:prstGeom>
-          <a:noFill/>
-          <a:ln/>
-        </p:spPr>
-        <p:txBody>
-          <a:bodyPr wrap="square" lIns="0" tIns="0" rIns="0" bIns="0" rtlCol="0" anchor="ctr"/>
-          <a:lstStyle/>
-          <a:p>
-            <a:pPr indent="0" marL="0">
-              <a:buNone/>
-            </a:pPr>
-            <a:r>
-              <a:rPr lang="en-US" sz="1800" b="1" dirty="0">
-                <a:solidFill>
-                  <a:schemeClr val="tx1"/>
-                </a:solidFill>
-              </a:rPr>
-              <a:t>pass every night</a:t>
-            </a:r>
-            <a:endParaRPr lang="en-US" sz="1800" dirty="0"/>
-          </a:p>
-        </p:txBody>
-      </p:sp>
-      <p:sp>
-        <p:nvSpPr>
-          <p:cNvPr id="26" name="text-53"/>
-          <p:cNvSpPr txBox="1"/>
-          <p:nvPr/>
-        </p:nvSpPr>
-        <p:spPr>
-          <a:xfrm>
-            <a:off x="9272016" y="4297680"/>
-            <a:ext cx="2148840" cy="731520"/>
-          </a:xfrm>
-          <a:prstGeom prst="rect">
-            <a:avLst/>
-          </a:prstGeom>
-          <a:noFill/>
-          <a:ln/>
-        </p:spPr>
-        <p:txBody>
-          <a:bodyPr wrap="square" lIns="0" tIns="0" rIns="0" bIns="0" rtlCol="0" anchor="t"/>
-          <a:lstStyle/>
-          <a:p>
-            <a:pPr indent="0" marL="0">
-              <a:buNone/>
-            </a:pPr>
-            <a:r>
-              <a:rPr lang="en-US" sz="1300" dirty="0">
+              <a:t>a case can run once</a:t>
+            </a:r>
+            <a:endParaRPr lang="en-US" sz="1400" dirty="0"/>
+          </a:p>
+          <a:p>
+            <a:pPr indent="0" marL="0">
+              <a:buNone/>
+            </a:pPr>
+            <a:r>
+              <a:rPr lang="en-US" sz="1400" dirty="0">
                 <a:solidFill>
                   <a:schemeClr val="tx2"/>
                 </a:solidFill>
               </a:rPr>
-              <a:t>on staging</a:t>
-            </a:r>
-            <a:endParaRPr lang="en-US" sz="1300" dirty="0"/>
-          </a:p>
-          <a:p>
-            <a:pPr indent="0" marL="0">
-              <a:buNone/>
-            </a:pPr>
-            <a:r>
-              <a:rPr lang="en-US" sz="1300" dirty="0">
-                <a:solidFill>
-                  <a:schemeClr val="tx2"/>
-                </a:solidFill>
-              </a:rPr>
-              <a:t>17 Sep – 8 Oct 2026</a:t>
-            </a:r>
-            <a:endParaRPr lang="en-US" sz="1300" dirty="0"/>
+              <a:t>per seed configuration</a:t>
+            </a:r>
+            <a:endParaRPr lang="en-US" sz="1400" dirty="0"/>
           </a:p>
         </p:txBody>
       </p:sp>
@@ -10958,7 +11003,7 @@
       </p:sp>
       <p:sp>
         <p:nvSpPr>
-          <p:cNvPr id="3" name="text-54"/>
+          <p:cNvPr id="3" name="text-48"/>
           <p:cNvSpPr txBox="1"/>
           <p:nvPr/>
         </p:nvSpPr>
@@ -11019,7 +11064,7 @@
       </p:sp>
       <p:sp>
         <p:nvSpPr>
-          <p:cNvPr id="4" name="card-55"/>
+          <p:cNvPr id="4" name="card-49"/>
           <p:cNvSpPr/>
           <p:nvPr/>
         </p:nvSpPr>
@@ -11041,7 +11086,7 @@
       </p:sp>
       <p:sp>
         <p:nvSpPr>
-          <p:cNvPr id="5" name="node-56"/>
+          <p:cNvPr id="5" name="node-50"/>
           <p:cNvSpPr/>
           <p:nvPr/>
         </p:nvSpPr>
@@ -11061,7 +11106,7 @@
       </p:sp>
       <p:pic>
         <p:nvPicPr>
-          <p:cNvPr id="6" name="icon-57" descr="preencoded.png">    </p:cNvPr>
+          <p:cNvPr id="6" name="icon-51" descr="preencoded.png">    </p:cNvPr>
           <p:cNvPicPr>
             <a:picLocks noChangeAspect="1"/>
           </p:cNvPicPr>
@@ -11085,7 +11130,7 @@
       </p:pic>
       <p:sp>
         <p:nvSpPr>
-          <p:cNvPr id="7" name="text-58"/>
+          <p:cNvPr id="7" name="text-52"/>
           <p:cNvSpPr txBox="1"/>
           <p:nvPr/>
         </p:nvSpPr>
@@ -11124,7 +11169,7 @@
       </p:sp>
       <p:sp>
         <p:nvSpPr>
-          <p:cNvPr id="8" name="text-59"/>
+          <p:cNvPr id="8" name="text-53"/>
           <p:cNvSpPr txBox="1"/>
           <p:nvPr/>
         </p:nvSpPr>
@@ -11160,7 +11205,7 @@
       </p:sp>
       <p:sp>
         <p:nvSpPr>
-          <p:cNvPr id="9" name="text-60"/>
+          <p:cNvPr id="9" name="text-54"/>
           <p:cNvSpPr txBox="1"/>
           <p:nvPr/>
         </p:nvSpPr>
@@ -11199,7 +11244,7 @@
       </p:sp>
       <p:sp>
         <p:nvSpPr>
-          <p:cNvPr id="10" name="text-61"/>
+          <p:cNvPr id="10" name="text-55"/>
           <p:cNvSpPr txBox="1"/>
           <p:nvPr/>
         </p:nvSpPr>
@@ -11238,7 +11283,7 @@
       </p:sp>
       <p:sp>
         <p:nvSpPr>
-          <p:cNvPr id="11" name="text-62"/>
+          <p:cNvPr id="11" name="text-56"/>
           <p:cNvSpPr txBox="1"/>
           <p:nvPr/>
         </p:nvSpPr>
@@ -11274,7 +11319,7 @@
       </p:sp>
       <p:sp>
         <p:nvSpPr>
-          <p:cNvPr id="12" name="card-63"/>
+          <p:cNvPr id="12" name="card-57"/>
           <p:cNvSpPr/>
           <p:nvPr/>
         </p:nvSpPr>
@@ -11296,7 +11341,7 @@
       </p:sp>
       <p:sp>
         <p:nvSpPr>
-          <p:cNvPr id="13" name="node-64"/>
+          <p:cNvPr id="13" name="node-58"/>
           <p:cNvSpPr/>
           <p:nvPr/>
         </p:nvSpPr>
@@ -11316,7 +11361,7 @@
       </p:sp>
       <p:pic>
         <p:nvPicPr>
-          <p:cNvPr id="14" name="icon-65" descr="preencoded.png">    </p:cNvPr>
+          <p:cNvPr id="14" name="icon-59" descr="preencoded.png">    </p:cNvPr>
           <p:cNvPicPr>
             <a:picLocks noChangeAspect="1"/>
           </p:cNvPicPr>
@@ -11340,7 +11385,7 @@
       </p:pic>
       <p:sp>
         <p:nvSpPr>
-          <p:cNvPr id="15" name="text-66"/>
+          <p:cNvPr id="15" name="text-60"/>
           <p:cNvSpPr txBox="1"/>
           <p:nvPr/>
         </p:nvSpPr>
@@ -11379,7 +11424,7 @@
       </p:sp>
       <p:sp>
         <p:nvSpPr>
-          <p:cNvPr id="16" name="text-67"/>
+          <p:cNvPr id="16" name="text-61"/>
           <p:cNvSpPr txBox="1"/>
           <p:nvPr/>
         </p:nvSpPr>
@@ -11415,7 +11460,7 @@
       </p:sp>
       <p:sp>
         <p:nvSpPr>
-          <p:cNvPr id="17" name="text-68"/>
+          <p:cNvPr id="17" name="text-62"/>
           <p:cNvSpPr txBox="1"/>
           <p:nvPr/>
         </p:nvSpPr>
@@ -11454,7 +11499,7 @@
       </p:sp>
       <p:sp>
         <p:nvSpPr>
-          <p:cNvPr id="18" name="text-69"/>
+          <p:cNvPr id="18" name="text-63"/>
           <p:cNvSpPr txBox="1"/>
           <p:nvPr/>
         </p:nvSpPr>
@@ -11493,7 +11538,7 @@
       </p:sp>
       <p:sp>
         <p:nvSpPr>
-          <p:cNvPr id="19" name="text-70"/>
+          <p:cNvPr id="19" name="text-64"/>
           <p:cNvSpPr txBox="1"/>
           <p:nvPr/>
         </p:nvSpPr>
@@ -11529,7 +11574,7 @@
       </p:sp>
       <p:sp>
         <p:nvSpPr>
-          <p:cNvPr id="20" name="card-71"/>
+          <p:cNvPr id="20" name="card-65"/>
           <p:cNvSpPr/>
           <p:nvPr/>
         </p:nvSpPr>
@@ -11551,7 +11596,7 @@
       </p:sp>
       <p:sp>
         <p:nvSpPr>
-          <p:cNvPr id="21" name="node-72"/>
+          <p:cNvPr id="21" name="node-66"/>
           <p:cNvSpPr/>
           <p:nvPr/>
         </p:nvSpPr>
@@ -11571,7 +11616,7 @@
       </p:sp>
       <p:pic>
         <p:nvPicPr>
-          <p:cNvPr id="22" name="icon-73" descr="preencoded.png">    </p:cNvPr>
+          <p:cNvPr id="22" name="icon-67" descr="preencoded.png">    </p:cNvPr>
           <p:cNvPicPr>
             <a:picLocks noChangeAspect="1"/>
           </p:cNvPicPr>
@@ -11595,7 +11640,7 @@
       </p:pic>
       <p:sp>
         <p:nvSpPr>
-          <p:cNvPr id="23" name="text-74"/>
+          <p:cNvPr id="23" name="text-68"/>
           <p:cNvSpPr txBox="1"/>
           <p:nvPr/>
         </p:nvSpPr>
@@ -11634,7 +11679,7 @@
       </p:sp>
       <p:sp>
         <p:nvSpPr>
-          <p:cNvPr id="24" name="text-75"/>
+          <p:cNvPr id="24" name="text-69"/>
           <p:cNvSpPr txBox="1"/>
           <p:nvPr/>
         </p:nvSpPr>
@@ -11670,7 +11715,7 @@
       </p:sp>
       <p:sp>
         <p:nvSpPr>
-          <p:cNvPr id="25" name="text-76"/>
+          <p:cNvPr id="25" name="text-70"/>
           <p:cNvSpPr txBox="1"/>
           <p:nvPr/>
         </p:nvSpPr>
@@ -11709,7 +11754,7 @@
       </p:sp>
       <p:sp>
         <p:nvSpPr>
-          <p:cNvPr id="26" name="text-77"/>
+          <p:cNvPr id="26" name="text-71"/>
           <p:cNvSpPr txBox="1"/>
           <p:nvPr/>
         </p:nvSpPr>
@@ -11748,7 +11793,7 @@
       </p:sp>
       <p:sp>
         <p:nvSpPr>
-          <p:cNvPr id="27" name="text-78"/>
+          <p:cNvPr id="27" name="text-72"/>
           <p:cNvSpPr txBox="1"/>
           <p:nvPr/>
         </p:nvSpPr>
@@ -11784,7 +11829,7 @@
       </p:sp>
       <p:sp>
         <p:nvSpPr>
-          <p:cNvPr id="28" name="card-79"/>
+          <p:cNvPr id="28" name="card-73"/>
           <p:cNvSpPr/>
           <p:nvPr/>
         </p:nvSpPr>
@@ -11806,7 +11851,7 @@
       </p:sp>
       <p:sp>
         <p:nvSpPr>
-          <p:cNvPr id="29" name="node-80"/>
+          <p:cNvPr id="29" name="node-74"/>
           <p:cNvSpPr/>
           <p:nvPr/>
         </p:nvSpPr>
@@ -11826,7 +11871,7 @@
       </p:sp>
       <p:pic>
         <p:nvPicPr>
-          <p:cNvPr id="30" name="icon-81" descr="preencoded.png">    </p:cNvPr>
+          <p:cNvPr id="30" name="icon-75" descr="preencoded.png">    </p:cNvPr>
           <p:cNvPicPr>
             <a:picLocks noChangeAspect="1"/>
           </p:cNvPicPr>
@@ -11850,7 +11895,7 @@
       </p:pic>
       <p:sp>
         <p:nvSpPr>
-          <p:cNvPr id="31" name="text-82"/>
+          <p:cNvPr id="31" name="text-76"/>
           <p:cNvSpPr txBox="1"/>
           <p:nvPr/>
         </p:nvSpPr>
@@ -11889,7 +11934,7 @@
       </p:sp>
       <p:sp>
         <p:nvSpPr>
-          <p:cNvPr id="32" name="text-83"/>
+          <p:cNvPr id="32" name="text-77"/>
           <p:cNvSpPr txBox="1"/>
           <p:nvPr/>
         </p:nvSpPr>
@@ -11925,7 +11970,7 @@
       </p:sp>
       <p:sp>
         <p:nvSpPr>
-          <p:cNvPr id="33" name="text-84"/>
+          <p:cNvPr id="33" name="text-78"/>
           <p:cNvSpPr txBox="1"/>
           <p:nvPr/>
         </p:nvSpPr>
@@ -11964,7 +12009,7 @@
       </p:sp>
       <p:sp>
         <p:nvSpPr>
-          <p:cNvPr id="34" name="text-85"/>
+          <p:cNvPr id="34" name="text-79"/>
           <p:cNvSpPr txBox="1"/>
           <p:nvPr/>
         </p:nvSpPr>
@@ -12003,7 +12048,7 @@
       </p:sp>
       <p:sp>
         <p:nvSpPr>
-          <p:cNvPr id="35" name="text-86"/>
+          <p:cNvPr id="35" name="text-80"/>
           <p:cNvSpPr txBox="1"/>
           <p:nvPr/>
         </p:nvSpPr>
@@ -12039,7 +12084,7 @@
       </p:sp>
       <p:sp>
         <p:nvSpPr>
-          <p:cNvPr id="36" name="card-87"/>
+          <p:cNvPr id="36" name="card-81"/>
           <p:cNvSpPr/>
           <p:nvPr/>
         </p:nvSpPr>
@@ -12061,7 +12106,7 @@
       </p:sp>
       <p:sp>
         <p:nvSpPr>
-          <p:cNvPr id="37" name="node-88"/>
+          <p:cNvPr id="37" name="node-82"/>
           <p:cNvSpPr/>
           <p:nvPr/>
         </p:nvSpPr>
@@ -12081,7 +12126,7 @@
       </p:sp>
       <p:pic>
         <p:nvPicPr>
-          <p:cNvPr id="38" name="icon-89" descr="preencoded.png">    </p:cNvPr>
+          <p:cNvPr id="38" name="icon-83" descr="preencoded.png">    </p:cNvPr>
           <p:cNvPicPr>
             <a:picLocks noChangeAspect="1"/>
           </p:cNvPicPr>
@@ -12105,7 +12150,7 @@
       </p:pic>
       <p:sp>
         <p:nvSpPr>
-          <p:cNvPr id="39" name="text-90"/>
+          <p:cNvPr id="39" name="text-84"/>
           <p:cNvSpPr txBox="1"/>
           <p:nvPr/>
         </p:nvSpPr>
@@ -12144,7 +12189,7 @@
       </p:sp>
       <p:sp>
         <p:nvSpPr>
-          <p:cNvPr id="40" name="text-91"/>
+          <p:cNvPr id="40" name="text-85"/>
           <p:cNvSpPr txBox="1"/>
           <p:nvPr/>
         </p:nvSpPr>
@@ -12180,7 +12225,7 @@
       </p:sp>
       <p:sp>
         <p:nvSpPr>
-          <p:cNvPr id="41" name="text-92"/>
+          <p:cNvPr id="41" name="text-86"/>
           <p:cNvSpPr txBox="1"/>
           <p:nvPr/>
         </p:nvSpPr>
@@ -12219,7 +12264,7 @@
       </p:sp>
       <p:sp>
         <p:nvSpPr>
-          <p:cNvPr id="42" name="text-93"/>
+          <p:cNvPr id="42" name="text-87"/>
           <p:cNvSpPr txBox="1"/>
           <p:nvPr/>
         </p:nvSpPr>
@@ -12258,7 +12303,7 @@
       </p:sp>
       <p:sp>
         <p:nvSpPr>
-          <p:cNvPr id="43" name="text-94"/>
+          <p:cNvPr id="43" name="text-88"/>
           <p:cNvSpPr txBox="1"/>
           <p:nvPr/>
         </p:nvSpPr>
@@ -12294,7 +12339,7 @@
       </p:sp>
       <p:sp>
         <p:nvSpPr>
-          <p:cNvPr id="44" name="text-95"/>
+          <p:cNvPr id="44" name="text-89"/>
           <p:cNvSpPr txBox="1"/>
           <p:nvPr/>
         </p:nvSpPr>
@@ -12488,7 +12533,7 @@
       </p:sp>
       <p:sp>
         <p:nvSpPr>
-          <p:cNvPr id="3" name="node-96"/>
+          <p:cNvPr id="3" name="node-90"/>
           <p:cNvSpPr/>
           <p:nvPr/>
         </p:nvSpPr>
@@ -12508,7 +12553,7 @@
       </p:sp>
       <p:pic>
         <p:nvPicPr>
-          <p:cNvPr id="4" name="icon-97" descr="preencoded.png">    </p:cNvPr>
+          <p:cNvPr id="4" name="icon-91" descr="preencoded.png">    </p:cNvPr>
           <p:cNvPicPr>
             <a:picLocks noChangeAspect="1"/>
           </p:cNvPicPr>
@@ -12532,7 +12577,7 @@
       </p:pic>
       <p:sp>
         <p:nvSpPr>
-          <p:cNvPr id="5" name="text-98"/>
+          <p:cNvPr id="5" name="text-92"/>
           <p:cNvSpPr txBox="1"/>
           <p:nvPr/>
         </p:nvSpPr>
@@ -12568,7 +12613,7 @@
       </p:sp>
       <p:sp>
         <p:nvSpPr>
-          <p:cNvPr id="6" name="text-99"/>
+          <p:cNvPr id="6" name="text-93"/>
           <p:cNvSpPr txBox="1"/>
           <p:nvPr/>
         </p:nvSpPr>
@@ -12604,7 +12649,7 @@
       </p:sp>
       <p:sp>
         <p:nvSpPr>
-          <p:cNvPr id="7" name="rect-100"/>
+          <p:cNvPr id="7" name="rect-94"/>
           <p:cNvSpPr/>
           <p:nvPr/>
         </p:nvSpPr>
@@ -12624,7 +12669,7 @@
       </p:sp>
       <p:sp>
         <p:nvSpPr>
-          <p:cNvPr id="8" name="text-101"/>
+          <p:cNvPr id="8" name="text-95"/>
           <p:cNvSpPr txBox="1"/>
           <p:nvPr/>
         </p:nvSpPr>
@@ -12660,7 +12705,7 @@
       </p:sp>
       <p:sp>
         <p:nvSpPr>
-          <p:cNvPr id="9" name="node-102"/>
+          <p:cNvPr id="9" name="node-96"/>
           <p:cNvSpPr/>
           <p:nvPr/>
         </p:nvSpPr>
@@ -12680,7 +12725,7 @@
       </p:sp>
       <p:pic>
         <p:nvPicPr>
-          <p:cNvPr id="10" name="icon-103" descr="preencoded.png">    </p:cNvPr>
+          <p:cNvPr id="10" name="icon-97" descr="preencoded.png">    </p:cNvPr>
           <p:cNvPicPr>
             <a:picLocks noChangeAspect="1"/>
           </p:cNvPicPr>
@@ -12704,7 +12749,7 @@
       </p:pic>
       <p:sp>
         <p:nvSpPr>
-          <p:cNvPr id="11" name="text-104"/>
+          <p:cNvPr id="11" name="text-98"/>
           <p:cNvSpPr txBox="1"/>
           <p:nvPr/>
         </p:nvSpPr>
@@ -12740,7 +12785,7 @@
       </p:sp>
       <p:sp>
         <p:nvSpPr>
-          <p:cNvPr id="12" name="text-105"/>
+          <p:cNvPr id="12" name="text-99"/>
           <p:cNvSpPr txBox="1"/>
           <p:nvPr/>
         </p:nvSpPr>
@@ -12776,7 +12821,7 @@
       </p:sp>
       <p:sp>
         <p:nvSpPr>
-          <p:cNvPr id="13" name="rect-106"/>
+          <p:cNvPr id="13" name="rect-100"/>
           <p:cNvSpPr/>
           <p:nvPr/>
         </p:nvSpPr>
@@ -12801,7 +12846,7 @@
       </p:sp>
       <p:sp>
         <p:nvSpPr>
-          <p:cNvPr id="14" name="text-107"/>
+          <p:cNvPr id="14" name="text-101"/>
           <p:cNvSpPr txBox="1"/>
           <p:nvPr/>
         </p:nvSpPr>
@@ -12837,7 +12882,7 @@
       </p:sp>
       <p:sp>
         <p:nvSpPr>
-          <p:cNvPr id="15" name="card-108"/>
+          <p:cNvPr id="15" name="card-102"/>
           <p:cNvSpPr/>
           <p:nvPr/>
         </p:nvSpPr>
@@ -12859,7 +12904,7 @@
       </p:sp>
       <p:sp>
         <p:nvSpPr>
-          <p:cNvPr id="16" name="node-109"/>
+          <p:cNvPr id="16" name="node-103"/>
           <p:cNvSpPr/>
           <p:nvPr/>
         </p:nvSpPr>
@@ -12879,7 +12924,7 @@
       </p:sp>
       <p:pic>
         <p:nvPicPr>
-          <p:cNvPr id="17" name="icon-110" descr="preencoded.png">    </p:cNvPr>
+          <p:cNvPr id="17" name="icon-104" descr="preencoded.png">    </p:cNvPr>
           <p:cNvPicPr>
             <a:picLocks noChangeAspect="1"/>
           </p:cNvPicPr>
@@ -12903,7 +12948,7 @@
       </p:pic>
       <p:sp>
         <p:nvSpPr>
-          <p:cNvPr id="18" name="text-111"/>
+          <p:cNvPr id="18" name="text-105"/>
           <p:cNvSpPr txBox="1"/>
           <p:nvPr/>
         </p:nvSpPr>
@@ -12939,7 +12984,7 @@
       </p:sp>
       <p:sp>
         <p:nvSpPr>
-          <p:cNvPr id="19" name="text-112"/>
+          <p:cNvPr id="19" name="text-106"/>
           <p:cNvSpPr txBox="1"/>
           <p:nvPr/>
         </p:nvSpPr>
@@ -12975,7 +13020,7 @@
       </p:sp>
       <p:sp>
         <p:nvSpPr>
-          <p:cNvPr id="20" name="text-113"/>
+          <p:cNvPr id="20" name="text-107"/>
           <p:cNvSpPr txBox="1"/>
           <p:nvPr/>
         </p:nvSpPr>
@@ -13144,7 +13189,7 @@
       </p:sp>
       <p:sp>
         <p:nvSpPr>
-          <p:cNvPr id="3" name="text-114"/>
+          <p:cNvPr id="3" name="text-108"/>
           <p:cNvSpPr txBox="1"/>
           <p:nvPr/>
         </p:nvSpPr>
@@ -13180,7 +13225,7 @@
       </p:sp>
       <p:sp>
         <p:nvSpPr>
-          <p:cNvPr id="4" name="text-115"/>
+          <p:cNvPr id="4" name="text-109"/>
           <p:cNvSpPr txBox="1"/>
           <p:nvPr/>
         </p:nvSpPr>
@@ -13216,7 +13261,7 @@
       </p:sp>
       <p:sp>
         <p:nvSpPr>
-          <p:cNvPr id="5" name="text-116"/>
+          <p:cNvPr id="5" name="text-110"/>
           <p:cNvSpPr txBox="1"/>
           <p:nvPr/>
         </p:nvSpPr>
@@ -13252,7 +13297,7 @@
       </p:sp>
       <p:sp>
         <p:nvSpPr>
-          <p:cNvPr id="6" name="text-117"/>
+          <p:cNvPr id="6" name="text-111"/>
           <p:cNvSpPr txBox="1"/>
           <p:nvPr/>
         </p:nvSpPr>
@@ -13288,7 +13333,7 @@
       </p:sp>
       <p:sp>
         <p:nvSpPr>
-          <p:cNvPr id="7" name="text-118"/>
+          <p:cNvPr id="7" name="text-112"/>
           <p:cNvSpPr txBox="1"/>
           <p:nvPr/>
         </p:nvSpPr>
@@ -13324,7 +13369,7 @@
       </p:sp>
       <p:sp>
         <p:nvSpPr>
-          <p:cNvPr id="8" name="text-119"/>
+          <p:cNvPr id="8" name="text-113"/>
           <p:cNvSpPr txBox="1"/>
           <p:nvPr/>
         </p:nvSpPr>
@@ -13360,7 +13405,7 @@
       </p:sp>
       <p:sp>
         <p:nvSpPr>
-          <p:cNvPr id="9" name="card-120"/>
+          <p:cNvPr id="9" name="card-114"/>
           <p:cNvSpPr/>
           <p:nvPr/>
         </p:nvSpPr>
@@ -13382,7 +13427,7 @@
       </p:sp>
       <p:sp>
         <p:nvSpPr>
-          <p:cNvPr id="10" name="node-121"/>
+          <p:cNvPr id="10" name="node-115"/>
           <p:cNvSpPr/>
           <p:nvPr/>
         </p:nvSpPr>
@@ -13402,7 +13447,7 @@
       </p:sp>
       <p:pic>
         <p:nvPicPr>
-          <p:cNvPr id="11" name="icon-122" descr="preencoded.png">    </p:cNvPr>
+          <p:cNvPr id="11" name="icon-116" descr="preencoded.png">    </p:cNvPr>
           <p:cNvPicPr>
             <a:picLocks noChangeAspect="1"/>
           </p:cNvPicPr>
@@ -13426,7 +13471,7 @@
       </p:pic>
       <p:sp>
         <p:nvSpPr>
-          <p:cNvPr id="12" name="text-123"/>
+          <p:cNvPr id="12" name="text-117"/>
           <p:cNvSpPr txBox="1"/>
           <p:nvPr/>
         </p:nvSpPr>
@@ -13462,7 +13507,7 @@
       </p:sp>
       <p:sp>
         <p:nvSpPr>
-          <p:cNvPr id="13" name="card-124"/>
+          <p:cNvPr id="13" name="card-118"/>
           <p:cNvSpPr/>
           <p:nvPr/>
         </p:nvSpPr>
@@ -13484,7 +13529,7 @@
       </p:sp>
       <p:sp>
         <p:nvSpPr>
-          <p:cNvPr id="14" name="text-125"/>
+          <p:cNvPr id="14" name="text-119"/>
           <p:cNvSpPr txBox="1"/>
           <p:nvPr/>
         </p:nvSpPr>
@@ -13520,7 +13565,7 @@
       </p:sp>
       <p:sp>
         <p:nvSpPr>
-          <p:cNvPr id="15" name="card-126"/>
+          <p:cNvPr id="15" name="card-120"/>
           <p:cNvSpPr/>
           <p:nvPr/>
         </p:nvSpPr>
@@ -13542,7 +13587,7 @@
       </p:sp>
       <p:sp>
         <p:nvSpPr>
-          <p:cNvPr id="16" name="text-127"/>
+          <p:cNvPr id="16" name="text-121"/>
           <p:cNvSpPr txBox="1"/>
           <p:nvPr/>
         </p:nvSpPr>
@@ -13578,7 +13623,7 @@
       </p:sp>
       <p:sp>
         <p:nvSpPr>
-          <p:cNvPr id="17" name="node-128"/>
+          <p:cNvPr id="17" name="node-122"/>
           <p:cNvSpPr/>
           <p:nvPr/>
         </p:nvSpPr>
@@ -13598,7 +13643,7 @@
       </p:sp>
       <p:pic>
         <p:nvPicPr>
-          <p:cNvPr id="18" name="icon-129" descr="preencoded.png">    </p:cNvPr>
+          <p:cNvPr id="18" name="icon-123" descr="preencoded.png">    </p:cNvPr>
           <p:cNvPicPr>
             <a:picLocks noChangeAspect="1"/>
           </p:cNvPicPr>
@@ -13622,7 +13667,7 @@
       </p:pic>
       <p:sp>
         <p:nvSpPr>
-          <p:cNvPr id="19" name="text-130"/>
+          <p:cNvPr id="19" name="text-124"/>
           <p:cNvSpPr txBox="1"/>
           <p:nvPr/>
         </p:nvSpPr>
@@ -13658,7 +13703,7 @@
       </p:sp>
       <p:sp>
         <p:nvSpPr>
-          <p:cNvPr id="20" name="card-131"/>
+          <p:cNvPr id="20" name="card-125"/>
           <p:cNvSpPr/>
           <p:nvPr/>
         </p:nvSpPr>
@@ -13680,7 +13725,7 @@
       </p:sp>
       <p:sp>
         <p:nvSpPr>
-          <p:cNvPr id="21" name="text-132"/>
+          <p:cNvPr id="21" name="text-126"/>
           <p:cNvSpPr txBox="1"/>
           <p:nvPr/>
         </p:nvSpPr>
@@ -13716,7 +13761,7 @@
       </p:sp>
       <p:sp>
         <p:nvSpPr>
-          <p:cNvPr id="22" name="card-133"/>
+          <p:cNvPr id="22" name="card-127"/>
           <p:cNvSpPr/>
           <p:nvPr/>
         </p:nvSpPr>
@@ -13738,7 +13783,7 @@
       </p:sp>
       <p:sp>
         <p:nvSpPr>
-          <p:cNvPr id="23" name="text-134"/>
+          <p:cNvPr id="23" name="text-128"/>
           <p:cNvSpPr txBox="1"/>
           <p:nvPr/>
         </p:nvSpPr>
@@ -13774,7 +13819,7 @@
       </p:sp>
       <p:sp>
         <p:nvSpPr>
-          <p:cNvPr id="24" name="card-135"/>
+          <p:cNvPr id="24" name="card-129"/>
           <p:cNvSpPr/>
           <p:nvPr/>
         </p:nvSpPr>
@@ -13796,7 +13841,7 @@
       </p:sp>
       <p:sp>
         <p:nvSpPr>
-          <p:cNvPr id="25" name="node-136"/>
+          <p:cNvPr id="25" name="node-130"/>
           <p:cNvSpPr/>
           <p:nvPr/>
         </p:nvSpPr>
@@ -13816,7 +13861,7 @@
       </p:sp>
       <p:pic>
         <p:nvPicPr>
-          <p:cNvPr id="26" name="icon-137" descr="preencoded.png">    </p:cNvPr>
+          <p:cNvPr id="26" name="icon-131" descr="preencoded.png">    </p:cNvPr>
           <p:cNvPicPr>
             <a:picLocks noChangeAspect="1"/>
           </p:cNvPicPr>
@@ -13840,7 +13885,7 @@
       </p:pic>
       <p:sp>
         <p:nvSpPr>
-          <p:cNvPr id="27" name="text-138"/>
+          <p:cNvPr id="27" name="text-132"/>
           <p:cNvSpPr txBox="1"/>
           <p:nvPr/>
         </p:nvSpPr>
@@ -13876,7 +13921,7 @@
       </p:sp>
       <p:sp>
         <p:nvSpPr>
-          <p:cNvPr id="28" name="card-139"/>
+          <p:cNvPr id="28" name="card-133"/>
           <p:cNvSpPr/>
           <p:nvPr/>
         </p:nvSpPr>
@@ -13898,7 +13943,7 @@
       </p:sp>
       <p:sp>
         <p:nvSpPr>
-          <p:cNvPr id="29" name="text-140"/>
+          <p:cNvPr id="29" name="text-134"/>
           <p:cNvSpPr txBox="1"/>
           <p:nvPr/>
         </p:nvSpPr>
@@ -13934,7 +13979,7 @@
       </p:sp>
       <p:sp>
         <p:nvSpPr>
-          <p:cNvPr id="30" name="card-141"/>
+          <p:cNvPr id="30" name="card-135"/>
           <p:cNvSpPr/>
           <p:nvPr/>
         </p:nvSpPr>
@@ -13956,7 +14001,7 @@
       </p:sp>
       <p:sp>
         <p:nvSpPr>
-          <p:cNvPr id="31" name="text-142"/>
+          <p:cNvPr id="31" name="text-136"/>
           <p:cNvSpPr txBox="1"/>
           <p:nvPr/>
         </p:nvSpPr>
@@ -13992,7 +14037,7 @@
       </p:sp>
       <p:sp>
         <p:nvSpPr>
-          <p:cNvPr id="32" name="node-143"/>
+          <p:cNvPr id="32" name="node-137"/>
           <p:cNvSpPr/>
           <p:nvPr/>
         </p:nvSpPr>
@@ -14012,7 +14057,7 @@
       </p:sp>
       <p:pic>
         <p:nvPicPr>
-          <p:cNvPr id="33" name="icon-144" descr="preencoded.png">    </p:cNvPr>
+          <p:cNvPr id="33" name="icon-138" descr="preencoded.png">    </p:cNvPr>
           <p:cNvPicPr>
             <a:picLocks noChangeAspect="1"/>
           </p:cNvPicPr>
@@ -14036,7 +14081,7 @@
       </p:pic>
       <p:sp>
         <p:nvSpPr>
-          <p:cNvPr id="34" name="text-145"/>
+          <p:cNvPr id="34" name="text-139"/>
           <p:cNvSpPr txBox="1"/>
           <p:nvPr/>
         </p:nvSpPr>
@@ -14072,7 +14117,7 @@
       </p:sp>
       <p:sp>
         <p:nvSpPr>
-          <p:cNvPr id="35" name="card-146"/>
+          <p:cNvPr id="35" name="card-140"/>
           <p:cNvSpPr/>
           <p:nvPr/>
         </p:nvSpPr>
@@ -14094,7 +14139,7 @@
       </p:sp>
       <p:sp>
         <p:nvSpPr>
-          <p:cNvPr id="36" name="text-147"/>
+          <p:cNvPr id="36" name="text-141"/>
           <p:cNvSpPr txBox="1"/>
           <p:nvPr/>
         </p:nvSpPr>
@@ -14130,7 +14175,7 @@
       </p:sp>
       <p:sp>
         <p:nvSpPr>
-          <p:cNvPr id="37" name="card-148"/>
+          <p:cNvPr id="37" name="card-142"/>
           <p:cNvSpPr/>
           <p:nvPr/>
         </p:nvSpPr>
@@ -14152,7 +14197,7 @@
       </p:sp>
       <p:sp>
         <p:nvSpPr>
-          <p:cNvPr id="38" name="node-149"/>
+          <p:cNvPr id="38" name="node-143"/>
           <p:cNvSpPr/>
           <p:nvPr/>
         </p:nvSpPr>
@@ -14172,7 +14217,7 @@
       </p:sp>
       <p:pic>
         <p:nvPicPr>
-          <p:cNvPr id="39" name="icon-150" descr="preencoded.png">    </p:cNvPr>
+          <p:cNvPr id="39" name="icon-144" descr="preencoded.png">    </p:cNvPr>
           <p:cNvPicPr>
             <a:picLocks noChangeAspect="1"/>
           </p:cNvPicPr>
@@ -14196,7 +14241,7 @@
       </p:pic>
       <p:sp>
         <p:nvSpPr>
-          <p:cNvPr id="40" name="text-151"/>
+          <p:cNvPr id="40" name="text-145"/>
           <p:cNvSpPr txBox="1"/>
           <p:nvPr/>
         </p:nvSpPr>
@@ -14232,7 +14277,7 @@
       </p:sp>
       <p:sp>
         <p:nvSpPr>
-          <p:cNvPr id="41" name="card-152"/>
+          <p:cNvPr id="41" name="card-146"/>
           <p:cNvSpPr/>
           <p:nvPr/>
         </p:nvSpPr>
@@ -14259,7 +14304,7 @@
       </p:sp>
       <p:sp>
         <p:nvSpPr>
-          <p:cNvPr id="42" name="text-153"/>
+          <p:cNvPr id="42" name="text-147"/>
           <p:cNvSpPr txBox="1"/>
           <p:nvPr/>
         </p:nvSpPr>
@@ -14295,7 +14340,7 @@
       </p:sp>
       <p:sp>
         <p:nvSpPr>
-          <p:cNvPr id="43" name="card-154"/>
+          <p:cNvPr id="43" name="card-148"/>
           <p:cNvSpPr/>
           <p:nvPr/>
         </p:nvSpPr>
@@ -14322,7 +14367,7 @@
       </p:sp>
       <p:sp>
         <p:nvSpPr>
-          <p:cNvPr id="44" name="text-155"/>
+          <p:cNvPr id="44" name="text-149"/>
           <p:cNvSpPr txBox="1"/>
           <p:nvPr/>
         </p:nvSpPr>
@@ -14358,7 +14403,7 @@
       </p:sp>
       <p:sp>
         <p:nvSpPr>
-          <p:cNvPr id="45" name="card-156"/>
+          <p:cNvPr id="45" name="card-150"/>
           <p:cNvSpPr/>
           <p:nvPr/>
         </p:nvSpPr>
@@ -14385,7 +14430,7 @@
       </p:sp>
       <p:sp>
         <p:nvSpPr>
-          <p:cNvPr id="46" name="text-157"/>
+          <p:cNvPr id="46" name="text-151"/>
           <p:cNvSpPr txBox="1"/>
           <p:nvPr/>
         </p:nvSpPr>
@@ -14421,7 +14466,7 @@
       </p:sp>
       <p:sp>
         <p:nvSpPr>
-          <p:cNvPr id="47" name="node-158"/>
+          <p:cNvPr id="47" name="node-152"/>
           <p:cNvSpPr/>
           <p:nvPr/>
         </p:nvSpPr>
@@ -14441,7 +14486,7 @@
       </p:sp>
       <p:pic>
         <p:nvPicPr>
-          <p:cNvPr id="48" name="icon-159" descr="preencoded.png">    </p:cNvPr>
+          <p:cNvPr id="48" name="icon-153" descr="preencoded.png">    </p:cNvPr>
           <p:cNvPicPr>
             <a:picLocks noChangeAspect="1"/>
           </p:cNvPicPr>
@@ -14465,7 +14510,7 @@
       </p:pic>
       <p:sp>
         <p:nvSpPr>
-          <p:cNvPr id="49" name="text-160"/>
+          <p:cNvPr id="49" name="text-154"/>
           <p:cNvSpPr txBox="1"/>
           <p:nvPr/>
         </p:nvSpPr>
@@ -14493,7 +14538,7 @@
                   <a:schemeClr val="tx1"/>
                 </a:solidFill>
               </a:rPr>
-              <a:t>Daily, 06:00 UTC</a:t>
+              <a:t>Daily, 08:00 Swiss time</a:t>
             </a:r>
             <a:endParaRPr lang="en-US" sz="1600" dirty="0"/>
           </a:p>
@@ -14501,7 +14546,7 @@
       </p:sp>
       <p:sp>
         <p:nvSpPr>
-          <p:cNvPr id="50" name="card-161"/>
+          <p:cNvPr id="50" name="card-155"/>
           <p:cNvSpPr/>
           <p:nvPr/>
         </p:nvSpPr>
@@ -14523,7 +14568,7 @@
       </p:sp>
       <p:sp>
         <p:nvSpPr>
-          <p:cNvPr id="51" name="text-162"/>
+          <p:cNvPr id="51" name="text-156"/>
           <p:cNvSpPr txBox="1"/>
           <p:nvPr/>
         </p:nvSpPr>
@@ -14559,7 +14604,7 @@
       </p:sp>
       <p:sp>
         <p:nvSpPr>
-          <p:cNvPr id="52" name="card-163"/>
+          <p:cNvPr id="52" name="card-157"/>
           <p:cNvSpPr/>
           <p:nvPr/>
         </p:nvSpPr>
@@ -14581,7 +14626,7 @@
       </p:sp>
       <p:sp>
         <p:nvSpPr>
-          <p:cNvPr id="53" name="text-164"/>
+          <p:cNvPr id="53" name="text-158"/>
           <p:cNvSpPr txBox="1"/>
           <p:nvPr/>
         </p:nvSpPr>
@@ -14617,7 +14662,7 @@
       </p:sp>
       <p:sp>
         <p:nvSpPr>
-          <p:cNvPr id="54" name="text-165"/>
+          <p:cNvPr id="54" name="text-159"/>
           <p:cNvSpPr txBox="1"/>
           <p:nvPr/>
         </p:nvSpPr>
@@ -14761,7 +14806,7 @@
       </p:sp>
       <p:sp>
         <p:nvSpPr>
-          <p:cNvPr id="3" name="link-166"/>
+          <p:cNvPr id="3" name="link-160"/>
           <p:cNvSpPr/>
           <p:nvPr/>
         </p:nvSpPr>
@@ -14784,7 +14829,7 @@
       </p:sp>
       <p:sp>
         <p:nvSpPr>
-          <p:cNvPr id="4" name="node-167"/>
+          <p:cNvPr id="4" name="node-161"/>
           <p:cNvSpPr/>
           <p:nvPr/>
         </p:nvSpPr>
@@ -14804,7 +14849,7 @@
       </p:sp>
       <p:sp>
         <p:nvSpPr>
-          <p:cNvPr id="5" name="node-168"/>
+          <p:cNvPr id="5" name="node-162"/>
           <p:cNvSpPr/>
           <p:nvPr/>
         </p:nvSpPr>
@@ -14824,7 +14869,7 @@
       </p:sp>
       <p:pic>
         <p:nvPicPr>
-          <p:cNvPr id="6" name="icon-169" descr="preencoded.png">    </p:cNvPr>
+          <p:cNvPr id="6" name="icon-163" descr="preencoded.png">    </p:cNvPr>
           <p:cNvPicPr>
             <a:picLocks noChangeAspect="1"/>
           </p:cNvPicPr>
@@ -14848,7 +14893,7 @@
       </p:pic>
       <p:sp>
         <p:nvSpPr>
-          <p:cNvPr id="7" name="text-170"/>
+          <p:cNvPr id="7" name="text-164"/>
           <p:cNvSpPr txBox="1"/>
           <p:nvPr/>
         </p:nvSpPr>
@@ -14884,7 +14929,7 @@
       </p:sp>
       <p:sp>
         <p:nvSpPr>
-          <p:cNvPr id="8" name="text-171"/>
+          <p:cNvPr id="8" name="text-165"/>
           <p:cNvSpPr txBox="1"/>
           <p:nvPr/>
         </p:nvSpPr>
@@ -14920,7 +14965,7 @@
       </p:sp>
       <p:sp>
         <p:nvSpPr>
-          <p:cNvPr id="9" name="link-172"/>
+          <p:cNvPr id="9" name="link-166"/>
           <p:cNvSpPr/>
           <p:nvPr/>
         </p:nvSpPr>
@@ -14943,7 +14988,7 @@
       </p:sp>
       <p:sp>
         <p:nvSpPr>
-          <p:cNvPr id="10" name="node-173"/>
+          <p:cNvPr id="10" name="node-167"/>
           <p:cNvSpPr/>
           <p:nvPr/>
         </p:nvSpPr>
@@ -14963,7 +15008,7 @@
       </p:sp>
       <p:sp>
         <p:nvSpPr>
-          <p:cNvPr id="11" name="node-174"/>
+          <p:cNvPr id="11" name="node-168"/>
           <p:cNvSpPr/>
           <p:nvPr/>
         </p:nvSpPr>
@@ -14983,7 +15028,7 @@
       </p:sp>
       <p:pic>
         <p:nvPicPr>
-          <p:cNvPr id="12" name="icon-175" descr="preencoded.png">    </p:cNvPr>
+          <p:cNvPr id="12" name="icon-169" descr="preencoded.png">    </p:cNvPr>
           <p:cNvPicPr>
             <a:picLocks noChangeAspect="1"/>
           </p:cNvPicPr>
@@ -15007,7 +15052,7 @@
       </p:pic>
       <p:sp>
         <p:nvSpPr>
-          <p:cNvPr id="13" name="text-176"/>
+          <p:cNvPr id="13" name="text-170"/>
           <p:cNvSpPr txBox="1"/>
           <p:nvPr/>
         </p:nvSpPr>
@@ -15043,7 +15088,7 @@
       </p:sp>
       <p:sp>
         <p:nvSpPr>
-          <p:cNvPr id="14" name="text-177"/>
+          <p:cNvPr id="14" name="text-171"/>
           <p:cNvSpPr txBox="1"/>
           <p:nvPr/>
         </p:nvSpPr>
@@ -15079,7 +15124,7 @@
       </p:sp>
       <p:sp>
         <p:nvSpPr>
-          <p:cNvPr id="15" name="link-178"/>
+          <p:cNvPr id="15" name="link-172"/>
           <p:cNvSpPr/>
           <p:nvPr/>
         </p:nvSpPr>
@@ -15102,7 +15147,7 @@
       </p:sp>
       <p:sp>
         <p:nvSpPr>
-          <p:cNvPr id="16" name="node-179"/>
+          <p:cNvPr id="16" name="node-173"/>
           <p:cNvSpPr/>
           <p:nvPr/>
         </p:nvSpPr>
@@ -15122,7 +15167,7 @@
       </p:sp>
       <p:sp>
         <p:nvSpPr>
-          <p:cNvPr id="17" name="node-180"/>
+          <p:cNvPr id="17" name="node-174"/>
           <p:cNvSpPr/>
           <p:nvPr/>
         </p:nvSpPr>
@@ -15142,7 +15187,7 @@
       </p:sp>
       <p:pic>
         <p:nvPicPr>
-          <p:cNvPr id="18" name="icon-181" descr="preencoded.png">    </p:cNvPr>
+          <p:cNvPr id="18" name="icon-175" descr="preencoded.png">    </p:cNvPr>
           <p:cNvPicPr>
             <a:picLocks noChangeAspect="1"/>
           </p:cNvPicPr>
@@ -15166,7 +15211,7 @@
       </p:pic>
       <p:sp>
         <p:nvSpPr>
-          <p:cNvPr id="19" name="text-182"/>
+          <p:cNvPr id="19" name="text-176"/>
           <p:cNvSpPr txBox="1"/>
           <p:nvPr/>
         </p:nvSpPr>
@@ -15202,7 +15247,7 @@
       </p:sp>
       <p:sp>
         <p:nvSpPr>
-          <p:cNvPr id="20" name="text-183"/>
+          <p:cNvPr id="20" name="text-177"/>
           <p:cNvSpPr txBox="1"/>
           <p:nvPr/>
         </p:nvSpPr>
@@ -15238,7 +15283,7 @@
       </p:sp>
       <p:sp>
         <p:nvSpPr>
-          <p:cNvPr id="21" name="link-184"/>
+          <p:cNvPr id="21" name="link-178"/>
           <p:cNvSpPr/>
           <p:nvPr/>
         </p:nvSpPr>
@@ -15261,7 +15306,7 @@
       </p:sp>
       <p:sp>
         <p:nvSpPr>
-          <p:cNvPr id="22" name="node-185"/>
+          <p:cNvPr id="22" name="node-179"/>
           <p:cNvSpPr/>
           <p:nvPr/>
         </p:nvSpPr>
@@ -15281,7 +15326,7 @@
       </p:sp>
       <p:sp>
         <p:nvSpPr>
-          <p:cNvPr id="23" name="node-186"/>
+          <p:cNvPr id="23" name="node-180"/>
           <p:cNvSpPr/>
           <p:nvPr/>
         </p:nvSpPr>
@@ -15301,7 +15346,7 @@
       </p:sp>
       <p:pic>
         <p:nvPicPr>
-          <p:cNvPr id="24" name="icon-187" descr="preencoded.png">    </p:cNvPr>
+          <p:cNvPr id="24" name="icon-181" descr="preencoded.png">    </p:cNvPr>
           <p:cNvPicPr>
             <a:picLocks noChangeAspect="1"/>
           </p:cNvPicPr>
@@ -15325,7 +15370,7 @@
       </p:pic>
       <p:sp>
         <p:nvSpPr>
-          <p:cNvPr id="25" name="text-188"/>
+          <p:cNvPr id="25" name="text-182"/>
           <p:cNvSpPr txBox="1"/>
           <p:nvPr/>
         </p:nvSpPr>
@@ -15361,7 +15406,7 @@
       </p:sp>
       <p:sp>
         <p:nvSpPr>
-          <p:cNvPr id="26" name="text-189"/>
+          <p:cNvPr id="26" name="text-183"/>
           <p:cNvSpPr txBox="1"/>
           <p:nvPr/>
         </p:nvSpPr>
@@ -15397,7 +15442,7 @@
       </p:sp>
       <p:sp>
         <p:nvSpPr>
-          <p:cNvPr id="27" name="node-190"/>
+          <p:cNvPr id="27" name="node-184"/>
           <p:cNvSpPr/>
           <p:nvPr/>
         </p:nvSpPr>
@@ -15417,7 +15462,7 @@
       </p:sp>
       <p:pic>
         <p:nvPicPr>
-          <p:cNvPr id="28" name="icon-191" descr="preencoded.png">    </p:cNvPr>
+          <p:cNvPr id="28" name="icon-185" descr="preencoded.png">    </p:cNvPr>
           <p:cNvPicPr>
             <a:picLocks noChangeAspect="1"/>
           </p:cNvPicPr>
@@ -15441,7 +15486,7 @@
       </p:pic>
       <p:sp>
         <p:nvSpPr>
-          <p:cNvPr id="29" name="text-192"/>
+          <p:cNvPr id="29" name="text-186"/>
           <p:cNvSpPr txBox="1"/>
           <p:nvPr/>
         </p:nvSpPr>
@@ -15477,7 +15522,7 @@
       </p:sp>
       <p:sp>
         <p:nvSpPr>
-          <p:cNvPr id="30" name="text-193"/>
+          <p:cNvPr id="30" name="text-187"/>
           <p:cNvSpPr txBox="1"/>
           <p:nvPr/>
         </p:nvSpPr>
@@ -15513,7 +15558,7 @@
       </p:sp>
       <p:sp>
         <p:nvSpPr>
-          <p:cNvPr id="31" name="text-194"/>
+          <p:cNvPr id="31" name="text-188"/>
           <p:cNvSpPr txBox="1"/>
           <p:nvPr/>
         </p:nvSpPr>
@@ -15549,7 +15594,7 @@
       </p:sp>
       <p:sp>
         <p:nvSpPr>
-          <p:cNvPr id="32" name="card-195"/>
+          <p:cNvPr id="32" name="card-189"/>
           <p:cNvSpPr/>
           <p:nvPr/>
         </p:nvSpPr>
@@ -15571,7 +15616,7 @@
       </p:sp>
       <p:sp>
         <p:nvSpPr>
-          <p:cNvPr id="33" name="node-196"/>
+          <p:cNvPr id="33" name="node-190"/>
           <p:cNvSpPr/>
           <p:nvPr/>
         </p:nvSpPr>
@@ -15591,7 +15636,7 @@
       </p:sp>
       <p:pic>
         <p:nvPicPr>
-          <p:cNvPr id="34" name="icon-197" descr="preencoded.png">    </p:cNvPr>
+          <p:cNvPr id="34" name="icon-191" descr="preencoded.png">    </p:cNvPr>
           <p:cNvPicPr>
             <a:picLocks noChangeAspect="1"/>
           </p:cNvPicPr>
@@ -15615,7 +15660,7 @@
       </p:pic>
       <p:sp>
         <p:nvSpPr>
-          <p:cNvPr id="35" name="text-198"/>
+          <p:cNvPr id="35" name="text-192"/>
           <p:cNvSpPr txBox="1"/>
           <p:nvPr/>
         </p:nvSpPr>
@@ -15651,7 +15696,7 @@
       </p:sp>
       <p:sp>
         <p:nvSpPr>
-          <p:cNvPr id="36" name="text-199"/>
+          <p:cNvPr id="36" name="text-193"/>
           <p:cNvSpPr txBox="1"/>
           <p:nvPr/>
         </p:nvSpPr>
@@ -15687,7 +15732,7 @@
       </p:sp>
       <p:sp>
         <p:nvSpPr>
-          <p:cNvPr id="37" name="card-200"/>
+          <p:cNvPr id="37" name="card-194"/>
           <p:cNvSpPr/>
           <p:nvPr/>
         </p:nvSpPr>
@@ -15709,7 +15754,7 @@
       </p:sp>
       <p:sp>
         <p:nvSpPr>
-          <p:cNvPr id="38" name="node-201"/>
+          <p:cNvPr id="38" name="node-195"/>
           <p:cNvSpPr/>
           <p:nvPr/>
         </p:nvSpPr>
@@ -15729,7 +15774,7 @@
       </p:sp>
       <p:pic>
         <p:nvPicPr>
-          <p:cNvPr id="39" name="icon-202" descr="preencoded.png">    </p:cNvPr>
+          <p:cNvPr id="39" name="icon-196" descr="preencoded.png">    </p:cNvPr>
           <p:cNvPicPr>
             <a:picLocks noChangeAspect="1"/>
           </p:cNvPicPr>
@@ -15753,7 +15798,7 @@
       </p:pic>
       <p:sp>
         <p:nvSpPr>
-          <p:cNvPr id="40" name="text-203"/>
+          <p:cNvPr id="40" name="text-197"/>
           <p:cNvSpPr txBox="1"/>
           <p:nvPr/>
         </p:nvSpPr>
@@ -15789,7 +15834,7 @@
       </p:sp>
       <p:sp>
         <p:nvSpPr>
-          <p:cNvPr id="41" name="text-204"/>
+          <p:cNvPr id="41" name="text-198"/>
           <p:cNvSpPr txBox="1"/>
           <p:nvPr/>
         </p:nvSpPr>
@@ -15825,7 +15870,7 @@
       </p:sp>
       <p:sp>
         <p:nvSpPr>
-          <p:cNvPr id="42" name="card-205"/>
+          <p:cNvPr id="42" name="card-199"/>
           <p:cNvSpPr/>
           <p:nvPr/>
         </p:nvSpPr>
@@ -15847,7 +15892,7 @@
       </p:sp>
       <p:sp>
         <p:nvSpPr>
-          <p:cNvPr id="43" name="node-206"/>
+          <p:cNvPr id="43" name="node-200"/>
           <p:cNvSpPr/>
           <p:nvPr/>
         </p:nvSpPr>
@@ -15867,7 +15912,7 @@
       </p:sp>
       <p:pic>
         <p:nvPicPr>
-          <p:cNvPr id="44" name="icon-207" descr="preencoded.png">    </p:cNvPr>
+          <p:cNvPr id="44" name="icon-201" descr="preencoded.png">    </p:cNvPr>
           <p:cNvPicPr>
             <a:picLocks noChangeAspect="1"/>
           </p:cNvPicPr>
@@ -15891,7 +15936,7 @@
       </p:pic>
       <p:sp>
         <p:nvSpPr>
-          <p:cNvPr id="45" name="text-208"/>
+          <p:cNvPr id="45" name="text-202"/>
           <p:cNvSpPr txBox="1"/>
           <p:nvPr/>
         </p:nvSpPr>
@@ -15927,7 +15972,7 @@
       </p:sp>
       <p:sp>
         <p:nvSpPr>
-          <p:cNvPr id="46" name="text-209"/>
+          <p:cNvPr id="46" name="text-203"/>
           <p:cNvSpPr txBox="1"/>
           <p:nvPr/>
         </p:nvSpPr>
@@ -16063,7 +16108,7 @@
                   <a:schemeClr val="tx1"/>
                 </a:solidFill>
               </a:rPr>
-              <a:t>Set up once</a:t>
+              <a:t>Set up once: make setup</a:t>
             </a:r>
             <a:endParaRPr lang="en-US" sz="3400" dirty="0"/>
           </a:p>
@@ -16071,7 +16116,7 @@
       </p:sp>
       <p:sp>
         <p:nvSpPr>
-          <p:cNvPr id="3" name="card-210"/>
+          <p:cNvPr id="3" name="card-204"/>
           <p:cNvSpPr/>
           <p:nvPr/>
         </p:nvSpPr>
@@ -16093,7 +16138,7 @@
       </p:sp>
       <p:sp>
         <p:nvSpPr>
-          <p:cNvPr id="4" name="node-211"/>
+          <p:cNvPr id="4" name="node-205"/>
           <p:cNvSpPr/>
           <p:nvPr/>
         </p:nvSpPr>
@@ -16113,7 +16158,7 @@
       </p:sp>
       <p:sp>
         <p:nvSpPr>
-          <p:cNvPr id="5" name="node-212"/>
+          <p:cNvPr id="5" name="node-206"/>
           <p:cNvSpPr/>
           <p:nvPr/>
         </p:nvSpPr>
@@ -16133,7 +16178,7 @@
       </p:sp>
       <p:sp>
         <p:nvSpPr>
-          <p:cNvPr id="6" name="node-213"/>
+          <p:cNvPr id="6" name="node-207"/>
           <p:cNvSpPr/>
           <p:nvPr/>
         </p:nvSpPr>
@@ -16153,13 +16198,13 @@
       </p:sp>
       <p:sp>
         <p:nvSpPr>
-          <p:cNvPr id="7" name="text-214"/>
-          <p:cNvSpPr txBox="1"/>
-          <p:nvPr/>
-        </p:nvSpPr>
-        <p:spPr>
-          <a:xfrm>
-            <a:off x="868680" y="1874520"/>
+          <p:cNvPr id="7" name="text-208"/>
+          <p:cNvSpPr txBox="1"/>
+          <p:nvPr/>
+        </p:nvSpPr>
+        <p:spPr>
+          <a:xfrm>
+            <a:off x="868680" y="1828800"/>
             <a:ext cx="6766560" cy="3794760"/>
           </a:xfrm>
           <a:prstGeom prst="rect">
@@ -16187,14 +16232,14 @@
                 <a:ea typeface="Menlo" pitchFamily="34" charset="-122"/>
                 <a:cs typeface="Menlo" pitchFamily="34" charset="-120"/>
               </a:rPr>
-              <a:t># 1 · tools</a:t>
+              <a:t># 1 · the repository</a:t>
             </a:r>
             <a:endParaRPr lang="en-US" sz="1600" dirty="0"/>
           </a:p>
           <a:p>
             <a:pPr indent="0" marL="0">
               <a:spcAft>
-                <a:spcPts val="1000"/>
+                <a:spcPts val="2000"/>
               </a:spcAft>
               <a:buNone/>
             </a:pPr>
@@ -16211,7 +16256,7 @@
             </a:r>
             <a:pPr indent="0" marL="0">
               <a:spcAft>
-                <a:spcPts val="1000"/>
+                <a:spcPts val="2000"/>
               </a:spcAft>
               <a:buNone/>
             </a:pPr>
@@ -16224,7 +16269,44 @@
                 <a:ea typeface="Menlo" pitchFamily="34" charset="-122"/>
                 <a:cs typeface="Menlo" pitchFamily="34" charset="-120"/>
               </a:rPr>
-              <a:t>curl -fsSL https://bun.sh/install | bash</a:t>
+              <a:t>git clone git@github.com:openbraininstitute/obi-e2e</a:t>
+            </a:r>
+            <a:endParaRPr lang="en-US" sz="1600" dirty="0"/>
+          </a:p>
+          <a:p>
+            <a:pPr indent="0" marL="0">
+              <a:spcAft>
+                <a:spcPts val="2000"/>
+              </a:spcAft>
+              <a:buNone/>
+            </a:pPr>
+            <a:r>
+              <a:rPr lang="en-US" sz="1600" b="1" dirty="0">
+                <a:solidFill>
+                  <a:srgbClr val="5CC8FF"/>
+                </a:solidFill>
+                <a:latin typeface="Menlo" pitchFamily="34" charset="0"/>
+                <a:ea typeface="Menlo" pitchFamily="34" charset="-122"/>
+                <a:cs typeface="Menlo" pitchFamily="34" charset="-120"/>
+              </a:rPr>
+              <a:t>$ </a:t>
+            </a:r>
+            <a:pPr indent="0" marL="0">
+              <a:spcAft>
+                <a:spcPts val="2000"/>
+              </a:spcAft>
+              <a:buNone/>
+            </a:pPr>
+            <a:r>
+              <a:rPr lang="en-US" sz="1600" dirty="0">
+                <a:solidFill>
+                  <a:srgbClr val="FFFFFF"/>
+                </a:solidFill>
+                <a:latin typeface="Menlo" pitchFamily="34" charset="0"/>
+                <a:ea typeface="Menlo" pitchFamily="34" charset="-122"/>
+                <a:cs typeface="Menlo" pitchFamily="34" charset="-120"/>
+              </a:rPr>
+              <a:t>cd obi-e2e</a:t>
             </a:r>
             <a:endParaRPr lang="en-US" sz="1600" dirty="0"/>
           </a:p>
@@ -16244,14 +16326,14 @@
                 <a:ea typeface="Menlo" pitchFamily="34" charset="-122"/>
                 <a:cs typeface="Menlo" pitchFamily="34" charset="-120"/>
               </a:rPr>
-              <a:t># 2 · the repository, and the playwright-cli skill</a:t>
+              <a:t># 2 · everything else, in one command</a:t>
             </a:r>
             <a:endParaRPr lang="en-US" sz="1600" dirty="0"/>
           </a:p>
           <a:p>
             <a:pPr indent="0" marL="0">
               <a:spcAft>
-                <a:spcPts val="1000"/>
+                <a:spcPts val="2000"/>
               </a:spcAft>
               <a:buNone/>
             </a:pPr>
@@ -16268,7 +16350,7 @@
             </a:r>
             <a:pPr indent="0" marL="0">
               <a:spcAft>
-                <a:spcPts val="1000"/>
+                <a:spcPts val="2000"/>
               </a:spcAft>
               <a:buNone/>
             </a:pPr>
@@ -16281,71 +16363,71 @@
                 <a:ea typeface="Menlo" pitchFamily="34" charset="-122"/>
                 <a:cs typeface="Menlo" pitchFamily="34" charset="-120"/>
               </a:rPr>
-              <a:t>git clone git@github.com:openbraininstitute/obi-e2e</a:t>
+              <a:t>make setup</a:t>
             </a:r>
             <a:endParaRPr lang="en-US" sz="1600" dirty="0"/>
           </a:p>
           <a:p>
             <a:pPr indent="0" marL="0">
               <a:spcAft>
-                <a:spcPts val="1000"/>
+                <a:spcPts val="200"/>
               </a:spcAft>
               <a:buNone/>
             </a:pPr>
             <a:r>
-              <a:rPr lang="en-US" sz="1600" b="1" dirty="0">
-                <a:solidFill>
-                  <a:srgbClr val="5CC8FF"/>
+              <a:rPr lang="en-US" sz="1600" dirty="0">
+                <a:solidFill>
+                  <a:srgbClr val="A9B7CC"/>
                 </a:solidFill>
                 <a:latin typeface="Menlo" pitchFamily="34" charset="0"/>
                 <a:ea typeface="Menlo" pitchFamily="34" charset="-122"/>
                 <a:cs typeface="Menlo" pitchFamily="34" charset="-120"/>
               </a:rPr>
-              <a:t>$ </a:t>
-            </a:r>
+              <a:t># 3 · fill in .env.staging.local, then check</a:t>
+            </a:r>
+            <a:endParaRPr lang="en-US" sz="1600" dirty="0"/>
+          </a:p>
+          <a:p>
             <a:pPr indent="0" marL="0">
               <a:spcAft>
-                <a:spcPts val="1000"/>
+                <a:spcPts val="2000"/>
               </a:spcAft>
               <a:buNone/>
             </a:pPr>
             <a:r>
-              <a:rPr lang="en-US" sz="1600" dirty="0">
-                <a:solidFill>
-                  <a:srgbClr val="FFFFFF"/>
+              <a:rPr lang="en-US" sz="1600" b="1" dirty="0">
+                <a:solidFill>
+                  <a:srgbClr val="5CC8FF"/>
                 </a:solidFill>
                 <a:latin typeface="Menlo" pitchFamily="34" charset="0"/>
                 <a:ea typeface="Menlo" pitchFamily="34" charset="-122"/>
                 <a:cs typeface="Menlo" pitchFamily="34" charset="-120"/>
               </a:rPr>
-              <a:t>cd obi-e2e &amp;&amp; make install &amp;&amp; make browsers</a:t>
-            </a:r>
-            <a:endParaRPr lang="en-US" sz="1600" dirty="0"/>
-          </a:p>
-          <a:p>
+              <a:t>$ </a:t>
+            </a:r>
             <a:pPr indent="0" marL="0">
               <a:spcAft>
-                <a:spcPts val="200"/>
+                <a:spcPts val="2000"/>
               </a:spcAft>
               <a:buNone/>
             </a:pPr>
             <a:r>
               <a:rPr lang="en-US" sz="1600" dirty="0">
                 <a:solidFill>
-                  <a:srgbClr val="A9B7CC"/>
+                  <a:srgbClr val="FFFFFF"/>
                 </a:solidFill>
                 <a:latin typeface="Menlo" pitchFamily="34" charset="0"/>
                 <a:ea typeface="Menlo" pitchFamily="34" charset="-122"/>
                 <a:cs typeface="Menlo" pitchFamily="34" charset="-120"/>
               </a:rPr>
-              <a:t># 3 · your secrets</a:t>
+              <a:t>make auth</a:t>
             </a:r>
             <a:endParaRPr lang="en-US" sz="1600" dirty="0"/>
           </a:p>
           <a:p>
             <a:pPr indent="0" marL="0">
               <a:spcAft>
-                <a:spcPts val="1000"/>
+                <a:spcPts val="2000"/>
               </a:spcAft>
               <a:buNone/>
             </a:pPr>
@@ -16362,7 +16444,7 @@
             </a:r>
             <a:pPr indent="0" marL="0">
               <a:spcAft>
-                <a:spcPts val="1000"/>
+                <a:spcPts val="2000"/>
               </a:spcAft>
               <a:buNone/>
             </a:pPr>
@@ -16375,109 +16457,15 @@
                 <a:ea typeface="Menlo" pitchFamily="34" charset="-122"/>
                 <a:cs typeface="Menlo" pitchFamily="34" charset="-120"/>
               </a:rPr>
-              <a:t>cp .env.local.example .env.staging.local</a:t>
+              <a:t>make test scenarios/site</a:t>
             </a:r>
             <a:endParaRPr lang="en-US" sz="1600" dirty="0"/>
           </a:p>
-          <a:p>
-            <a:pPr indent="0" marL="0">
-              <a:spcAft>
-                <a:spcPts val="200"/>
-              </a:spcAft>
-              <a:buNone/>
-            </a:pPr>
-            <a:r>
-              <a:rPr lang="en-US" sz="1600" dirty="0">
-                <a:solidFill>
-                  <a:srgbClr val="A9B7CC"/>
-                </a:solidFill>
-                <a:latin typeface="Menlo" pitchFamily="34" charset="0"/>
-                <a:ea typeface="Menlo" pitchFamily="34" charset="-122"/>
-                <a:cs typeface="Menlo" pitchFamily="34" charset="-120"/>
-              </a:rPr>
-              <a:t># 4 · check: green means ready</a:t>
-            </a:r>
-            <a:endParaRPr lang="en-US" sz="1600" dirty="0"/>
-          </a:p>
-          <a:p>
-            <a:pPr indent="0" marL="0">
-              <a:spcAft>
-                <a:spcPts val="1000"/>
-              </a:spcAft>
-              <a:buNone/>
-            </a:pPr>
-            <a:r>
-              <a:rPr lang="en-US" sz="1600" b="1" dirty="0">
-                <a:solidFill>
-                  <a:srgbClr val="5CC8FF"/>
-                </a:solidFill>
-                <a:latin typeface="Menlo" pitchFamily="34" charset="0"/>
-                <a:ea typeface="Menlo" pitchFamily="34" charset="-122"/>
-                <a:cs typeface="Menlo" pitchFamily="34" charset="-120"/>
-              </a:rPr>
-              <a:t>$ </a:t>
-            </a:r>
-            <a:pPr indent="0" marL="0">
-              <a:spcAft>
-                <a:spcPts val="1000"/>
-              </a:spcAft>
-              <a:buNone/>
-            </a:pPr>
-            <a:r>
-              <a:rPr lang="en-US" sz="1600" dirty="0">
-                <a:solidFill>
-                  <a:srgbClr val="FFFFFF"/>
-                </a:solidFill>
-                <a:latin typeface="Menlo" pitchFamily="34" charset="0"/>
-                <a:ea typeface="Menlo" pitchFamily="34" charset="-122"/>
-                <a:cs typeface="Menlo" pitchFamily="34" charset="-120"/>
-              </a:rPr>
-              <a:t>make auth</a:t>
-            </a:r>
-            <a:endParaRPr lang="en-US" sz="1600" dirty="0"/>
-          </a:p>
-          <a:p>
-            <a:pPr indent="0" marL="0">
-              <a:spcAft>
-                <a:spcPts val="1000"/>
-              </a:spcAft>
-              <a:buNone/>
-            </a:pPr>
-            <a:r>
-              <a:rPr lang="en-US" sz="1600" b="1" dirty="0">
-                <a:solidFill>
-                  <a:srgbClr val="5CC8FF"/>
-                </a:solidFill>
-                <a:latin typeface="Menlo" pitchFamily="34" charset="0"/>
-                <a:ea typeface="Menlo" pitchFamily="34" charset="-122"/>
-                <a:cs typeface="Menlo" pitchFamily="34" charset="-120"/>
-              </a:rPr>
-              <a:t>$ </a:t>
-            </a:r>
-            <a:pPr indent="0" marL="0">
-              <a:spcAft>
-                <a:spcPts val="1000"/>
-              </a:spcAft>
-              <a:buNone/>
-            </a:pPr>
-            <a:r>
-              <a:rPr lang="en-US" sz="1600" dirty="0">
-                <a:solidFill>
-                  <a:srgbClr val="FFFFFF"/>
-                </a:solidFill>
-                <a:latin typeface="Menlo" pitchFamily="34" charset="0"/>
-                <a:ea typeface="Menlo" pitchFamily="34" charset="-122"/>
-                <a:cs typeface="Menlo" pitchFamily="34" charset="-120"/>
-              </a:rPr>
-              <a:t>make test scenarios/site</a:t>
-            </a:r>
-            <a:endParaRPr lang="en-US" sz="1600" dirty="0"/>
-          </a:p>
-        </p:txBody>
-      </p:sp>
-      <p:sp>
-        <p:nvSpPr>
-          <p:cNvPr id="8" name="node-215"/>
+        </p:txBody>
+      </p:sp>
+      <p:sp>
+        <p:nvSpPr>
+          <p:cNvPr id="8" name="node-209"/>
           <p:cNvSpPr/>
           <p:nvPr/>
         </p:nvSpPr>
@@ -16497,7 +16485,7 @@
       </p:sp>
       <p:pic>
         <p:nvPicPr>
-          <p:cNvPr id="9" name="icon-216" descr="preencoded.png">    </p:cNvPr>
+          <p:cNvPr id="9" name="icon-210" descr="preencoded.png">    </p:cNvPr>
           <p:cNvPicPr>
             <a:picLocks noChangeAspect="1"/>
           </p:cNvPicPr>
@@ -16521,7 +16509,7 @@
       </p:pic>
       <p:sp>
         <p:nvSpPr>
-          <p:cNvPr id="10" name="text-217"/>
+          <p:cNvPr id="10" name="text-211"/>
           <p:cNvSpPr txBox="1"/>
           <p:nvPr/>
         </p:nvSpPr>
@@ -16557,7 +16545,7 @@
       </p:sp>
       <p:sp>
         <p:nvSpPr>
-          <p:cNvPr id="11" name="text-218"/>
+          <p:cNvPr id="11" name="text-212"/>
           <p:cNvSpPr txBox="1"/>
           <p:nvPr/>
         </p:nvSpPr>
@@ -16585,7 +16573,7 @@
                   <a:schemeClr val="tx2"/>
                 </a:solidFill>
               </a:rPr>
-              <a:t>Bun 1.4+, git, and an AI agent: Claude Code, Codex, Cursor or Kiro</a:t>
+              <a:t>git and an AI agent: Claude Code, Codex, Cursor or Kiro</a:t>
             </a:r>
             <a:endParaRPr lang="en-US" sz="1400" dirty="0"/>
           </a:p>
@@ -16593,7 +16581,7 @@
       </p:sp>
       <p:sp>
         <p:nvSpPr>
-          <p:cNvPr id="12" name="node-219"/>
+          <p:cNvPr id="12" name="node-213"/>
           <p:cNvSpPr/>
           <p:nvPr/>
         </p:nvSpPr>
@@ -16613,7 +16601,7 @@
       </p:sp>
       <p:pic>
         <p:nvPicPr>
-          <p:cNvPr id="13" name="icon-220" descr="preencoded.png">    </p:cNvPr>
+          <p:cNvPr id="13" name="icon-214" descr="preencoded.png">    </p:cNvPr>
           <p:cNvPicPr>
             <a:picLocks noChangeAspect="1"/>
           </p:cNvPicPr>
@@ -16637,7 +16625,7 @@
       </p:pic>
       <p:sp>
         <p:nvSpPr>
-          <p:cNvPr id="14" name="text-221"/>
+          <p:cNvPr id="14" name="text-215"/>
           <p:cNvSpPr txBox="1"/>
           <p:nvPr/>
         </p:nvSpPr>
@@ -16665,7 +16653,7 @@
                   <a:schemeClr val="tx1"/>
                 </a:solidFill>
               </a:rPr>
-              <a:t>Ask for</a:t>
+              <a:t>make setup installs</a:t>
             </a:r>
             <a:endParaRPr lang="en-US" sz="1700" dirty="0"/>
           </a:p>
@@ -16673,7 +16661,7 @@
       </p:sp>
       <p:sp>
         <p:nvSpPr>
-          <p:cNvPr id="15" name="text-222"/>
+          <p:cNvPr id="15" name="text-216"/>
           <p:cNvSpPr txBox="1"/>
           <p:nvPr/>
         </p:nvSpPr>
@@ -16701,7 +16689,7 @@
                   <a:schemeClr val="tx2"/>
                 </a:solidFill>
               </a:rPr>
-              <a:t>the QA user and LAB_ID, for .env.staging.local</a:t>
+              <a:t>Bun, the packages, Chromium and the agent’s browser skill</a:t>
             </a:r>
             <a:endParaRPr lang="en-US" sz="1400" dirty="0"/>
           </a:p>
@@ -16709,7 +16697,7 @@
       </p:sp>
       <p:sp>
         <p:nvSpPr>
-          <p:cNvPr id="16" name="node-223"/>
+          <p:cNvPr id="16" name="node-217"/>
           <p:cNvSpPr/>
           <p:nvPr/>
         </p:nvSpPr>
@@ -16729,7 +16717,7 @@
       </p:sp>
       <p:pic>
         <p:nvPicPr>
-          <p:cNvPr id="17" name="icon-224" descr="preencoded.png">    </p:cNvPr>
+          <p:cNvPr id="17" name="icon-218" descr="preencoded.png">    </p:cNvPr>
           <p:cNvPicPr>
             <a:picLocks noChangeAspect="1"/>
           </p:cNvPicPr>
@@ -16753,7 +16741,7 @@
       </p:pic>
       <p:sp>
         <p:nvSpPr>
-          <p:cNvPr id="18" name="text-225"/>
+          <p:cNvPr id="18" name="text-219"/>
           <p:cNvSpPr txBox="1"/>
           <p:nvPr/>
         </p:nvSpPr>
@@ -16781,7 +16769,7 @@
                   <a:schemeClr val="tx1"/>
                 </a:solidFill>
               </a:rPr>
-              <a:t>Never committed</a:t>
+              <a:t>Ask for</a:t>
             </a:r>
             <a:endParaRPr lang="en-US" sz="1700" dirty="0"/>
           </a:p>
@@ -16789,7 +16777,7 @@
       </p:sp>
       <p:sp>
         <p:nvSpPr>
-          <p:cNvPr id="19" name="text-226"/>
+          <p:cNvPr id="19" name="text-220"/>
           <p:cNvSpPr txBox="1"/>
           <p:nvPr/>
         </p:nvSpPr>
@@ -16817,7 +16805,7 @@
                   <a:schemeClr val="tx2"/>
                 </a:solidFill>
               </a:rPr>
-              <a:t>your secrets stay in .env.staging.local, on your machine only</a:t>
+              <a:t>the QA user and LAB_ID, for .env.staging.local</a:t>
             </a:r>
             <a:endParaRPr lang="en-US" sz="1400" dirty="0"/>
           </a:p>
@@ -16933,7 +16921,7 @@
       </p:sp>
       <p:sp>
         <p:nvSpPr>
-          <p:cNvPr id="3" name="card-227"/>
+          <p:cNvPr id="3" name="card-221"/>
           <p:cNvSpPr/>
           <p:nvPr/>
         </p:nvSpPr>
@@ -16967,7 +16955,7 @@
       </p:sp>
       <p:sp>
         <p:nvSpPr>
-          <p:cNvPr id="4" name="text-228"/>
+          <p:cNvPr id="4" name="text-222"/>
           <p:cNvSpPr txBox="1"/>
           <p:nvPr/>
         </p:nvSpPr>
@@ -17006,7 +16994,7 @@
       </p:sp>
       <p:sp>
         <p:nvSpPr>
-          <p:cNvPr id="5" name="text-229"/>
+          <p:cNvPr id="5" name="text-223"/>
           <p:cNvSpPr txBox="1"/>
           <p:nvPr/>
         </p:nvSpPr>
@@ -17306,7 +17294,7 @@
       </p:sp>
       <p:sp>
         <p:nvSpPr>
-          <p:cNvPr id="6" name="text-230"/>
+          <p:cNvPr id="6" name="text-224"/>
           <p:cNvSpPr txBox="1"/>
           <p:nvPr/>
         </p:nvSpPr>
@@ -17345,7 +17333,7 @@
       </p:sp>
       <p:sp>
         <p:nvSpPr>
-          <p:cNvPr id="7" name="text-231"/>
+          <p:cNvPr id="7" name="text-225"/>
           <p:cNvSpPr txBox="1"/>
           <p:nvPr/>
         </p:nvSpPr>
@@ -17381,7 +17369,7 @@
       </p:sp>
       <p:sp>
         <p:nvSpPr>
-          <p:cNvPr id="8" name="text-232"/>
+          <p:cNvPr id="8" name="text-226"/>
           <p:cNvSpPr txBox="1"/>
           <p:nvPr/>
         </p:nvSpPr>
@@ -17417,7 +17405,7 @@
       </p:sp>
       <p:sp>
         <p:nvSpPr>
-          <p:cNvPr id="9" name="text-233"/>
+          <p:cNvPr id="9" name="text-227"/>
           <p:cNvSpPr txBox="1"/>
           <p:nvPr/>
         </p:nvSpPr>
@@ -17456,7 +17444,7 @@
       </p:sp>
       <p:sp>
         <p:nvSpPr>
-          <p:cNvPr id="10" name="text-234"/>
+          <p:cNvPr id="10" name="text-228"/>
           <p:cNvSpPr txBox="1"/>
           <p:nvPr/>
         </p:nvSpPr>
@@ -17492,7 +17480,7 @@
       </p:sp>
       <p:sp>
         <p:nvSpPr>
-          <p:cNvPr id="11" name="text-235"/>
+          <p:cNvPr id="11" name="text-229"/>
           <p:cNvSpPr txBox="1"/>
           <p:nvPr/>
         </p:nvSpPr>
@@ -17528,7 +17516,7 @@
       </p:sp>
       <p:sp>
         <p:nvSpPr>
-          <p:cNvPr id="12" name="text-236"/>
+          <p:cNvPr id="12" name="text-230"/>
           <p:cNvSpPr txBox="1"/>
           <p:nvPr/>
         </p:nvSpPr>
@@ -17567,7 +17555,7 @@
       </p:sp>
       <p:sp>
         <p:nvSpPr>
-          <p:cNvPr id="13" name="text-237"/>
+          <p:cNvPr id="13" name="text-231"/>
           <p:cNvSpPr txBox="1"/>
           <p:nvPr/>
         </p:nvSpPr>
@@ -17603,7 +17591,7 @@
       </p:sp>
       <p:sp>
         <p:nvSpPr>
-          <p:cNvPr id="14" name="text-238"/>
+          <p:cNvPr id="14" name="text-232"/>
           <p:cNvSpPr txBox="1"/>
           <p:nvPr/>
         </p:nvSpPr>
@@ -17639,7 +17627,7 @@
       </p:sp>
       <p:sp>
         <p:nvSpPr>
-          <p:cNvPr id="15" name="text-239"/>
+          <p:cNvPr id="15" name="text-233"/>
           <p:cNvSpPr txBox="1"/>
           <p:nvPr/>
         </p:nvSpPr>
@@ -17678,7 +17666,7 @@
       </p:sp>
       <p:sp>
         <p:nvSpPr>
-          <p:cNvPr id="16" name="text-240"/>
+          <p:cNvPr id="16" name="text-234"/>
           <p:cNvSpPr txBox="1"/>
           <p:nvPr/>
         </p:nvSpPr>
@@ -17714,7 +17702,7 @@
       </p:sp>
       <p:sp>
         <p:nvSpPr>
-          <p:cNvPr id="17" name="text-241"/>
+          <p:cNvPr id="17" name="text-235"/>
           <p:cNvSpPr txBox="1"/>
           <p:nvPr/>
         </p:nvSpPr>
@@ -17750,7 +17738,7 @@
       </p:sp>
       <p:sp>
         <p:nvSpPr>
-          <p:cNvPr id="18" name="card-242"/>
+          <p:cNvPr id="18" name="card-236"/>
           <p:cNvSpPr/>
           <p:nvPr/>
         </p:nvSpPr>
@@ -17772,7 +17760,7 @@
       </p:sp>
       <p:sp>
         <p:nvSpPr>
-          <p:cNvPr id="19" name="text-243"/>
+          <p:cNvPr id="19" name="text-237"/>
           <p:cNvSpPr txBox="1"/>
           <p:nvPr/>
         </p:nvSpPr>

--- a/docs/obi-e2e-onboarding.pptx
+++ b/docs/obi-e2e-onboarding.pptx
@@ -1618,7 +1618,7 @@
           <a:p>
             <a:r>
               <a:rPr lang="en-US" dirty="0"/>
-              <a:t>Every morning at 08:00 Swiss time both suites run on staging, and when the web app releases both suites run on staging in a Teams thread named after the release. A merge to this repository’s main runs both suites on the preview, which is the web app’s main branch on the staging backend; a merge to the web app’s main runs the regular suite there once that build is live. A manual run picks its deployment, and ticking “slow” adds the slow suite to the same thread; today it is the only way to run on production. At the same time Lighthouse measures the public website’s speed on staging and production. Each run gets its own Teams thread and its own report folder, and runs never cancel each other.</a:t>
+              <a:t>Every morning at 08:00 Swiss time both suites run on staging, and when the web app releases both suites run on staging in a Teams thread named after the release. A merge to this repository’s main runs both suites on the preview, which is the web app’s main branch on the staging backend. A manual run picks its deployment, and ticking “slow” adds the slow suite to the same thread; today it is the only way to run on production. At the same time Lighthouse measures the public website’s speed on staging and production. Each run gets its own Teams thread and its own report folder, and runs never cancel each other.</a:t>
             </a:r>
             <a:endParaRPr lang="en-US" dirty="0"/>
           </a:p>
@@ -15758,173 +15758,13 @@
       </p:sp>
       <p:sp>
         <p:nvSpPr>
-          <p:cNvPr id="32" name="node-137"/>
-          <p:cNvSpPr/>
-          <p:nvPr/>
-        </p:nvSpPr>
-        <p:spPr>
-          <a:xfrm>
-            <a:off x="713232" y="4041648"/>
-            <a:ext cx="402336" cy="402336"/>
-          </a:xfrm>
-          <a:prstGeom prst="ellipse">
-            <a:avLst/>
-          </a:prstGeom>
-          <a:solidFill>
-            <a:schemeClr val="tx1"/>
-          </a:solidFill>
-          <a:ln/>
-        </p:spPr>
-      </p:sp>
-      <p:pic>
-        <p:nvPicPr>
-          <p:cNvPr id="33" name="icon-138" descr="preencoded.png">    </p:cNvPr>
-          <p:cNvPicPr>
-            <a:picLocks noChangeAspect="1"/>
-          </p:cNvPicPr>
-          <p:nvPr/>
-        </p:nvPicPr>
-        <p:blipFill>
-          <a:blip r:embed="rId4"/>
-          <a:stretch>
-            <a:fillRect/>
-          </a:stretch>
-        </p:blipFill>
-        <p:spPr>
-          <a:xfrm>
-            <a:off x="813816" y="4142232"/>
-            <a:ext cx="201168" cy="201168"/>
-          </a:xfrm>
-          <a:prstGeom prst="rect">
-            <a:avLst/>
-          </a:prstGeom>
-        </p:spPr>
-      </p:pic>
-      <p:sp>
-        <p:nvSpPr>
-          <p:cNvPr id="34" name="text-139"/>
-          <p:cNvSpPr txBox="1"/>
-          <p:nvPr/>
-        </p:nvSpPr>
-        <p:spPr>
-          <a:xfrm>
-            <a:off x="1325880" y="3968496"/>
-            <a:ext cx="2743200" cy="548640"/>
-          </a:xfrm>
-          <a:prstGeom prst="rect">
-            <a:avLst/>
-          </a:prstGeom>
-          <a:noFill/>
-          <a:ln/>
-        </p:spPr>
-        <p:txBody>
-          <a:bodyPr wrap="square" lIns="0" tIns="0" rIns="0" bIns="0" rtlCol="0" anchor="ctr"/>
-          <a:lstStyle/>
-          <a:p>
-            <a:pPr indent="0" marL="0">
-              <a:buNone/>
-            </a:pPr>
-            <a:r>
-              <a:rPr lang="en-US" sz="1600" b="1" dirty="0">
-                <a:solidFill>
-                  <a:schemeClr val="tx1"/>
-                </a:solidFill>
-              </a:rPr>
-              <a:t>Merge to web-app main</a:t>
-            </a:r>
-            <a:endParaRPr lang="en-US" sz="1600" dirty="0"/>
-          </a:p>
-        </p:txBody>
-      </p:sp>
-      <p:sp>
-        <p:nvSpPr>
-          <p:cNvPr id="35" name="card-140"/>
-          <p:cNvSpPr/>
-          <p:nvPr/>
-        </p:nvSpPr>
-        <p:spPr>
-          <a:xfrm>
-            <a:off x="4160520" y="4078224"/>
-            <a:ext cx="914400" cy="329184"/>
-          </a:xfrm>
-          <a:prstGeom prst="roundRect">
-            <a:avLst>
-              <a:gd name="adj" fmla="val 50000"/>
-            </a:avLst>
-          </a:prstGeom>
-          <a:solidFill>
-            <a:schemeClr val="accent1"/>
-          </a:solidFill>
-          <a:ln/>
-        </p:spPr>
-      </p:sp>
-      <p:sp>
-        <p:nvSpPr>
-          <p:cNvPr id="36" name="text-141"/>
-          <p:cNvSpPr txBox="1"/>
-          <p:nvPr/>
-        </p:nvSpPr>
-        <p:spPr>
-          <a:xfrm>
-            <a:off x="4160520" y="4078224"/>
-            <a:ext cx="914400" cy="329184"/>
-          </a:xfrm>
-          <a:prstGeom prst="rect">
-            <a:avLst/>
-          </a:prstGeom>
-          <a:noFill/>
-          <a:ln/>
-        </p:spPr>
-        <p:txBody>
-          <a:bodyPr wrap="square" lIns="0" tIns="0" rIns="0" bIns="0" rtlCol="0" anchor="ctr"/>
-          <a:lstStyle/>
-          <a:p>
-            <a:pPr algn="ctr" indent="0" marL="0">
-              <a:buNone/>
-            </a:pPr>
-            <a:r>
-              <a:rPr lang="en-US" sz="1200" b="1" dirty="0">
-                <a:solidFill>
-                  <a:schemeClr val="bg1"/>
-                </a:solidFill>
-              </a:rPr>
-              <a:t>Regular</a:t>
-            </a:r>
-            <a:endParaRPr lang="en-US" sz="1200" dirty="0"/>
-          </a:p>
-        </p:txBody>
-      </p:sp>
-      <p:sp>
-        <p:nvSpPr>
-          <p:cNvPr id="37" name="card-142"/>
-          <p:cNvSpPr/>
-          <p:nvPr/>
-        </p:nvSpPr>
-        <p:spPr>
-          <a:xfrm>
-            <a:off x="548640" y="4590288"/>
-            <a:ext cx="11091672" cy="548640"/>
-          </a:xfrm>
-          <a:prstGeom prst="roundRect">
-            <a:avLst>
-              <a:gd name="adj" fmla="val 13333"/>
-            </a:avLst>
-          </a:prstGeom>
-          <a:solidFill>
-            <a:schemeClr val="bg2"/>
-          </a:solidFill>
-          <a:ln/>
-        </p:spPr>
-      </p:sp>
-      <p:sp>
-        <p:nvSpPr>
           <p:cNvPr id="38" name="node-143"/>
           <p:cNvSpPr/>
           <p:nvPr/>
         </p:nvSpPr>
         <p:spPr>
           <a:xfrm>
-            <a:off x="713232" y="4663440"/>
+            <a:off x="713232" y="4041648"/>
             <a:ext cx="402336" cy="402336"/>
           </a:xfrm>
           <a:prstGeom prst="ellipse">
@@ -15952,7 +15792,7 @@
         </p:blipFill>
         <p:spPr>
           <a:xfrm>
-            <a:off x="813816" y="4764024"/>
+            <a:off x="813816" y="4142232"/>
             <a:ext cx="201168" cy="201168"/>
           </a:xfrm>
           <a:prstGeom prst="rect">
@@ -15968,7 +15808,7 @@
         </p:nvSpPr>
         <p:spPr>
           <a:xfrm>
-            <a:off x="1325880" y="4590288"/>
+            <a:off x="1325880" y="3968496"/>
             <a:ext cx="2743200" cy="548640"/>
           </a:xfrm>
           <a:prstGeom prst="rect">
@@ -16004,7 +15844,7 @@
         </p:nvSpPr>
         <p:spPr>
           <a:xfrm>
-            <a:off x="4160520" y="4700016"/>
+            <a:off x="4160520" y="4078224"/>
             <a:ext cx="1005840" cy="329184"/>
           </a:xfrm>
           <a:prstGeom prst="roundRect">
@@ -16031,7 +15871,7 @@
         </p:nvSpPr>
         <p:spPr>
           <a:xfrm>
-            <a:off x="4160520" y="4700016"/>
+            <a:off x="4160520" y="4078224"/>
             <a:ext cx="1005840" cy="329184"/>
           </a:xfrm>
           <a:prstGeom prst="rect">
@@ -16067,7 +15907,7 @@
         </p:nvSpPr>
         <p:spPr>
           <a:xfrm>
-            <a:off x="6675120" y="4700016"/>
+            <a:off x="6675120" y="4078224"/>
             <a:ext cx="1005840" cy="329184"/>
           </a:xfrm>
           <a:prstGeom prst="roundRect">
@@ -16094,7 +15934,7 @@
         </p:nvSpPr>
         <p:spPr>
           <a:xfrm>
-            <a:off x="6675120" y="4700016"/>
+            <a:off x="6675120" y="4078224"/>
             <a:ext cx="1005840" cy="329184"/>
           </a:xfrm>
           <a:prstGeom prst="rect">
@@ -16130,7 +15970,7 @@
         </p:nvSpPr>
         <p:spPr>
           <a:xfrm>
-            <a:off x="9189720" y="4700016"/>
+            <a:off x="9189720" y="4078224"/>
             <a:ext cx="1005840" cy="329184"/>
           </a:xfrm>
           <a:prstGeom prst="roundRect">
@@ -16157,7 +15997,7 @@
         </p:nvSpPr>
         <p:spPr>
           <a:xfrm>
-            <a:off x="9189720" y="4700016"/>
+            <a:off x="9189720" y="4078224"/>
             <a:ext cx="1005840" cy="329184"/>
           </a:xfrm>
           <a:prstGeom prst="rect">
@@ -16184,6 +16024,28 @@
             <a:endParaRPr lang="en-US" sz="1200" dirty="0"/>
           </a:p>
         </p:txBody>
+      </p:sp>
+      <p:sp>
+        <p:nvSpPr>
+          <p:cNvPr id="55" name="card-band"/>
+          <p:cNvSpPr/>
+          <p:nvPr/>
+        </p:nvSpPr>
+        <p:spPr>
+          <a:xfrm>
+            <a:off x="548640" y="4590288"/>
+            <a:ext cx="11091672" cy="548640"/>
+          </a:xfrm>
+          <a:prstGeom prst="roundRect">
+            <a:avLst>
+              <a:gd name="adj" fmla="val 13333"/>
+            </a:avLst>
+          </a:prstGeom>
+          <a:solidFill>
+            <a:schemeClr val="bg2"/>
+          </a:solidFill>
+          <a:ln/>
+        </p:spPr>
       </p:sp>
       <p:sp>
         <p:nvSpPr>
@@ -16193,7 +16055,7 @@
         </p:nvSpPr>
         <p:spPr>
           <a:xfrm>
-            <a:off x="713232" y="5285232"/>
+            <a:off x="713232" y="4663440"/>
             <a:ext cx="402336" cy="402336"/>
           </a:xfrm>
           <a:prstGeom prst="ellipse">
@@ -16221,7 +16083,7 @@
         </p:blipFill>
         <p:spPr>
           <a:xfrm>
-            <a:off x="813816" y="5385816"/>
+            <a:off x="813816" y="4764024"/>
             <a:ext cx="201168" cy="201168"/>
           </a:xfrm>
           <a:prstGeom prst="rect">
@@ -16237,7 +16099,7 @@
         </p:nvSpPr>
         <p:spPr>
           <a:xfrm>
-            <a:off x="1325880" y="5212080"/>
+            <a:off x="1325880" y="4590288"/>
             <a:ext cx="2743200" cy="548640"/>
           </a:xfrm>
           <a:prstGeom prst="rect">
@@ -16273,7 +16135,7 @@
         </p:nvSpPr>
         <p:spPr>
           <a:xfrm>
-            <a:off x="6675120" y="5321808"/>
+            <a:off x="6675120" y="4700016"/>
             <a:ext cx="1371600" cy="329184"/>
           </a:xfrm>
           <a:prstGeom prst="roundRect">
@@ -16295,7 +16157,7 @@
         </p:nvSpPr>
         <p:spPr>
           <a:xfrm>
-            <a:off x="6675120" y="5321808"/>
+            <a:off x="6675120" y="4700016"/>
             <a:ext cx="1371600" cy="329184"/>
           </a:xfrm>
           <a:prstGeom prst="rect">
@@ -16331,7 +16193,7 @@
         </p:nvSpPr>
         <p:spPr>
           <a:xfrm>
-            <a:off x="9189720" y="5321808"/>
+            <a:off x="9189720" y="4700016"/>
             <a:ext cx="1371600" cy="329184"/>
           </a:xfrm>
           <a:prstGeom prst="roundRect">
@@ -16353,7 +16215,7 @@
         </p:nvSpPr>
         <p:spPr>
           <a:xfrm>
-            <a:off x="9189720" y="5321808"/>
+            <a:off x="9189720" y="4700016"/>
             <a:ext cx="1371600" cy="329184"/>
           </a:xfrm>
           <a:prstGeom prst="rect">
@@ -16389,7 +16251,7 @@
         </p:nvSpPr>
         <p:spPr>
           <a:xfrm>
-            <a:off x="548640" y="5870448"/>
+            <a:off x="548640" y="5440680"/>
             <a:ext cx="10972800" cy="320040"/>
           </a:xfrm>
           <a:prstGeom prst="rect">
